--- a/CUBE.pptx
+++ b/CUBE.pptx
@@ -3,26 +3,26 @@
 <p:presentation xmlns:a="http://schemas.openxmlformats.org/drawingml/2006/main" xmlns:r="http://schemas.openxmlformats.org/officeDocument/2006/relationships" xmlns:p="http://schemas.openxmlformats.org/presentationml/2006/main">
   <p:sldMasterIdLst>
     <p:sldMasterId id="2147483648" r:id="rId1"/>
-    <p:sldMasterId id="2147483659" r:id="rId3"/>
+    <p:sldMasterId id="2147483659" r:id="rId2"/>
   </p:sldMasterIdLst>
   <p:notesMasterIdLst>
-    <p:notesMasterId r:id="rId6"/>
+    <p:notesMasterId r:id="rId9"/>
   </p:notesMasterIdLst>
   <p:handoutMasterIdLst>
-    <p:handoutMasterId r:id="rId11"/>
+    <p:handoutMasterId r:id="rId10"/>
   </p:handoutMasterIdLst>
   <p:sldIdLst>
-    <p:sldId id="257" r:id="rId4"/>
-    <p:sldId id="261" r:id="rId5"/>
-    <p:sldId id="265" r:id="rId7"/>
-    <p:sldId id="271" r:id="rId8"/>
-    <p:sldId id="267" r:id="rId9"/>
-    <p:sldId id="259" r:id="rId10"/>
+    <p:sldId id="257" r:id="rId3"/>
+    <p:sldId id="261" r:id="rId4"/>
+    <p:sldId id="265" r:id="rId5"/>
+    <p:sldId id="271" r:id="rId6"/>
+    <p:sldId id="267" r:id="rId7"/>
+    <p:sldId id="259" r:id="rId8"/>
   </p:sldIdLst>
   <p:sldSz cx="12192000" cy="6858000"/>
-  <p:notesSz cx="7103745" cy="10234295"/>
+  <p:notesSz cx="7104063" cy="10234613"/>
   <p:custDataLst>
-    <p:tags r:id="rId15"/>
+    <p:tags r:id="rId11"/>
   </p:custDataLst>
   <p:defaultTextStyle>
     <a:defPPr>
@@ -220,6 +220,7 @@
           <a:p>
             <a:fld id="{0F9B84EA-7D68-4D60-9CB1-D50884785D1C}" type="datetimeFigureOut">
               <a:rPr lang="en-US" smtClean="0"/>
+              <a:t>4/27/2026</a:t>
             </a:fld>
             <a:endParaRPr lang="en-US"/>
           </a:p>
@@ -285,6 +286,7 @@
           <a:p>
             <a:fld id="{8D4E0FC9-F1F8-4FAE-9988-3BA365CFD46F}" type="slidenum">
               <a:rPr lang="en-US" smtClean="0"/>
+              <a:t>‹#›</a:t>
             </a:fld>
             <a:endParaRPr lang="en-US"/>
           </a:p>
@@ -378,6 +380,7 @@
           <a:p>
             <a:fld id="{D6C8D182-E4C8-4120-9249-FC9774456FFA}" type="datetimeFigureOut">
               <a:rPr lang="en-US" smtClean="0"/>
+              <a:t>4/27/2026</a:t>
             </a:fld>
             <a:endParaRPr lang="en-US"/>
           </a:p>
@@ -444,7 +447,6 @@
               <a:rPr lang="en-US"/>
               <a:t>Edit Master text styles</a:t>
             </a:r>
-            <a:endParaRPr lang="en-US"/>
           </a:p>
           <a:p>
             <a:pPr lvl="1"/>
@@ -452,7 +454,6 @@
               <a:rPr lang="en-US"/>
               <a:t>Second level</a:t>
             </a:r>
-            <a:endParaRPr lang="en-US"/>
           </a:p>
           <a:p>
             <a:pPr lvl="2"/>
@@ -460,7 +461,6 @@
               <a:rPr lang="en-US"/>
               <a:t>Third level</a:t>
             </a:r>
-            <a:endParaRPr lang="en-US"/>
           </a:p>
           <a:p>
             <a:pPr lvl="3"/>
@@ -468,7 +468,6 @@
               <a:rPr lang="en-US"/>
               <a:t>Fourth level</a:t>
             </a:r>
-            <a:endParaRPr lang="en-US"/>
           </a:p>
           <a:p>
             <a:pPr lvl="4"/>
@@ -476,7 +475,6 @@
               <a:rPr lang="en-US"/>
               <a:t>Fifth level</a:t>
             </a:r>
-            <a:endParaRPr lang="en-US"/>
           </a:p>
         </p:txBody>
       </p:sp>
@@ -540,6 +538,7 @@
           <a:p>
             <a:fld id="{85D0DACE-38E0-42D2-9336-2B707D34BC6D}" type="slidenum">
               <a:rPr lang="en-US" smtClean="0"/>
+              <a:t>‹#›</a:t>
             </a:fld>
             <a:endParaRPr lang="en-US"/>
           </a:p>
@@ -708,6 +707,7 @@
           <a:p>
             <a:fld id="{85D0DACE-38E0-42D2-9336-2B707D34BC6D}" type="slidenum">
               <a:rPr lang="en-US" smtClean="0"/>
+              <a:t>2</a:t>
             </a:fld>
             <a:endParaRPr lang="en-US"/>
           </a:p>
@@ -786,6 +786,7 @@
           <a:p>
             <a:fld id="{85D0DACE-38E0-42D2-9336-2B707D34BC6D}" type="slidenum">
               <a:rPr lang="en-US" smtClean="0"/>
+              <a:t>5</a:t>
             </a:fld>
             <a:endParaRPr lang="en-US"/>
           </a:p>
@@ -873,6 +874,7 @@
           <a:p>
             <a:fld id="{760FBDFE-C587-4B4C-A407-44438C67B59E}" type="datetimeFigureOut">
               <a:rPr lang="en-US" smtClean="0"/>
+              <a:t>4/27/2026</a:t>
             </a:fld>
             <a:endParaRPr lang="en-US"/>
           </a:p>
@@ -914,6 +916,7 @@
           <a:p>
             <a:fld id="{49AE70B2-8BF9-45C0-BB95-33D1B9D3A854}" type="slidenum">
               <a:rPr lang="en-US" smtClean="0"/>
+              <a:t>‹#›</a:t>
             </a:fld>
             <a:endParaRPr lang="en-US"/>
           </a:p>
@@ -1038,6 +1041,7 @@
           <a:p>
             <a:fld id="{760FBDFE-C587-4B4C-A407-44438C67B59E}" type="datetimeFigureOut">
               <a:rPr lang="en-US" smtClean="0"/>
+              <a:t>4/27/2026</a:t>
             </a:fld>
             <a:endParaRPr lang="en-US"/>
           </a:p>
@@ -1079,6 +1083,7 @@
           <a:p>
             <a:fld id="{49AE70B2-8BF9-45C0-BB95-33D1B9D3A854}" type="slidenum">
               <a:rPr lang="en-US" smtClean="0"/>
+              <a:t>‹#›</a:t>
             </a:fld>
             <a:endParaRPr lang="en-US"/>
           </a:p>
@@ -1164,7 +1169,7 @@
 </file>
 
 <file path=ppt/slideLayouts/slideLayout11.xml><?xml version="1.0" encoding="utf-8"?>
-<p:sldLayout xmlns:a="http://schemas.openxmlformats.org/drawingml/2006/main" xmlns:r="http://schemas.openxmlformats.org/officeDocument/2006/relationships" xmlns:p="http://schemas.openxmlformats.org/presentationml/2006/main" type="title" preserve="1" showMasterSp="0">
+<p:sldLayout xmlns:a="http://schemas.openxmlformats.org/drawingml/2006/main" xmlns:r="http://schemas.openxmlformats.org/officeDocument/2006/relationships" xmlns:p="http://schemas.openxmlformats.org/presentationml/2006/main" showMasterSp="0" type="title" preserve="1">
   <p:cSld name="Title Slide">
     <p:spTree>
       <p:nvGrpSpPr>
@@ -1186,7 +1191,7 @@
           <p:cNvSpPr/>
           <p:nvPr>
             <p:custDataLst>
-              <p:tags r:id="rId2"/>
+              <p:tags r:id="rId1"/>
             </p:custDataLst>
           </p:nvPr>
         </p:nvSpPr>
@@ -1254,7 +1259,7 @@
           <p:cNvSpPr/>
           <p:nvPr>
             <p:custDataLst>
-              <p:tags r:id="rId3"/>
+              <p:tags r:id="rId2"/>
             </p:custDataLst>
           </p:nvPr>
         </p:nvSpPr>
@@ -1324,7 +1329,7 @@
           <p:cNvSpPr/>
           <p:nvPr>
             <p:custDataLst>
-              <p:tags r:id="rId4"/>
+              <p:tags r:id="rId3"/>
             </p:custDataLst>
           </p:nvPr>
         </p:nvSpPr>
@@ -1392,7 +1397,7 @@
           <p:cNvCxnSpPr/>
           <p:nvPr>
             <p:custDataLst>
-              <p:tags r:id="rId5"/>
+              <p:tags r:id="rId4"/>
             </p:custDataLst>
           </p:nvPr>
         </p:nvCxnSpPr>
@@ -1442,7 +1447,7 @@
           <p:cNvSpPr/>
           <p:nvPr>
             <p:custDataLst>
-              <p:tags r:id="rId6"/>
+              <p:tags r:id="rId5"/>
             </p:custDataLst>
           </p:nvPr>
         </p:nvSpPr>
@@ -1565,7 +1570,7 @@
           <p:cNvSpPr/>
           <p:nvPr>
             <p:custDataLst>
-              <p:tags r:id="rId7"/>
+              <p:tags r:id="rId6"/>
             </p:custDataLst>
           </p:nvPr>
         </p:nvSpPr>
@@ -1692,7 +1697,7 @@
           <p:cNvSpPr/>
           <p:nvPr>
             <p:custDataLst>
-              <p:tags r:id="rId8"/>
+              <p:tags r:id="rId7"/>
             </p:custDataLst>
           </p:nvPr>
         </p:nvSpPr>
@@ -1823,7 +1828,7 @@
           <p:cNvSpPr/>
           <p:nvPr>
             <p:custDataLst>
-              <p:tags r:id="rId9"/>
+              <p:tags r:id="rId8"/>
             </p:custDataLst>
           </p:nvPr>
         </p:nvSpPr>
@@ -1952,7 +1957,7 @@
           <p:nvPr>
             <p:ph type="body" idx="3" hasCustomPrompt="1"/>
             <p:custDataLst>
-              <p:tags r:id="rId10"/>
+              <p:tags r:id="rId9"/>
             </p:custDataLst>
           </p:nvPr>
         </p:nvSpPr>
@@ -2016,7 +2021,7 @@
           <p:nvPr>
             <p:ph type="body" idx="2" hasCustomPrompt="1"/>
             <p:custDataLst>
-              <p:tags r:id="rId11"/>
+              <p:tags r:id="rId10"/>
             </p:custDataLst>
           </p:nvPr>
         </p:nvSpPr>
@@ -2080,7 +2085,7 @@
           <p:nvPr>
             <p:ph type="title" idx="1" hasCustomPrompt="1"/>
             <p:custDataLst>
-              <p:tags r:id="rId12"/>
+              <p:tags r:id="rId11"/>
             </p:custDataLst>
           </p:nvPr>
         </p:nvSpPr>
@@ -2150,7 +2155,7 @@
           <p:nvPr>
             <p:ph type="dt" sz="half" idx="10"/>
             <p:custDataLst>
-              <p:tags r:id="rId13"/>
+              <p:tags r:id="rId12"/>
             </p:custDataLst>
           </p:nvPr>
         </p:nvSpPr>
@@ -2176,7 +2181,6 @@
               <a:rPr lang="en-US"/>
               <a:t>Date Area</a:t>
             </a:r>
-            <a:endParaRPr lang="en-US"/>
           </a:p>
         </p:txBody>
       </p:sp>
@@ -2189,7 +2193,7 @@
           <p:nvPr>
             <p:ph type="ftr" sz="quarter" idx="11"/>
             <p:custDataLst>
-              <p:tags r:id="rId14"/>
+              <p:tags r:id="rId13"/>
             </p:custDataLst>
           </p:nvPr>
         </p:nvSpPr>
@@ -2224,7 +2228,7 @@
           <p:nvPr>
             <p:ph type="sldNum" sz="quarter" idx="12"/>
             <p:custDataLst>
-              <p:tags r:id="rId15"/>
+              <p:tags r:id="rId14"/>
             </p:custDataLst>
           </p:nvPr>
         </p:nvSpPr>
@@ -2248,6 +2252,7 @@
           <a:p>
             <a:fld id="{515A922F-1294-4387-9CB3-FCC8465D972A}" type="slidenum">
               <a:rPr lang="en-US" smtClean="0"/>
+              <a:t>‹#›</a:t>
             </a:fld>
             <a:endParaRPr lang="en-US"/>
           </a:p>
@@ -2262,7 +2267,7 @@
 </file>
 
 <file path=ppt/slideLayouts/slideLayout12.xml><?xml version="1.0" encoding="utf-8"?>
-<p:sldLayout xmlns:a="http://schemas.openxmlformats.org/drawingml/2006/main" xmlns:r="http://schemas.openxmlformats.org/officeDocument/2006/relationships" xmlns:p="http://schemas.openxmlformats.org/presentationml/2006/main" type="obj" preserve="1" showMasterSp="0">
+<p:sldLayout xmlns:a="http://schemas.openxmlformats.org/drawingml/2006/main" xmlns:r="http://schemas.openxmlformats.org/officeDocument/2006/relationships" xmlns:p="http://schemas.openxmlformats.org/presentationml/2006/main" showMasterSp="0" type="obj" preserve="1">
   <p:cSld name="Title and Content">
     <p:spTree>
       <p:nvGrpSpPr>
@@ -2284,7 +2289,7 @@
           <p:cNvSpPr/>
           <p:nvPr userDrawn="1">
             <p:custDataLst>
-              <p:tags r:id="rId2"/>
+              <p:tags r:id="rId1"/>
             </p:custDataLst>
           </p:nvPr>
         </p:nvSpPr>
@@ -2352,7 +2357,7 @@
           <p:cNvSpPr/>
           <p:nvPr userDrawn="1">
             <p:custDataLst>
-              <p:tags r:id="rId3"/>
+              <p:tags r:id="rId2"/>
             </p:custDataLst>
           </p:nvPr>
         </p:nvSpPr>
@@ -2420,7 +2425,7 @@
           <p:cNvSpPr/>
           <p:nvPr userDrawn="1">
             <p:custDataLst>
-              <p:tags r:id="rId4"/>
+              <p:tags r:id="rId3"/>
             </p:custDataLst>
           </p:nvPr>
         </p:nvSpPr>
@@ -2491,7 +2496,7 @@
           <p:nvPr>
             <p:ph idx="6" hasCustomPrompt="1"/>
             <p:custDataLst>
-              <p:tags r:id="rId5"/>
+              <p:tags r:id="rId4"/>
             </p:custDataLst>
           </p:nvPr>
         </p:nvSpPr>
@@ -2719,7 +2724,7 @@
           <p:nvPr>
             <p:ph type="title" idx="5" hasCustomPrompt="1"/>
             <p:custDataLst>
-              <p:tags r:id="rId6"/>
+              <p:tags r:id="rId5"/>
             </p:custDataLst>
           </p:nvPr>
         </p:nvSpPr>
@@ -2797,7 +2802,7 @@
           <p:nvPr>
             <p:ph type="dt" sz="half" idx="10"/>
             <p:custDataLst>
-              <p:tags r:id="rId7"/>
+              <p:tags r:id="rId6"/>
             </p:custDataLst>
           </p:nvPr>
         </p:nvSpPr>
@@ -2815,7 +2820,6 @@
               <a:rPr lang="en-US"/>
               <a:t>Date Area</a:t>
             </a:r>
-            <a:endParaRPr lang="en-US"/>
           </a:p>
         </p:txBody>
       </p:sp>
@@ -2828,7 +2832,7 @@
           <p:nvPr>
             <p:ph type="ftr" sz="quarter" idx="11"/>
             <p:custDataLst>
-              <p:tags r:id="rId8"/>
+              <p:tags r:id="rId7"/>
             </p:custDataLst>
           </p:nvPr>
         </p:nvSpPr>
@@ -2855,7 +2859,7 @@
           <p:nvPr>
             <p:ph type="sldNum" sz="quarter" idx="12"/>
             <p:custDataLst>
-              <p:tags r:id="rId9"/>
+              <p:tags r:id="rId8"/>
             </p:custDataLst>
           </p:nvPr>
         </p:nvSpPr>
@@ -2871,6 +2875,7 @@
           <a:p>
             <a:fld id="{515A922F-1294-4387-9CB3-FCC8465D972A}" type="slidenum">
               <a:rPr lang="en-US" smtClean="0"/>
+              <a:t>‹#›</a:t>
             </a:fld>
             <a:endParaRPr lang="en-US"/>
           </a:p>
@@ -2885,7 +2890,7 @@
 </file>
 
 <file path=ppt/slideLayouts/slideLayout13.xml><?xml version="1.0" encoding="utf-8"?>
-<p:sldLayout xmlns:a="http://schemas.openxmlformats.org/drawingml/2006/main" xmlns:r="http://schemas.openxmlformats.org/officeDocument/2006/relationships" xmlns:p="http://schemas.openxmlformats.org/presentationml/2006/main" preserve="1" showMasterSp="0" userDrawn="1">
+<p:sldLayout xmlns:a="http://schemas.openxmlformats.org/drawingml/2006/main" xmlns:r="http://schemas.openxmlformats.org/officeDocument/2006/relationships" xmlns:p="http://schemas.openxmlformats.org/presentationml/2006/main" showMasterSp="0" preserve="1" userDrawn="1">
   <p:cSld name="Catalog Slide">
     <p:spTree>
       <p:nvGrpSpPr>
@@ -2910,7 +2915,7 @@
           <p:nvPr>
             <p:ph type="title" idx="1" hasCustomPrompt="1"/>
             <p:custDataLst>
-              <p:tags r:id="rId2"/>
+              <p:tags r:id="rId1"/>
             </p:custDataLst>
           </p:nvPr>
         </p:nvSpPr>
@@ -2980,7 +2985,7 @@
           <p:nvPr>
             <p:ph type="dt" sz="half" idx="10"/>
             <p:custDataLst>
-              <p:tags r:id="rId3"/>
+              <p:tags r:id="rId2"/>
             </p:custDataLst>
           </p:nvPr>
         </p:nvSpPr>
@@ -2998,7 +3003,6 @@
               <a:rPr lang="en-US"/>
               <a:t>Date Area</a:t>
             </a:r>
-            <a:endParaRPr lang="en-US"/>
           </a:p>
         </p:txBody>
       </p:sp>
@@ -3011,7 +3015,7 @@
           <p:nvPr>
             <p:ph type="ftr" sz="quarter" idx="11"/>
             <p:custDataLst>
-              <p:tags r:id="rId4"/>
+              <p:tags r:id="rId3"/>
             </p:custDataLst>
           </p:nvPr>
         </p:nvSpPr>
@@ -3038,7 +3042,7 @@
           <p:nvPr>
             <p:ph type="sldNum" sz="quarter" idx="12"/>
             <p:custDataLst>
-              <p:tags r:id="rId5"/>
+              <p:tags r:id="rId4"/>
             </p:custDataLst>
           </p:nvPr>
         </p:nvSpPr>
@@ -3054,6 +3058,7 @@
           <a:p>
             <a:fld id="{515A922F-1294-4387-9CB3-FCC8465D972A}" type="slidenum">
               <a:rPr lang="en-US" smtClean="0"/>
+              <a:t>‹#›</a:t>
             </a:fld>
             <a:endParaRPr lang="en-US"/>
           </a:p>
@@ -3068,7 +3073,7 @@
 </file>
 
 <file path=ppt/slideLayouts/slideLayout14.xml><?xml version="1.0" encoding="utf-8"?>
-<p:sldLayout xmlns:a="http://schemas.openxmlformats.org/drawingml/2006/main" xmlns:r="http://schemas.openxmlformats.org/officeDocument/2006/relationships" xmlns:p="http://schemas.openxmlformats.org/presentationml/2006/main" type="secHead" preserve="1" showMasterSp="0">
+<p:sldLayout xmlns:a="http://schemas.openxmlformats.org/drawingml/2006/main" xmlns:r="http://schemas.openxmlformats.org/officeDocument/2006/relationships" xmlns:p="http://schemas.openxmlformats.org/presentationml/2006/main" showMasterSp="0" type="secHead" preserve="1">
   <p:cSld name="Section Header">
     <p:spTree>
       <p:nvGrpSpPr>
@@ -3090,7 +3095,7 @@
           <p:cNvSpPr/>
           <p:nvPr>
             <p:custDataLst>
-              <p:tags r:id="rId2"/>
+              <p:tags r:id="rId1"/>
             </p:custDataLst>
           </p:nvPr>
         </p:nvSpPr>
@@ -3158,7 +3163,7 @@
           <p:cNvSpPr/>
           <p:nvPr>
             <p:custDataLst>
-              <p:tags r:id="rId3"/>
+              <p:tags r:id="rId2"/>
             </p:custDataLst>
           </p:nvPr>
         </p:nvSpPr>
@@ -3226,7 +3231,7 @@
           <p:cNvSpPr/>
           <p:nvPr>
             <p:custDataLst>
-              <p:tags r:id="rId4"/>
+              <p:tags r:id="rId3"/>
             </p:custDataLst>
           </p:nvPr>
         </p:nvSpPr>
@@ -3294,7 +3299,7 @@
           <p:cNvCxnSpPr/>
           <p:nvPr>
             <p:custDataLst>
-              <p:tags r:id="rId5"/>
+              <p:tags r:id="rId4"/>
             </p:custDataLst>
           </p:nvPr>
         </p:nvCxnSpPr>
@@ -3344,7 +3349,7 @@
           <p:cNvSpPr/>
           <p:nvPr>
             <p:custDataLst>
-              <p:tags r:id="rId6"/>
+              <p:tags r:id="rId5"/>
             </p:custDataLst>
           </p:nvPr>
         </p:nvSpPr>
@@ -3467,7 +3472,7 @@
           <p:cNvSpPr/>
           <p:nvPr>
             <p:custDataLst>
-              <p:tags r:id="rId7"/>
+              <p:tags r:id="rId6"/>
             </p:custDataLst>
           </p:nvPr>
         </p:nvSpPr>
@@ -3594,7 +3599,7 @@
           <p:cNvSpPr/>
           <p:nvPr>
             <p:custDataLst>
-              <p:tags r:id="rId8"/>
+              <p:tags r:id="rId7"/>
             </p:custDataLst>
           </p:nvPr>
         </p:nvSpPr>
@@ -3725,7 +3730,7 @@
           <p:cNvSpPr/>
           <p:nvPr>
             <p:custDataLst>
-              <p:tags r:id="rId9"/>
+              <p:tags r:id="rId8"/>
             </p:custDataLst>
           </p:nvPr>
         </p:nvSpPr>
@@ -3854,7 +3859,7 @@
           <p:nvPr>
             <p:ph type="body" idx="2" hasCustomPrompt="1"/>
             <p:custDataLst>
-              <p:tags r:id="rId10"/>
+              <p:tags r:id="rId9"/>
             </p:custDataLst>
           </p:nvPr>
         </p:nvSpPr>
@@ -3913,7 +3918,7 @@
           <p:nvPr>
             <p:ph type="title" idx="1" hasCustomPrompt="1"/>
             <p:custDataLst>
-              <p:tags r:id="rId11"/>
+              <p:tags r:id="rId10"/>
             </p:custDataLst>
           </p:nvPr>
         </p:nvSpPr>
@@ -3984,7 +3989,7 @@
           <p:nvPr>
             <p:ph type="dt" sz="half" idx="10"/>
             <p:custDataLst>
-              <p:tags r:id="rId12"/>
+              <p:tags r:id="rId11"/>
             </p:custDataLst>
           </p:nvPr>
         </p:nvSpPr>
@@ -4002,7 +4007,6 @@
               <a:rPr lang="en-US"/>
               <a:t>Date Area</a:t>
             </a:r>
-            <a:endParaRPr lang="en-US"/>
           </a:p>
         </p:txBody>
       </p:sp>
@@ -4015,7 +4019,7 @@
           <p:nvPr>
             <p:ph type="ftr" sz="quarter" idx="11"/>
             <p:custDataLst>
-              <p:tags r:id="rId13"/>
+              <p:tags r:id="rId12"/>
             </p:custDataLst>
           </p:nvPr>
         </p:nvSpPr>
@@ -4042,7 +4046,7 @@
           <p:nvPr>
             <p:ph type="sldNum" sz="quarter" idx="12"/>
             <p:custDataLst>
-              <p:tags r:id="rId14"/>
+              <p:tags r:id="rId13"/>
             </p:custDataLst>
           </p:nvPr>
         </p:nvSpPr>
@@ -4058,6 +4062,7 @@
           <a:p>
             <a:fld id="{515A922F-1294-4387-9CB3-FCC8465D972A}" type="slidenum">
               <a:rPr lang="en-US" smtClean="0"/>
+              <a:t>‹#›</a:t>
             </a:fld>
             <a:endParaRPr lang="en-US"/>
           </a:p>
@@ -4072,7 +4077,7 @@
 </file>
 
 <file path=ppt/slideLayouts/slideLayout15.xml><?xml version="1.0" encoding="utf-8"?>
-<p:sldLayout xmlns:a="http://schemas.openxmlformats.org/drawingml/2006/main" xmlns:r="http://schemas.openxmlformats.org/officeDocument/2006/relationships" xmlns:p="http://schemas.openxmlformats.org/presentationml/2006/main" type="twoObj" preserve="1" showMasterSp="0">
+<p:sldLayout xmlns:a="http://schemas.openxmlformats.org/drawingml/2006/main" xmlns:r="http://schemas.openxmlformats.org/officeDocument/2006/relationships" xmlns:p="http://schemas.openxmlformats.org/presentationml/2006/main" showMasterSp="0" type="twoObj" preserve="1">
   <p:cSld name="Two Content">
     <p:spTree>
       <p:nvGrpSpPr>
@@ -4094,7 +4099,7 @@
           <p:cNvSpPr/>
           <p:nvPr userDrawn="1">
             <p:custDataLst>
-              <p:tags r:id="rId2"/>
+              <p:tags r:id="rId1"/>
             </p:custDataLst>
           </p:nvPr>
         </p:nvSpPr>
@@ -4162,7 +4167,7 @@
           <p:cNvSpPr/>
           <p:nvPr userDrawn="1">
             <p:custDataLst>
-              <p:tags r:id="rId3"/>
+              <p:tags r:id="rId2"/>
             </p:custDataLst>
           </p:nvPr>
         </p:nvSpPr>
@@ -4230,7 +4235,7 @@
           <p:cNvSpPr/>
           <p:nvPr userDrawn="1">
             <p:custDataLst>
-              <p:tags r:id="rId4"/>
+              <p:tags r:id="rId3"/>
             </p:custDataLst>
           </p:nvPr>
         </p:nvSpPr>
@@ -4301,7 +4306,7 @@
           <p:nvPr>
             <p:ph idx="7" hasCustomPrompt="1"/>
             <p:custDataLst>
-              <p:tags r:id="rId5"/>
+              <p:tags r:id="rId4"/>
             </p:custDataLst>
           </p:nvPr>
         </p:nvSpPr>
@@ -4498,7 +4503,7 @@
           <p:nvPr>
             <p:ph idx="6" hasCustomPrompt="1"/>
             <p:custDataLst>
-              <p:tags r:id="rId6"/>
+              <p:tags r:id="rId5"/>
             </p:custDataLst>
           </p:nvPr>
         </p:nvSpPr>
@@ -4695,7 +4700,7 @@
           <p:nvPr>
             <p:ph type="title" idx="5" hasCustomPrompt="1"/>
             <p:custDataLst>
-              <p:tags r:id="rId7"/>
+              <p:tags r:id="rId6"/>
             </p:custDataLst>
           </p:nvPr>
         </p:nvSpPr>
@@ -4773,7 +4778,7 @@
           <p:nvPr>
             <p:ph type="dt" sz="half" idx="10"/>
             <p:custDataLst>
-              <p:tags r:id="rId8"/>
+              <p:tags r:id="rId7"/>
             </p:custDataLst>
           </p:nvPr>
         </p:nvSpPr>
@@ -4791,7 +4796,6 @@
               <a:rPr lang="en-US"/>
               <a:t>Date Area</a:t>
             </a:r>
-            <a:endParaRPr lang="en-US"/>
           </a:p>
         </p:txBody>
       </p:sp>
@@ -4804,7 +4808,7 @@
           <p:nvPr>
             <p:ph type="ftr" sz="quarter" idx="11"/>
             <p:custDataLst>
-              <p:tags r:id="rId9"/>
+              <p:tags r:id="rId8"/>
             </p:custDataLst>
           </p:nvPr>
         </p:nvSpPr>
@@ -4831,7 +4835,7 @@
           <p:nvPr>
             <p:ph type="sldNum" sz="quarter" idx="12"/>
             <p:custDataLst>
-              <p:tags r:id="rId10"/>
+              <p:tags r:id="rId9"/>
             </p:custDataLst>
           </p:nvPr>
         </p:nvSpPr>
@@ -4847,6 +4851,7 @@
           <a:p>
             <a:fld id="{515A922F-1294-4387-9CB3-FCC8465D972A}" type="slidenum">
               <a:rPr lang="en-US" smtClean="0"/>
+              <a:t>‹#›</a:t>
             </a:fld>
             <a:endParaRPr lang="en-US"/>
           </a:p>
@@ -4861,7 +4866,7 @@
 </file>
 
 <file path=ppt/slideLayouts/slideLayout16.xml><?xml version="1.0" encoding="utf-8"?>
-<p:sldLayout xmlns:a="http://schemas.openxmlformats.org/drawingml/2006/main" xmlns:r="http://schemas.openxmlformats.org/officeDocument/2006/relationships" xmlns:p="http://schemas.openxmlformats.org/presentationml/2006/main" type="twoTxTwoObj" preserve="1" showMasterSp="0">
+<p:sldLayout xmlns:a="http://schemas.openxmlformats.org/drawingml/2006/main" xmlns:r="http://schemas.openxmlformats.org/officeDocument/2006/relationships" xmlns:p="http://schemas.openxmlformats.org/presentationml/2006/main" showMasterSp="0" type="twoTxTwoObj" preserve="1">
   <p:cSld name="Comparison">
     <p:spTree>
       <p:nvGrpSpPr>
@@ -4883,7 +4888,7 @@
           <p:cNvSpPr/>
           <p:nvPr userDrawn="1">
             <p:custDataLst>
-              <p:tags r:id="rId2"/>
+              <p:tags r:id="rId1"/>
             </p:custDataLst>
           </p:nvPr>
         </p:nvSpPr>
@@ -4951,7 +4956,7 @@
           <p:cNvSpPr/>
           <p:nvPr userDrawn="1">
             <p:custDataLst>
-              <p:tags r:id="rId3"/>
+              <p:tags r:id="rId2"/>
             </p:custDataLst>
           </p:nvPr>
         </p:nvSpPr>
@@ -5019,7 +5024,7 @@
           <p:cNvSpPr/>
           <p:nvPr userDrawn="1">
             <p:custDataLst>
-              <p:tags r:id="rId4"/>
+              <p:tags r:id="rId3"/>
             </p:custDataLst>
           </p:nvPr>
         </p:nvSpPr>
@@ -5090,7 +5095,7 @@
           <p:nvPr>
             <p:ph idx="9" hasCustomPrompt="1"/>
             <p:custDataLst>
-              <p:tags r:id="rId5"/>
+              <p:tags r:id="rId4"/>
             </p:custDataLst>
           </p:nvPr>
         </p:nvSpPr>
@@ -5287,7 +5292,7 @@
           <p:nvPr>
             <p:ph type="title" idx="8" hasCustomPrompt="1"/>
             <p:custDataLst>
-              <p:tags r:id="rId6"/>
+              <p:tags r:id="rId5"/>
             </p:custDataLst>
           </p:nvPr>
         </p:nvSpPr>
@@ -5350,7 +5355,7 @@
           <p:nvPr>
             <p:ph idx="7" hasCustomPrompt="1"/>
             <p:custDataLst>
-              <p:tags r:id="rId7"/>
+              <p:tags r:id="rId6"/>
             </p:custDataLst>
           </p:nvPr>
         </p:nvSpPr>
@@ -5547,7 +5552,7 @@
           <p:nvPr>
             <p:ph type="title" idx="6" hasCustomPrompt="1"/>
             <p:custDataLst>
-              <p:tags r:id="rId8"/>
+              <p:tags r:id="rId7"/>
             </p:custDataLst>
           </p:nvPr>
         </p:nvSpPr>
@@ -5610,7 +5615,7 @@
           <p:nvPr>
             <p:ph type="title" idx="5" hasCustomPrompt="1"/>
             <p:custDataLst>
-              <p:tags r:id="rId9"/>
+              <p:tags r:id="rId8"/>
             </p:custDataLst>
           </p:nvPr>
         </p:nvSpPr>
@@ -5688,7 +5693,7 @@
           <p:nvPr>
             <p:ph type="dt" sz="half" idx="10"/>
             <p:custDataLst>
-              <p:tags r:id="rId10"/>
+              <p:tags r:id="rId9"/>
             </p:custDataLst>
           </p:nvPr>
         </p:nvSpPr>
@@ -5706,7 +5711,6 @@
               <a:rPr lang="en-US"/>
               <a:t>Date Area</a:t>
             </a:r>
-            <a:endParaRPr lang="en-US"/>
           </a:p>
         </p:txBody>
       </p:sp>
@@ -5719,7 +5723,7 @@
           <p:nvPr>
             <p:ph type="ftr" sz="quarter" idx="11"/>
             <p:custDataLst>
-              <p:tags r:id="rId11"/>
+              <p:tags r:id="rId10"/>
             </p:custDataLst>
           </p:nvPr>
         </p:nvSpPr>
@@ -5746,7 +5750,7 @@
           <p:nvPr>
             <p:ph type="sldNum" sz="quarter" idx="12"/>
             <p:custDataLst>
-              <p:tags r:id="rId12"/>
+              <p:tags r:id="rId11"/>
             </p:custDataLst>
           </p:nvPr>
         </p:nvSpPr>
@@ -5762,6 +5766,7 @@
           <a:p>
             <a:fld id="{515A922F-1294-4387-9CB3-FCC8465D972A}" type="slidenum">
               <a:rPr lang="en-US" smtClean="0"/>
+              <a:t>‹#›</a:t>
             </a:fld>
             <a:endParaRPr lang="en-US"/>
           </a:p>
@@ -5776,7 +5781,7 @@
 </file>
 
 <file path=ppt/slideLayouts/slideLayout17.xml><?xml version="1.0" encoding="utf-8"?>
-<p:sldLayout xmlns:a="http://schemas.openxmlformats.org/drawingml/2006/main" xmlns:r="http://schemas.openxmlformats.org/officeDocument/2006/relationships" xmlns:p="http://schemas.openxmlformats.org/presentationml/2006/main" type="titleOnly" preserve="1" showMasterSp="0">
+<p:sldLayout xmlns:a="http://schemas.openxmlformats.org/drawingml/2006/main" xmlns:r="http://schemas.openxmlformats.org/officeDocument/2006/relationships" xmlns:p="http://schemas.openxmlformats.org/presentationml/2006/main" showMasterSp="0" type="titleOnly" preserve="1">
   <p:cSld name="Title Only">
     <p:spTree>
       <p:nvGrpSpPr>
@@ -5798,7 +5803,7 @@
           <p:cNvSpPr/>
           <p:nvPr userDrawn="1">
             <p:custDataLst>
-              <p:tags r:id="rId2"/>
+              <p:tags r:id="rId1"/>
             </p:custDataLst>
           </p:nvPr>
         </p:nvSpPr>
@@ -5866,7 +5871,7 @@
           <p:cNvSpPr/>
           <p:nvPr userDrawn="1">
             <p:custDataLst>
-              <p:tags r:id="rId3"/>
+              <p:tags r:id="rId2"/>
             </p:custDataLst>
           </p:nvPr>
         </p:nvSpPr>
@@ -5934,7 +5939,7 @@
           <p:cNvSpPr/>
           <p:nvPr userDrawn="1">
             <p:custDataLst>
-              <p:tags r:id="rId4"/>
+              <p:tags r:id="rId3"/>
             </p:custDataLst>
           </p:nvPr>
         </p:nvSpPr>
@@ -6005,7 +6010,7 @@
           <p:nvPr>
             <p:ph type="title" idx="5" hasCustomPrompt="1"/>
             <p:custDataLst>
-              <p:tags r:id="rId5"/>
+              <p:tags r:id="rId4"/>
             </p:custDataLst>
           </p:nvPr>
         </p:nvSpPr>
@@ -6083,7 +6088,7 @@
           <p:nvPr>
             <p:ph type="dt" sz="half" idx="10"/>
             <p:custDataLst>
-              <p:tags r:id="rId6"/>
+              <p:tags r:id="rId5"/>
             </p:custDataLst>
           </p:nvPr>
         </p:nvSpPr>
@@ -6101,7 +6106,6 @@
               <a:rPr lang="en-US"/>
               <a:t>Date Area</a:t>
             </a:r>
-            <a:endParaRPr lang="en-US"/>
           </a:p>
         </p:txBody>
       </p:sp>
@@ -6114,7 +6118,7 @@
           <p:nvPr>
             <p:ph type="ftr" sz="quarter" idx="11"/>
             <p:custDataLst>
-              <p:tags r:id="rId7"/>
+              <p:tags r:id="rId6"/>
             </p:custDataLst>
           </p:nvPr>
         </p:nvSpPr>
@@ -6141,7 +6145,7 @@
           <p:nvPr>
             <p:ph type="sldNum" sz="quarter" idx="12"/>
             <p:custDataLst>
-              <p:tags r:id="rId8"/>
+              <p:tags r:id="rId7"/>
             </p:custDataLst>
           </p:nvPr>
         </p:nvSpPr>
@@ -6157,6 +6161,7 @@
           <a:p>
             <a:fld id="{515A922F-1294-4387-9CB3-FCC8465D972A}" type="slidenum">
               <a:rPr lang="en-US" smtClean="0"/>
+              <a:t>‹#›</a:t>
             </a:fld>
             <a:endParaRPr lang="en-US"/>
           </a:p>
@@ -6171,7 +6176,7 @@
 </file>
 
 <file path=ppt/slideLayouts/slideLayout18.xml><?xml version="1.0" encoding="utf-8"?>
-<p:sldLayout xmlns:a="http://schemas.openxmlformats.org/drawingml/2006/main" xmlns:r="http://schemas.openxmlformats.org/officeDocument/2006/relationships" xmlns:p="http://schemas.openxmlformats.org/presentationml/2006/main" type="blank" preserve="1" showMasterSp="0">
+<p:sldLayout xmlns:a="http://schemas.openxmlformats.org/drawingml/2006/main" xmlns:r="http://schemas.openxmlformats.org/officeDocument/2006/relationships" xmlns:p="http://schemas.openxmlformats.org/presentationml/2006/main" showMasterSp="0" type="blank" preserve="1">
   <p:cSld name="Blank">
     <p:spTree>
       <p:nvGrpSpPr>
@@ -6193,7 +6198,7 @@
           <p:cNvSpPr/>
           <p:nvPr userDrawn="1">
             <p:custDataLst>
-              <p:tags r:id="rId2"/>
+              <p:tags r:id="rId1"/>
             </p:custDataLst>
           </p:nvPr>
         </p:nvSpPr>
@@ -6261,7 +6266,7 @@
           <p:cNvSpPr/>
           <p:nvPr userDrawn="1">
             <p:custDataLst>
-              <p:tags r:id="rId3"/>
+              <p:tags r:id="rId2"/>
             </p:custDataLst>
           </p:nvPr>
         </p:nvSpPr>
@@ -6329,7 +6334,7 @@
           <p:cNvSpPr/>
           <p:nvPr userDrawn="1">
             <p:custDataLst>
-              <p:tags r:id="rId4"/>
+              <p:tags r:id="rId3"/>
             </p:custDataLst>
           </p:nvPr>
         </p:nvSpPr>
@@ -6400,7 +6405,7 @@
           <p:nvPr>
             <p:ph type="dt" sz="half" idx="10"/>
             <p:custDataLst>
-              <p:tags r:id="rId5"/>
+              <p:tags r:id="rId4"/>
             </p:custDataLst>
           </p:nvPr>
         </p:nvSpPr>
@@ -6413,7 +6418,6 @@
               <a:rPr lang="en-US"/>
               <a:t>Date Area</a:t>
             </a:r>
-            <a:endParaRPr lang="en-US"/>
           </a:p>
         </p:txBody>
       </p:sp>
@@ -6426,7 +6430,7 @@
           <p:nvPr>
             <p:ph type="ftr" sz="quarter" idx="11"/>
             <p:custDataLst>
-              <p:tags r:id="rId6"/>
+              <p:tags r:id="rId5"/>
             </p:custDataLst>
           </p:nvPr>
         </p:nvSpPr>
@@ -6448,7 +6452,7 @@
           <p:nvPr>
             <p:ph type="sldNum" sz="quarter" idx="12"/>
             <p:custDataLst>
-              <p:tags r:id="rId7"/>
+              <p:tags r:id="rId6"/>
             </p:custDataLst>
           </p:nvPr>
         </p:nvSpPr>
@@ -6459,6 +6463,7 @@
           <a:p>
             <a:fld id="{515A922F-1294-4387-9CB3-FCC8465D972A}" type="slidenum">
               <a:rPr lang="en-US" smtClean="0"/>
+              <a:t>‹#›</a:t>
             </a:fld>
             <a:endParaRPr lang="en-US"/>
           </a:p>
@@ -6473,7 +6478,7 @@
 </file>
 
 <file path=ppt/slideLayouts/slideLayout19.xml><?xml version="1.0" encoding="utf-8"?>
-<p:sldLayout xmlns:a="http://schemas.openxmlformats.org/drawingml/2006/main" xmlns:r="http://schemas.openxmlformats.org/officeDocument/2006/relationships" xmlns:p="http://schemas.openxmlformats.org/presentationml/2006/main" type="obj" preserve="1" showMasterSp="0">
+<p:sldLayout xmlns:a="http://schemas.openxmlformats.org/drawingml/2006/main" xmlns:r="http://schemas.openxmlformats.org/officeDocument/2006/relationships" xmlns:p="http://schemas.openxmlformats.org/presentationml/2006/main" showMasterSp="0" type="obj" preserve="1">
   <p:cSld name="Content Only">
     <p:spTree>
       <p:nvGrpSpPr>
@@ -6495,7 +6500,7 @@
           <p:cNvSpPr/>
           <p:nvPr userDrawn="1">
             <p:custDataLst>
-              <p:tags r:id="rId2"/>
+              <p:tags r:id="rId1"/>
             </p:custDataLst>
           </p:nvPr>
         </p:nvSpPr>
@@ -6563,7 +6568,7 @@
           <p:cNvSpPr/>
           <p:nvPr userDrawn="1">
             <p:custDataLst>
-              <p:tags r:id="rId3"/>
+              <p:tags r:id="rId2"/>
             </p:custDataLst>
           </p:nvPr>
         </p:nvSpPr>
@@ -6631,7 +6636,7 @@
           <p:cNvSpPr/>
           <p:nvPr userDrawn="1">
             <p:custDataLst>
-              <p:tags r:id="rId4"/>
+              <p:tags r:id="rId3"/>
             </p:custDataLst>
           </p:nvPr>
         </p:nvSpPr>
@@ -6702,7 +6707,7 @@
           <p:nvPr>
             <p:ph idx="1" hasCustomPrompt="1"/>
             <p:custDataLst>
-              <p:tags r:id="rId5"/>
+              <p:tags r:id="rId4"/>
             </p:custDataLst>
           </p:nvPr>
         </p:nvSpPr>
@@ -6899,7 +6904,7 @@
           <p:nvPr>
             <p:ph type="dt" sz="half" idx="10"/>
             <p:custDataLst>
-              <p:tags r:id="rId6"/>
+              <p:tags r:id="rId5"/>
             </p:custDataLst>
           </p:nvPr>
         </p:nvSpPr>
@@ -6917,7 +6922,6 @@
               <a:rPr lang="en-US"/>
               <a:t>Date Area</a:t>
             </a:r>
-            <a:endParaRPr lang="en-US"/>
           </a:p>
         </p:txBody>
       </p:sp>
@@ -6930,7 +6934,7 @@
           <p:nvPr>
             <p:ph type="ftr" sz="quarter" idx="11"/>
             <p:custDataLst>
-              <p:tags r:id="rId7"/>
+              <p:tags r:id="rId6"/>
             </p:custDataLst>
           </p:nvPr>
         </p:nvSpPr>
@@ -6957,7 +6961,7 @@
           <p:nvPr>
             <p:ph type="sldNum" sz="quarter" idx="12"/>
             <p:custDataLst>
-              <p:tags r:id="rId8"/>
+              <p:tags r:id="rId7"/>
             </p:custDataLst>
           </p:nvPr>
         </p:nvSpPr>
@@ -6973,6 +6977,7 @@
           <a:p>
             <a:fld id="{515A922F-1294-4387-9CB3-FCC8465D972A}" type="slidenum">
               <a:rPr lang="en-US" smtClean="0"/>
+              <a:t>‹#›</a:t>
             </a:fld>
             <a:endParaRPr lang="en-US"/>
           </a:p>
@@ -7128,7 +7133,6 @@
               <a:rPr lang="en-US" dirty="0" smtClean="0"/>
               <a:t>Click to edit Master text styles</a:t>
             </a:r>
-            <a:endParaRPr lang="en-US" dirty="0" smtClean="0"/>
           </a:p>
           <a:p>
             <a:pPr lvl="1"/>
@@ -7136,7 +7140,6 @@
               <a:rPr lang="en-US" dirty="0"/>
               <a:t>Second level </a:t>
             </a:r>
-            <a:endParaRPr lang="en-US" dirty="0"/>
           </a:p>
           <a:p>
             <a:pPr lvl="2"/>
@@ -7144,7 +7147,6 @@
               <a:rPr lang="en-US" dirty="0"/>
               <a:t>Third level</a:t>
             </a:r>
-            <a:endParaRPr lang="en-US" dirty="0"/>
           </a:p>
           <a:p>
             <a:pPr lvl="3"/>
@@ -7152,7 +7154,6 @@
               <a:rPr lang="en-US" dirty="0"/>
               <a:t>Fourth level</a:t>
             </a:r>
-            <a:endParaRPr lang="en-US" dirty="0"/>
           </a:p>
           <a:p>
             <a:pPr lvl="4"/>
@@ -7160,7 +7161,6 @@
               <a:rPr lang="en-US" dirty="0"/>
               <a:t>Fifth level</a:t>
             </a:r>
-            <a:endParaRPr lang="en-US" dirty="0"/>
           </a:p>
         </p:txBody>
       </p:sp>
@@ -7181,6 +7181,7 @@
           <a:p>
             <a:fld id="{760FBDFE-C587-4B4C-A407-44438C67B59E}" type="datetimeFigureOut">
               <a:rPr lang="en-US" smtClean="0"/>
+              <a:t>4/27/2026</a:t>
             </a:fld>
             <a:endParaRPr lang="en-US"/>
           </a:p>
@@ -7222,6 +7223,7 @@
           <a:p>
             <a:fld id="{49AE70B2-8BF9-45C0-BB95-33D1B9D3A854}" type="slidenum">
               <a:rPr lang="en-US" smtClean="0"/>
+              <a:t>‹#›</a:t>
             </a:fld>
             <a:endParaRPr lang="en-US"/>
           </a:p>
@@ -7236,7 +7238,7 @@
 </file>
 
 <file path=ppt/slideLayouts/slideLayout20.xml><?xml version="1.0" encoding="utf-8"?>
-<p:sldLayout xmlns:a="http://schemas.openxmlformats.org/drawingml/2006/main" xmlns:r="http://schemas.openxmlformats.org/officeDocument/2006/relationships" xmlns:p="http://schemas.openxmlformats.org/presentationml/2006/main" type="titleOnly" preserve="1" showMasterSp="0">
+<p:sldLayout xmlns:a="http://schemas.openxmlformats.org/drawingml/2006/main" xmlns:r="http://schemas.openxmlformats.org/officeDocument/2006/relationships" xmlns:p="http://schemas.openxmlformats.org/presentationml/2006/main" showMasterSp="0" type="titleOnly" preserve="1">
   <p:cSld name="Title and Subtitle">
     <p:spTree>
       <p:nvGrpSpPr>
@@ -7258,7 +7260,7 @@
           <p:cNvSpPr/>
           <p:nvPr userDrawn="1">
             <p:custDataLst>
-              <p:tags r:id="rId2"/>
+              <p:tags r:id="rId1"/>
             </p:custDataLst>
           </p:nvPr>
         </p:nvSpPr>
@@ -7326,7 +7328,7 @@
           <p:cNvSpPr/>
           <p:nvPr userDrawn="1">
             <p:custDataLst>
-              <p:tags r:id="rId3"/>
+              <p:tags r:id="rId2"/>
             </p:custDataLst>
           </p:nvPr>
         </p:nvSpPr>
@@ -7394,7 +7396,7 @@
           <p:cNvSpPr/>
           <p:nvPr userDrawn="1">
             <p:custDataLst>
-              <p:tags r:id="rId4"/>
+              <p:tags r:id="rId3"/>
             </p:custDataLst>
           </p:nvPr>
         </p:nvSpPr>
@@ -7465,7 +7467,7 @@
           <p:nvPr>
             <p:ph type="body" idx="2" hasCustomPrompt="1"/>
             <p:custDataLst>
-              <p:tags r:id="rId5"/>
+              <p:tags r:id="rId4"/>
             </p:custDataLst>
           </p:nvPr>
         </p:nvSpPr>
@@ -7529,7 +7531,7 @@
           <p:nvPr>
             <p:ph type="title" idx="1" hasCustomPrompt="1"/>
             <p:custDataLst>
-              <p:tags r:id="rId6"/>
+              <p:tags r:id="rId5"/>
             </p:custDataLst>
           </p:nvPr>
         </p:nvSpPr>
@@ -7607,7 +7609,7 @@
           <p:nvPr>
             <p:ph type="dt" sz="half" idx="10"/>
             <p:custDataLst>
-              <p:tags r:id="rId7"/>
+              <p:tags r:id="rId6"/>
             </p:custDataLst>
           </p:nvPr>
         </p:nvSpPr>
@@ -7625,7 +7627,6 @@
               <a:rPr lang="en-US"/>
               <a:t>Date Area</a:t>
             </a:r>
-            <a:endParaRPr lang="en-US"/>
           </a:p>
         </p:txBody>
       </p:sp>
@@ -7638,7 +7639,7 @@
           <p:nvPr>
             <p:ph type="ftr" sz="quarter" idx="11"/>
             <p:custDataLst>
-              <p:tags r:id="rId8"/>
+              <p:tags r:id="rId7"/>
             </p:custDataLst>
           </p:nvPr>
         </p:nvSpPr>
@@ -7665,7 +7666,7 @@
           <p:nvPr>
             <p:ph type="sldNum" sz="quarter" idx="12"/>
             <p:custDataLst>
-              <p:tags r:id="rId9"/>
+              <p:tags r:id="rId8"/>
             </p:custDataLst>
           </p:nvPr>
         </p:nvSpPr>
@@ -7681,6 +7682,7 @@
           <a:p>
             <a:fld id="{515A922F-1294-4387-9CB3-FCC8465D972A}" type="slidenum">
               <a:rPr lang="en-US" smtClean="0"/>
+              <a:t>‹#›</a:t>
             </a:fld>
             <a:endParaRPr lang="en-US"/>
           </a:p>
@@ -7695,7 +7697,7 @@
 </file>
 
 <file path=ppt/slideLayouts/slideLayout21.xml><?xml version="1.0" encoding="utf-8"?>
-<p:sldLayout xmlns:a="http://schemas.openxmlformats.org/drawingml/2006/main" xmlns:r="http://schemas.openxmlformats.org/officeDocument/2006/relationships" xmlns:p="http://schemas.openxmlformats.org/presentationml/2006/main" type="obj" preserve="1" showMasterSp="0">
+<p:sldLayout xmlns:a="http://schemas.openxmlformats.org/drawingml/2006/main" xmlns:r="http://schemas.openxmlformats.org/officeDocument/2006/relationships" xmlns:p="http://schemas.openxmlformats.org/presentationml/2006/main" showMasterSp="0" type="obj" preserve="1">
   <p:cSld name="End Slide">
     <p:spTree>
       <p:nvGrpSpPr>
@@ -7717,7 +7719,7 @@
           <p:cNvSpPr/>
           <p:nvPr>
             <p:custDataLst>
-              <p:tags r:id="rId2"/>
+              <p:tags r:id="rId1"/>
             </p:custDataLst>
           </p:nvPr>
         </p:nvSpPr>
@@ -7785,7 +7787,7 @@
           <p:cNvSpPr/>
           <p:nvPr>
             <p:custDataLst>
-              <p:tags r:id="rId3"/>
+              <p:tags r:id="rId2"/>
             </p:custDataLst>
           </p:nvPr>
         </p:nvSpPr>
@@ -7855,7 +7857,7 @@
           <p:cNvSpPr/>
           <p:nvPr>
             <p:custDataLst>
-              <p:tags r:id="rId4"/>
+              <p:tags r:id="rId3"/>
             </p:custDataLst>
           </p:nvPr>
         </p:nvSpPr>
@@ -7923,7 +7925,7 @@
           <p:cNvCxnSpPr/>
           <p:nvPr>
             <p:custDataLst>
-              <p:tags r:id="rId5"/>
+              <p:tags r:id="rId4"/>
             </p:custDataLst>
           </p:nvPr>
         </p:nvCxnSpPr>
@@ -7973,7 +7975,7 @@
           <p:cNvSpPr/>
           <p:nvPr>
             <p:custDataLst>
-              <p:tags r:id="rId6"/>
+              <p:tags r:id="rId5"/>
             </p:custDataLst>
           </p:nvPr>
         </p:nvSpPr>
@@ -8096,7 +8098,7 @@
           <p:cNvSpPr/>
           <p:nvPr>
             <p:custDataLst>
-              <p:tags r:id="rId7"/>
+              <p:tags r:id="rId6"/>
             </p:custDataLst>
           </p:nvPr>
         </p:nvSpPr>
@@ -8223,7 +8225,7 @@
           <p:cNvSpPr/>
           <p:nvPr>
             <p:custDataLst>
-              <p:tags r:id="rId8"/>
+              <p:tags r:id="rId7"/>
             </p:custDataLst>
           </p:nvPr>
         </p:nvSpPr>
@@ -8354,7 +8356,7 @@
           <p:cNvSpPr/>
           <p:nvPr>
             <p:custDataLst>
-              <p:tags r:id="rId9"/>
+              <p:tags r:id="rId8"/>
             </p:custDataLst>
           </p:nvPr>
         </p:nvSpPr>
@@ -8483,7 +8485,7 @@
           <p:nvPr>
             <p:ph type="body" idx="2" hasCustomPrompt="1"/>
             <p:custDataLst>
-              <p:tags r:id="rId10"/>
+              <p:tags r:id="rId9"/>
             </p:custDataLst>
           </p:nvPr>
         </p:nvSpPr>
@@ -8547,7 +8549,7 @@
           <p:nvPr>
             <p:ph type="title" idx="1" hasCustomPrompt="1"/>
             <p:custDataLst>
-              <p:tags r:id="rId11"/>
+              <p:tags r:id="rId10"/>
             </p:custDataLst>
           </p:nvPr>
         </p:nvSpPr>
@@ -8617,7 +8619,7 @@
           <p:nvPr>
             <p:ph type="dt" sz="half" idx="10"/>
             <p:custDataLst>
-              <p:tags r:id="rId12"/>
+              <p:tags r:id="rId11"/>
             </p:custDataLst>
           </p:nvPr>
         </p:nvSpPr>
@@ -8635,7 +8637,6 @@
               <a:rPr lang="en-US"/>
               <a:t>Date Area</a:t>
             </a:r>
-            <a:endParaRPr lang="en-US"/>
           </a:p>
         </p:txBody>
       </p:sp>
@@ -8648,7 +8649,7 @@
           <p:nvPr>
             <p:ph type="ftr" sz="quarter" idx="11"/>
             <p:custDataLst>
-              <p:tags r:id="rId13"/>
+              <p:tags r:id="rId12"/>
             </p:custDataLst>
           </p:nvPr>
         </p:nvSpPr>
@@ -8675,7 +8676,7 @@
           <p:nvPr>
             <p:ph type="sldNum" sz="quarter" idx="12"/>
             <p:custDataLst>
-              <p:tags r:id="rId14"/>
+              <p:tags r:id="rId13"/>
             </p:custDataLst>
           </p:nvPr>
         </p:nvSpPr>
@@ -8691,6 +8692,7 @@
           <a:p>
             <a:fld id="{515A922F-1294-4387-9CB3-FCC8465D972A}" type="slidenum">
               <a:rPr lang="en-US" smtClean="0"/>
+              <a:t>‹#›</a:t>
             </a:fld>
             <a:endParaRPr lang="en-US"/>
           </a:p>
@@ -8730,7 +8732,7 @@
           <p:nvPr>
             <p:ph type="title" hasCustomPrompt="1"/>
             <p:custDataLst>
-              <p:tags r:id="rId2"/>
+              <p:tags r:id="rId1"/>
             </p:custDataLst>
           </p:nvPr>
         </p:nvSpPr>
@@ -8760,7 +8762,6 @@
               <a:rPr lang="en-US" dirty="0"/>
               <a:t>Click to add title</a:t>
             </a:r>
-            <a:endParaRPr lang="en-US" dirty="0"/>
           </a:p>
         </p:txBody>
       </p:sp>
@@ -8773,7 +8774,7 @@
           <p:nvPr>
             <p:ph type="dt" sz="half" idx="10"/>
             <p:custDataLst>
-              <p:tags r:id="rId3"/>
+              <p:tags r:id="rId2"/>
             </p:custDataLst>
           </p:nvPr>
         </p:nvSpPr>
@@ -8793,7 +8794,6 @@
               <a:rPr lang="en-US"/>
               <a:t>Date Area</a:t>
             </a:r>
-            <a:endParaRPr lang="en-US"/>
           </a:p>
         </p:txBody>
       </p:sp>
@@ -8806,7 +8806,7 @@
           <p:nvPr>
             <p:ph type="ftr" sz="quarter" idx="11"/>
             <p:custDataLst>
-              <p:tags r:id="rId4"/>
+              <p:tags r:id="rId3"/>
             </p:custDataLst>
           </p:nvPr>
         </p:nvSpPr>
@@ -8835,7 +8835,7 @@
           <p:nvPr>
             <p:ph type="sldNum" sz="quarter" idx="12"/>
             <p:custDataLst>
-              <p:tags r:id="rId5"/>
+              <p:tags r:id="rId4"/>
             </p:custDataLst>
           </p:nvPr>
         </p:nvSpPr>
@@ -8853,6 +8853,7 @@
           <a:p>
             <a:fld id="{49AE70B2-8BF9-45C0-BB95-33D1B9D3A854}" type="slidenum">
               <a:rPr lang="en-US" smtClean="0"/>
+              <a:t>‹#›</a:t>
             </a:fld>
             <a:endParaRPr lang="en-US" dirty="0"/>
           </a:p>
@@ -8917,9 +8918,6 @@
               </a:rPr>
               <a:t>Click to edit Master title style</a:t>
             </a:r>
-            <a:endParaRPr lang="en-US" dirty="0" smtClean="0">
-              <a:sym typeface="+mn-ea"/>
-            </a:endParaRPr>
           </a:p>
         </p:txBody>
       </p:sp>
@@ -9041,7 +9039,6 @@
               <a:rPr lang="en-US" dirty="0"/>
               <a:t>Click to edit Master text styles</a:t>
             </a:r>
-            <a:endParaRPr lang="en-US" dirty="0"/>
           </a:p>
         </p:txBody>
       </p:sp>
@@ -9062,6 +9059,7 @@
           <a:p>
             <a:fld id="{760FBDFE-C587-4B4C-A407-44438C67B59E}" type="datetimeFigureOut">
               <a:rPr lang="en-US" smtClean="0"/>
+              <a:t>4/27/2026</a:t>
             </a:fld>
             <a:endParaRPr lang="en-US"/>
           </a:p>
@@ -9103,6 +9101,7 @@
           <a:p>
             <a:fld id="{49AE70B2-8BF9-45C0-BB95-33D1B9D3A854}" type="slidenum">
               <a:rPr lang="en-US" smtClean="0"/>
+              <a:t>‹#›</a:t>
             </a:fld>
             <a:endParaRPr lang="en-US"/>
           </a:p>
@@ -9274,7 +9273,6 @@
               <a:rPr lang="en-US" dirty="0"/>
               <a:t>Click to edit Master text styles</a:t>
             </a:r>
-            <a:endParaRPr lang="en-US" dirty="0"/>
           </a:p>
           <a:p>
             <a:pPr lvl="1"/>
@@ -9282,7 +9280,6 @@
               <a:rPr lang="en-US" dirty="0"/>
               <a:t>Second level</a:t>
             </a:r>
-            <a:endParaRPr lang="en-US" dirty="0"/>
           </a:p>
           <a:p>
             <a:pPr lvl="2"/>
@@ -9290,7 +9287,6 @@
               <a:rPr lang="en-US" dirty="0"/>
               <a:t>Third level</a:t>
             </a:r>
-            <a:endParaRPr lang="en-US" dirty="0"/>
           </a:p>
           <a:p>
             <a:pPr lvl="3"/>
@@ -9298,7 +9294,6 @@
               <a:rPr lang="en-US" dirty="0"/>
               <a:t>Fourth level</a:t>
             </a:r>
-            <a:endParaRPr lang="en-US" dirty="0"/>
           </a:p>
           <a:p>
             <a:pPr lvl="4"/>
@@ -9306,7 +9301,6 @@
               <a:rPr lang="en-US" dirty="0"/>
               <a:t>Fifth level</a:t>
             </a:r>
-            <a:endParaRPr lang="en-US" dirty="0"/>
           </a:p>
         </p:txBody>
       </p:sp>
@@ -9406,7 +9400,6 @@
               <a:rPr lang="en-US" dirty="0"/>
               <a:t>Click to edit Master text styles</a:t>
             </a:r>
-            <a:endParaRPr lang="en-US" dirty="0"/>
           </a:p>
           <a:p>
             <a:pPr lvl="1"/>
@@ -9467,6 +9460,7 @@
           <a:p>
             <a:fld id="{760FBDFE-C587-4B4C-A407-44438C67B59E}" type="datetimeFigureOut">
               <a:rPr lang="en-US" smtClean="0"/>
+              <a:t>4/27/2026</a:t>
             </a:fld>
             <a:endParaRPr lang="en-US"/>
           </a:p>
@@ -9508,6 +9502,7 @@
           <a:p>
             <a:fld id="{49AE70B2-8BF9-45C0-BB95-33D1B9D3A854}" type="slidenum">
               <a:rPr lang="en-US" smtClean="0"/>
+              <a:t>‹#›</a:t>
             </a:fld>
             <a:endParaRPr lang="en-US"/>
           </a:p>
@@ -9637,7 +9632,6 @@
               <a:rPr lang="en-US" dirty="0"/>
               <a:t>Click to edit Master text styles</a:t>
             </a:r>
-            <a:endParaRPr lang="en-US" dirty="0"/>
           </a:p>
         </p:txBody>
       </p:sp>
@@ -9666,7 +9660,6 @@
               <a:rPr lang="en-US" dirty="0"/>
               <a:t>Click to edit Master text styles</a:t>
             </a:r>
-            <a:endParaRPr lang="en-US" dirty="0"/>
           </a:p>
           <a:p>
             <a:pPr lvl="1"/>
@@ -9674,7 +9667,6 @@
               <a:rPr lang="en-US" dirty="0"/>
               <a:t>Second level</a:t>
             </a:r>
-            <a:endParaRPr lang="en-US" dirty="0"/>
           </a:p>
           <a:p>
             <a:pPr lvl="2"/>
@@ -9682,7 +9674,6 @@
               <a:rPr lang="en-US" dirty="0"/>
               <a:t>Third level</a:t>
             </a:r>
-            <a:endParaRPr lang="en-US" dirty="0"/>
           </a:p>
           <a:p>
             <a:pPr lvl="3"/>
@@ -9690,7 +9681,6 @@
               <a:rPr lang="en-US" dirty="0"/>
               <a:t>Fourth level</a:t>
             </a:r>
-            <a:endParaRPr lang="en-US" dirty="0"/>
           </a:p>
           <a:p>
             <a:pPr lvl="4"/>
@@ -9698,7 +9688,6 @@
               <a:rPr lang="en-US" dirty="0"/>
               <a:t>Fifth level</a:t>
             </a:r>
-            <a:endParaRPr lang="en-US" dirty="0"/>
           </a:p>
         </p:txBody>
       </p:sp>
@@ -9767,7 +9756,6 @@
               <a:rPr lang="en-US" dirty="0"/>
               <a:t>Click to edit Master text styles</a:t>
             </a:r>
-            <a:endParaRPr lang="en-US" dirty="0"/>
           </a:p>
         </p:txBody>
       </p:sp>
@@ -9806,7 +9794,6 @@
               <a:rPr lang="en-US" dirty="0"/>
               <a:t>Second level</a:t>
             </a:r>
-            <a:endParaRPr lang="en-US" dirty="0"/>
           </a:p>
           <a:p>
             <a:pPr lvl="2"/>
@@ -9814,7 +9801,6 @@
               <a:rPr lang="en-US" dirty="0"/>
               <a:t>Third level</a:t>
             </a:r>
-            <a:endParaRPr lang="en-US" dirty="0"/>
           </a:p>
           <a:p>
             <a:pPr lvl="3"/>
@@ -9822,7 +9808,6 @@
               <a:rPr lang="en-US" dirty="0"/>
               <a:t>Fourth level</a:t>
             </a:r>
-            <a:endParaRPr lang="en-US" dirty="0"/>
           </a:p>
           <a:p>
             <a:pPr lvl="4"/>
@@ -9830,7 +9815,6 @@
               <a:rPr lang="en-US" dirty="0"/>
               <a:t>Fifth level</a:t>
             </a:r>
-            <a:endParaRPr lang="en-US" dirty="0"/>
           </a:p>
         </p:txBody>
       </p:sp>
@@ -9851,6 +9835,7 @@
           <a:p>
             <a:fld id="{760FBDFE-C587-4B4C-A407-44438C67B59E}" type="datetimeFigureOut">
               <a:rPr lang="en-US" smtClean="0"/>
+              <a:t>4/27/2026</a:t>
             </a:fld>
             <a:endParaRPr lang="en-US"/>
           </a:p>
@@ -9892,6 +9877,7 @@
           <a:p>
             <a:fld id="{49AE70B2-8BF9-45C0-BB95-33D1B9D3A854}" type="slidenum">
               <a:rPr lang="en-US" smtClean="0"/>
+              <a:t>‹#›</a:t>
             </a:fld>
             <a:endParaRPr lang="en-US"/>
           </a:p>
@@ -9956,7 +9942,6 @@
               <a:rPr lang="en-US" dirty="0"/>
               <a:t>Click to edit Master title style</a:t>
             </a:r>
-            <a:endParaRPr lang="en-US" dirty="0"/>
           </a:p>
         </p:txBody>
       </p:sp>
@@ -9977,6 +9962,7 @@
           <a:p>
             <a:fld id="{760FBDFE-C587-4B4C-A407-44438C67B59E}" type="datetimeFigureOut">
               <a:rPr lang="en-US" smtClean="0"/>
+              <a:t>4/27/2026</a:t>
             </a:fld>
             <a:endParaRPr lang="en-US"/>
           </a:p>
@@ -10018,6 +10004,7 @@
           <a:p>
             <a:fld id="{49AE70B2-8BF9-45C0-BB95-33D1B9D3A854}" type="slidenum">
               <a:rPr lang="en-US" smtClean="0"/>
+              <a:t>‹#›</a:t>
             </a:fld>
             <a:endParaRPr lang="en-US"/>
           </a:p>
@@ -10065,6 +10052,7 @@
           <a:p>
             <a:fld id="{760FBDFE-C587-4B4C-A407-44438C67B59E}" type="datetimeFigureOut">
               <a:rPr lang="en-US" smtClean="0"/>
+              <a:t>4/27/2026</a:t>
             </a:fld>
             <a:endParaRPr lang="en-US"/>
           </a:p>
@@ -10106,6 +10094,7 @@
           <a:p>
             <a:fld id="{49AE70B2-8BF9-45C0-BB95-33D1B9D3A854}" type="slidenum">
               <a:rPr lang="en-US" smtClean="0"/>
+              <a:t>‹#›</a:t>
             </a:fld>
             <a:endParaRPr lang="en-US"/>
           </a:p>
@@ -10170,7 +10159,6 @@
               <a:rPr lang="en-US" dirty="0"/>
               <a:t>Click to edit Master title style</a:t>
             </a:r>
-            <a:endParaRPr lang="en-US" dirty="0"/>
           </a:p>
         </p:txBody>
       </p:sp>
@@ -10302,7 +10290,6 @@
               <a:rPr lang="en-US" dirty="0"/>
               <a:t>Click to edit Master text styles</a:t>
             </a:r>
-            <a:endParaRPr lang="en-US" dirty="0"/>
           </a:p>
         </p:txBody>
       </p:sp>
@@ -10323,6 +10310,7 @@
           <a:p>
             <a:fld id="{9EFD9D74-47D9-4702-A33C-335B63B48DBF}" type="datetimeFigureOut">
               <a:rPr lang="en-US" smtClean="0"/>
+              <a:t>4/27/2026</a:t>
             </a:fld>
             <a:endParaRPr lang="en-US" dirty="0"/>
           </a:p>
@@ -10364,6 +10352,7 @@
           <a:p>
             <a:fld id="{FABC47A4-756D-490B-A52F-7D9E2C9FC05F}" type="slidenum">
               <a:rPr lang="en-US" smtClean="0"/>
+              <a:t>‹#›</a:t>
             </a:fld>
             <a:endParaRPr lang="en-US"/>
           </a:p>
@@ -10424,7 +10413,6 @@
               <a:rPr lang="en-US"/>
               <a:t>Click to edit Master title style</a:t>
             </a:r>
-            <a:endParaRPr lang="en-US"/>
           </a:p>
         </p:txBody>
       </p:sp>
@@ -10453,7 +10441,6 @@
               <a:rPr lang="en-US" dirty="0"/>
               <a:t>Click to edit Master text styles</a:t>
             </a:r>
-            <a:endParaRPr lang="en-US" dirty="0"/>
           </a:p>
           <a:p>
             <a:pPr lvl="1"/>
@@ -10461,7 +10448,6 @@
               <a:rPr lang="en-US" dirty="0"/>
               <a:t>Second level</a:t>
             </a:r>
-            <a:endParaRPr lang="en-US" dirty="0"/>
           </a:p>
           <a:p>
             <a:pPr lvl="2"/>
@@ -10469,7 +10455,6 @@
               <a:rPr lang="en-US" dirty="0"/>
               <a:t>Third level</a:t>
             </a:r>
-            <a:endParaRPr lang="en-US" dirty="0"/>
           </a:p>
           <a:p>
             <a:pPr lvl="3"/>
@@ -10477,7 +10462,6 @@
               <a:rPr lang="en-US" dirty="0"/>
               <a:t>Fourth level</a:t>
             </a:r>
-            <a:endParaRPr lang="en-US" dirty="0"/>
           </a:p>
           <a:p>
             <a:pPr lvl="4"/>
@@ -10485,7 +10469,6 @@
               <a:rPr lang="en-US" dirty="0"/>
               <a:t>Fifth level</a:t>
             </a:r>
-            <a:endParaRPr lang="en-US" dirty="0"/>
           </a:p>
         </p:txBody>
       </p:sp>
@@ -10506,6 +10489,7 @@
           <a:p>
             <a:fld id="{760FBDFE-C587-4B4C-A407-44438C67B59E}" type="datetimeFigureOut">
               <a:rPr lang="en-US" smtClean="0"/>
+              <a:t>4/27/2026</a:t>
             </a:fld>
             <a:endParaRPr lang="en-US"/>
           </a:p>
@@ -10547,6 +10531,7 @@
           <a:p>
             <a:fld id="{49AE70B2-8BF9-45C0-BB95-33D1B9D3A854}" type="slidenum">
               <a:rPr lang="en-US" smtClean="0"/>
+              <a:t>‹#›</a:t>
             </a:fld>
             <a:endParaRPr lang="en-US"/>
           </a:p>
@@ -10663,7 +10648,6 @@
               <a:rPr lang="en-US" dirty="0" smtClean="0"/>
               <a:t>Click to edit Master text styles</a:t>
             </a:r>
-            <a:endParaRPr lang="en-US" dirty="0" smtClean="0"/>
           </a:p>
           <a:p>
             <a:pPr lvl="1"/>
@@ -10671,7 +10655,6 @@
               <a:rPr lang="en-US" dirty="0" smtClean="0"/>
               <a:t>Second level</a:t>
             </a:r>
-            <a:endParaRPr lang="en-US" dirty="0" smtClean="0"/>
           </a:p>
           <a:p>
             <a:pPr lvl="2"/>
@@ -10736,6 +10719,7 @@
           <a:p>
             <a:fld id="{760FBDFE-C587-4B4C-A407-44438C67B59E}" type="datetimeFigureOut">
               <a:rPr lang="en-US" smtClean="0"/>
+              <a:t>4/27/2026</a:t>
             </a:fld>
             <a:endParaRPr lang="en-US" dirty="0"/>
           </a:p>
@@ -10821,6 +10805,7 @@
           <a:p>
             <a:fld id="{49AE70B2-8BF9-45C0-BB95-33D1B9D3A854}" type="slidenum">
               <a:rPr lang="en-US" smtClean="0"/>
+              <a:t>‹#›</a:t>
             </a:fld>
             <a:endParaRPr lang="en-US" dirty="0"/>
           </a:p>
@@ -11160,7 +11145,7 @@
           <p:cNvSpPr/>
           <p:nvPr userDrawn="1">
             <p:custDataLst>
-              <p:tags r:id="rId13"/>
+              <p:tags r:id="rId14"/>
             </p:custDataLst>
           </p:nvPr>
         </p:nvSpPr>
@@ -11229,7 +11214,7 @@
           <p:cNvSpPr/>
           <p:nvPr userDrawn="1">
             <p:custDataLst>
-              <p:tags r:id="rId14"/>
+              <p:tags r:id="rId15"/>
             </p:custDataLst>
           </p:nvPr>
         </p:nvSpPr>
@@ -11298,7 +11283,7 @@
           <p:cNvSpPr/>
           <p:nvPr userDrawn="1">
             <p:custDataLst>
-              <p:tags r:id="rId15"/>
+              <p:tags r:id="rId16"/>
             </p:custDataLst>
           </p:nvPr>
         </p:nvSpPr>
@@ -11370,7 +11355,7 @@
           <p:nvPr>
             <p:ph type="dt" sz="half" idx="10"/>
             <p:custDataLst>
-              <p:tags r:id="rId16"/>
+              <p:tags r:id="rId17"/>
             </p:custDataLst>
           </p:nvPr>
         </p:nvSpPr>
@@ -11397,7 +11382,6 @@
               <a:rPr lang="en-US"/>
               <a:t>Date Area</a:t>
             </a:r>
-            <a:endParaRPr lang="en-US"/>
           </a:p>
         </p:txBody>
       </p:sp>
@@ -11410,7 +11394,7 @@
           <p:nvPr>
             <p:ph type="ftr" sz="quarter" idx="11"/>
             <p:custDataLst>
-              <p:tags r:id="rId17"/>
+              <p:tags r:id="rId18"/>
             </p:custDataLst>
           </p:nvPr>
         </p:nvSpPr>
@@ -11446,7 +11430,7 @@
           <p:nvPr>
             <p:ph type="sldNum" sz="quarter" idx="12"/>
             <p:custDataLst>
-              <p:tags r:id="rId18"/>
+              <p:tags r:id="rId19"/>
             </p:custDataLst>
           </p:nvPr>
         </p:nvSpPr>
@@ -11471,6 +11455,7 @@
           <a:p>
             <a:fld id="{515A922F-1294-4387-9CB3-FCC8465D972A}" type="slidenum">
               <a:rPr lang="en-US" smtClean="0"/>
+              <a:t>‹#›</a:t>
             </a:fld>
             <a:endParaRPr lang="en-US"/>
           </a:p>
@@ -11485,7 +11470,7 @@
           <p:nvPr>
             <p:ph type="title"/>
             <p:custDataLst>
-              <p:tags r:id="rId19"/>
+              <p:tags r:id="rId20"/>
             </p:custDataLst>
           </p:nvPr>
         </p:nvSpPr>
@@ -11536,7 +11521,7 @@
           <p:nvPr>
             <p:ph type="body" idx="1"/>
             <p:custDataLst>
-              <p:tags r:id="rId20"/>
+              <p:tags r:id="rId21"/>
             </p:custDataLst>
           </p:nvPr>
         </p:nvSpPr>
@@ -11589,7 +11574,7 @@
           <p:cNvSpPr/>
           <p:nvPr userDrawn="1">
             <p:custDataLst>
-              <p:tags r:id="rId21"/>
+              <p:tags r:id="rId22"/>
             </p:custDataLst>
           </p:nvPr>
         </p:nvSpPr>
@@ -11629,6 +11614,7 @@
         </p:style>
         <p:txBody>
           <a:bodyPr rtlCol="0" anchor="ctr"/>
+          <a:lstStyle/>
           <a:p>
             <a:pPr algn="ctr"/>
             <a:endParaRPr lang="zh-CN" altLang="en-US"/>
@@ -11963,7 +11949,7 @@
           <p:nvPr>
             <p:ph type="body" idx="3"/>
             <p:custDataLst>
-              <p:tags r:id="rId1"/>
+              <p:tags r:id="rId2"/>
             </p:custDataLst>
           </p:nvPr>
         </p:nvSpPr>
@@ -11975,7 +11961,7 @@
         </p:spPr>
         <p:txBody>
           <a:bodyPr>
-            <a:normAutofit lnSpcReduction="20000"/>
+            <a:normAutofit fontScale="92500"/>
           </a:bodyPr>
           <a:lstStyle/>
           <a:p>
@@ -11983,7 +11969,6 @@
               <a:rPr lang="ru-RU"/>
               <a:t>Зайцев Кирилл</a:t>
             </a:r>
-            <a:endParaRPr lang="ru-RU"/>
           </a:p>
         </p:txBody>
       </p:sp>
@@ -11996,7 +11981,7 @@
           <p:nvPr>
             <p:ph type="body" idx="2"/>
             <p:custDataLst>
-              <p:tags r:id="rId2"/>
+              <p:tags r:id="rId3"/>
             </p:custDataLst>
           </p:nvPr>
         </p:nvSpPr>
@@ -12018,7 +12003,6 @@
               <a:rPr lang="ru-RU" altLang="en-US"/>
               <a:t>песочница</a:t>
             </a:r>
-            <a:endParaRPr lang="ru-RU" altLang="en-US"/>
           </a:p>
         </p:txBody>
       </p:sp>
@@ -12031,7 +12015,7 @@
           <p:nvPr>
             <p:ph type="title" idx="1"/>
             <p:custDataLst>
-              <p:tags r:id="rId3"/>
+              <p:tags r:id="rId4"/>
             </p:custDataLst>
           </p:nvPr>
         </p:nvSpPr>
@@ -12049,13 +12033,12 @@
               <a:rPr lang="en-US" dirty="0"/>
               <a:t>CUBE</a:t>
             </a:r>
-            <a:endParaRPr lang="en-US" dirty="0"/>
           </a:p>
         </p:txBody>
       </p:sp>
     </p:spTree>
     <p:custDataLst>
-      <p:tags r:id="rId4"/>
+      <p:tags r:id="rId1"/>
     </p:custDataLst>
   </p:cSld>
   <p:clrMapOvr>
@@ -12090,11 +12073,16 @@
           <p:nvPr>
             <p:ph type="title"/>
             <p:custDataLst>
-              <p:tags r:id="rId1"/>
+              <p:tags r:id="rId2"/>
             </p:custDataLst>
           </p:nvPr>
         </p:nvSpPr>
-        <p:spPr/>
+        <p:spPr>
+          <a:xfrm>
+            <a:off x="699565" y="109852"/>
+            <a:ext cx="10800000" cy="792000"/>
+          </a:xfrm>
+        </p:spPr>
         <p:txBody>
           <a:bodyPr wrap="square">
             <a:normAutofit/>
@@ -12102,124 +12090,21 @@
           <a:lstStyle/>
           <a:p>
             <a:r>
-              <a:rPr lang="ru-RU" altLang="en-US" spc="0">
+              <a:rPr lang="ru-RU" altLang="en-US" spc="0" dirty="0">
                 <a:latin typeface="+mj-lt"/>
               </a:rPr>
               <a:t>Об игре</a:t>
             </a:r>
-            <a:endParaRPr lang="ru-RU" altLang="en-US" spc="0">
-              <a:latin typeface="+mj-lt"/>
-            </a:endParaRPr>
-          </a:p>
-        </p:txBody>
-      </p:sp>
-      <p:pic>
-        <p:nvPicPr>
-          <p:cNvPr id="2" name="图片 1" descr="蓝色的高楼&#10;&#10;描述已自动生成"/>
-          <p:cNvPicPr>
-            <a:picLocks noChangeAspect="1"/>
-          </p:cNvPicPr>
-          <p:nvPr>
-            <p:custDataLst>
-              <p:tags r:id="rId2"/>
-            </p:custDataLst>
-          </p:nvPr>
-        </p:nvPicPr>
-        <p:blipFill rotWithShape="1">
-          <a:blip r:embed="rId3">
-            <a:extLst>
-              <a:ext uri="{28A0092B-C50C-407E-A947-70E740481C1C}">
-                <a14:useLocalDpi xmlns:a14="http://schemas.microsoft.com/office/drawing/2010/main" val="0"/>
-              </a:ext>
-            </a:extLst>
-          </a:blip>
-          <a:srcRect r="1045" b="44027"/>
-          <a:stretch>
-            <a:fillRect/>
-          </a:stretch>
-        </p:blipFill>
-        <p:spPr>
-          <a:xfrm>
-            <a:off x="6247580" y="1359936"/>
-            <a:ext cx="5225643" cy="1971562"/>
-          </a:xfrm>
-          <a:prstGeom prst="roundRect">
-            <a:avLst>
-              <a:gd name="adj" fmla="val 8058"/>
-            </a:avLst>
-          </a:prstGeom>
-          <a:ln w="3175" cap="flat" cmpd="sng" algn="ctr">
-            <a:solidFill>
-              <a:schemeClr val="tx1">
-                <a:lumMod val="40000"/>
-                <a:lumOff val="60000"/>
-                <a:alpha val="20000"/>
-              </a:schemeClr>
-            </a:solidFill>
-            <a:prstDash val="solid"/>
-            <a:round/>
-            <a:headEnd type="none" w="med" len="med"/>
-            <a:tailEnd type="none" w="med" len="med"/>
-          </a:ln>
-        </p:spPr>
-      </p:pic>
-      <p:pic>
-        <p:nvPicPr>
-          <p:cNvPr id="3" name="图片 2"/>
-          <p:cNvPicPr>
-            <a:picLocks noChangeAspect="1"/>
-          </p:cNvPicPr>
-          <p:nvPr>
-            <p:custDataLst>
-              <p:tags r:id="rId4"/>
-            </p:custDataLst>
-          </p:nvPr>
-        </p:nvPicPr>
-        <p:blipFill>
-          <a:blip r:embed="rId5">
-            <a:extLst>
-              <a:ext uri="{28A0092B-C50C-407E-A947-70E740481C1C}">
-                <a14:useLocalDpi xmlns:a14="http://schemas.microsoft.com/office/drawing/2010/main" val="0"/>
-              </a:ext>
-            </a:extLst>
-          </a:blip>
-          <a:srcRect t="15319" b="15319"/>
-          <a:stretch>
-            <a:fillRect/>
-          </a:stretch>
-        </p:blipFill>
-        <p:spPr>
-          <a:xfrm>
-            <a:off x="699565" y="1359936"/>
-            <a:ext cx="5225643" cy="1971562"/>
-          </a:xfrm>
-          <a:prstGeom prst="roundRect">
-            <a:avLst>
-              <a:gd name="adj" fmla="val 8058"/>
-            </a:avLst>
-          </a:prstGeom>
-          <a:ln w="3175" cap="flat" cmpd="sng" algn="ctr">
-            <a:solidFill>
-              <a:schemeClr val="tx1">
-                <a:lumMod val="40000"/>
-                <a:lumOff val="60000"/>
-                <a:alpha val="20000"/>
-              </a:schemeClr>
-            </a:solidFill>
-            <a:prstDash val="solid"/>
-            <a:round/>
-            <a:headEnd type="none" w="med" len="med"/>
-            <a:tailEnd type="none" w="med" len="med"/>
-          </a:ln>
-        </p:spPr>
-      </p:pic>
+          </a:p>
+        </p:txBody>
+      </p:sp>
       <p:cxnSp>
         <p:nvCxnSpPr>
           <p:cNvPr id="6" name="直接连接符 5"/>
           <p:cNvCxnSpPr/>
           <p:nvPr>
             <p:custDataLst>
-              <p:tags r:id="rId6"/>
+              <p:tags r:id="rId3"/>
             </p:custDataLst>
           </p:nvPr>
         </p:nvCxnSpPr>
@@ -12274,7 +12159,7 @@
           <p:cNvSpPr/>
           <p:nvPr>
             <p:custDataLst>
-              <p:tags r:id="rId7"/>
+              <p:tags r:id="rId4"/>
             </p:custDataLst>
           </p:nvPr>
         </p:nvSpPr>
@@ -12292,6 +12177,7 @@
           <a:bodyPr wrap="square" lIns="0" tIns="0" rIns="0" bIns="0" rtlCol="0" anchor="t" anchorCtr="0">
             <a:normAutofit/>
           </a:bodyPr>
+          <a:lstStyle/>
           <a:p>
             <a:pPr marL="285750" indent="-285750">
               <a:lnSpc>
@@ -12386,20 +12272,6 @@
               </a:rPr>
               <a:t>Потребляет мало ресурсов компьютера</a:t>
             </a:r>
-            <a:endParaRPr lang="ru-RU" altLang="en-US" sz="1600" kern="0" dirty="0">
-              <a:ln>
-                <a:noFill/>
-                <a:prstDash val="sysDot"/>
-              </a:ln>
-              <a:solidFill>
-                <a:schemeClr val="tx1">
-                  <a:lumMod val="85000"/>
-                  <a:lumOff val="15000"/>
-                </a:schemeClr>
-              </a:solidFill>
-              <a:latin typeface="+mn-lt"/>
-              <a:sym typeface="+mn-ea"/>
-            </a:endParaRPr>
           </a:p>
           <a:p>
             <a:pPr marL="285750" indent="-285750">
@@ -12432,20 +12304,6 @@
               </a:rPr>
               <a:t>Хорошая оптимизация</a:t>
             </a:r>
-            <a:endParaRPr lang="ru-RU" altLang="en-US" sz="1600" kern="0" dirty="0">
-              <a:ln>
-                <a:noFill/>
-                <a:prstDash val="sysDot"/>
-              </a:ln>
-              <a:solidFill>
-                <a:schemeClr val="tx1">
-                  <a:lumMod val="85000"/>
-                  <a:lumOff val="15000"/>
-                </a:schemeClr>
-              </a:solidFill>
-              <a:latin typeface="+mn-lt"/>
-              <a:sym typeface="+mn-ea"/>
-            </a:endParaRPr>
           </a:p>
         </p:txBody>
       </p:sp>
@@ -12455,7 +12313,7 @@
           <p:cNvSpPr/>
           <p:nvPr>
             <p:custDataLst>
-              <p:tags r:id="rId8"/>
+              <p:tags r:id="rId5"/>
             </p:custDataLst>
           </p:nvPr>
         </p:nvSpPr>
@@ -12473,6 +12331,7 @@
           <a:bodyPr wrap="square" lIns="0" tIns="0" rIns="0" bIns="0" rtlCol="0" anchor="ctr" anchorCtr="0">
             <a:normAutofit/>
           </a:bodyPr>
+          <a:lstStyle/>
           <a:p>
             <a:pPr>
               <a:spcBef>
@@ -12492,13 +12351,6 @@
               </a:rPr>
               <a:t>Нетребовательна к ПК</a:t>
             </a:r>
-            <a:endParaRPr lang="ru-RU" altLang="en-US" sz="2400" b="1" kern="0" dirty="0">
-              <a:solidFill>
-                <a:schemeClr val="accent1"/>
-              </a:solidFill>
-              <a:latin typeface="+mj-lt"/>
-              <a:sym typeface="+mn-ea"/>
-            </a:endParaRPr>
           </a:p>
         </p:txBody>
       </p:sp>
@@ -12508,7 +12360,7 @@
           <p:cNvCxnSpPr/>
           <p:nvPr>
             <p:custDataLst>
-              <p:tags r:id="rId9"/>
+              <p:tags r:id="rId6"/>
             </p:custDataLst>
           </p:nvPr>
         </p:nvCxnSpPr>
@@ -12563,7 +12415,7 @@
           <p:cNvSpPr/>
           <p:nvPr>
             <p:custDataLst>
-              <p:tags r:id="rId10"/>
+              <p:tags r:id="rId7"/>
             </p:custDataLst>
           </p:nvPr>
         </p:nvSpPr>
@@ -12581,6 +12433,7 @@
           <a:bodyPr wrap="square" lIns="0" tIns="0" rIns="0" bIns="0" rtlCol="0" anchor="t" anchorCtr="0">
             <a:normAutofit/>
           </a:bodyPr>
+          <a:lstStyle/>
           <a:p>
             <a:pPr marL="285750" indent="-285750">
               <a:lnSpc>
@@ -12611,19 +12464,6 @@
               </a:rPr>
               <a:t>В песочнице всегда есть чем заняться, можно эксперементировать с физикой или строить разные здания</a:t>
             </a:r>
-            <a:endParaRPr lang="ru-RU" altLang="en-US" sz="1600" kern="0" dirty="0">
-              <a:ln>
-                <a:noFill/>
-                <a:prstDash val="sysDot"/>
-              </a:ln>
-              <a:solidFill>
-                <a:schemeClr val="tx1">
-                  <a:lumMod val="85000"/>
-                  <a:lumOff val="15000"/>
-                </a:schemeClr>
-              </a:solidFill>
-              <a:sym typeface="+mn-ea"/>
-            </a:endParaRPr>
           </a:p>
           <a:p>
             <a:pPr marL="285750" indent="-285750">
@@ -12655,19 +12495,6 @@
               </a:rPr>
               <a:t>С помощью мультиплеера можно играть вместе с друзьями - так ещё интереснее</a:t>
             </a:r>
-            <a:endParaRPr lang="ru-RU" altLang="en-US" sz="1600" kern="0" dirty="0">
-              <a:ln>
-                <a:noFill/>
-                <a:prstDash val="sysDot"/>
-              </a:ln>
-              <a:solidFill>
-                <a:schemeClr val="tx1">
-                  <a:lumMod val="85000"/>
-                  <a:lumOff val="15000"/>
-                </a:schemeClr>
-              </a:solidFill>
-              <a:sym typeface="+mn-ea"/>
-            </a:endParaRPr>
           </a:p>
         </p:txBody>
       </p:sp>
@@ -12677,7 +12504,7 @@
           <p:cNvSpPr/>
           <p:nvPr>
             <p:custDataLst>
-              <p:tags r:id="rId11"/>
+              <p:tags r:id="rId8"/>
             </p:custDataLst>
           </p:nvPr>
         </p:nvSpPr>
@@ -12695,6 +12522,7 @@
           <a:bodyPr wrap="square" lIns="0" tIns="0" rIns="0" bIns="0" rtlCol="0" anchor="ctr" anchorCtr="0">
             <a:normAutofit/>
           </a:bodyPr>
+          <a:lstStyle/>
           <a:p>
             <a:pPr>
               <a:spcBef>
@@ -12714,19 +12542,36 @@
               </a:rPr>
               <a:t>Интересный геймплей</a:t>
             </a:r>
-            <a:endParaRPr lang="ru-RU" altLang="en-US" sz="2400" b="1" kern="0" dirty="0">
-              <a:solidFill>
-                <a:schemeClr val="accent1"/>
-              </a:solidFill>
-              <a:latin typeface="+mj-lt"/>
-              <a:sym typeface="+mn-ea"/>
-            </a:endParaRPr>
-          </a:p>
-        </p:txBody>
-      </p:sp>
+          </a:p>
+        </p:txBody>
+      </p:sp>
+      <p:pic>
+        <p:nvPicPr>
+          <p:cNvPr id="15" name="Рисунок 14"/>
+          <p:cNvPicPr>
+            <a:picLocks noChangeAspect="1"/>
+          </p:cNvPicPr>
+          <p:nvPr/>
+        </p:nvPicPr>
+        <p:blipFill>
+          <a:blip r:embed="rId11"/>
+          <a:stretch>
+            <a:fillRect/>
+          </a:stretch>
+        </p:blipFill>
+        <p:spPr>
+          <a:xfrm>
+            <a:off x="3375082" y="863741"/>
+            <a:ext cx="5448965" cy="2477371"/>
+          </a:xfrm>
+          <a:prstGeom prst="rect">
+            <a:avLst/>
+          </a:prstGeom>
+        </p:spPr>
+      </p:pic>
     </p:spTree>
     <p:custDataLst>
-      <p:tags r:id="rId12"/>
+      <p:tags r:id="rId1"/>
     </p:custDataLst>
   </p:cSld>
   <p:clrMapOvr>
@@ -12761,7 +12606,7 @@
           <p:nvPr>
             <p:ph type="title"/>
             <p:custDataLst>
-              <p:tags r:id="rId1"/>
+              <p:tags r:id="rId2"/>
             </p:custDataLst>
           </p:nvPr>
         </p:nvSpPr>
@@ -12782,114 +12627,16 @@
               <a:rPr lang="ru-RU" altLang="en-US" spc="0" dirty="0"/>
               <a:t>В игре есть много возможностей</a:t>
             </a:r>
-            <a:endParaRPr lang="ru-RU" altLang="en-US" spc="0" dirty="0"/>
-          </a:p>
-        </p:txBody>
-      </p:sp>
-      <p:pic>
-        <p:nvPicPr>
-          <p:cNvPr id="10" name="图片 9"/>
-          <p:cNvPicPr>
-            <a:picLocks noChangeAspect="1"/>
-          </p:cNvPicPr>
-          <p:nvPr>
-            <p:custDataLst>
-              <p:tags r:id="rId2"/>
-            </p:custDataLst>
-          </p:nvPr>
-        </p:nvPicPr>
-        <p:blipFill>
-          <a:blip r:embed="rId3"/>
-          <a:srcRect l="25221" t="1881" r="1727"/>
-          <a:stretch>
-            <a:fillRect/>
-          </a:stretch>
-        </p:blipFill>
-        <p:spPr>
-          <a:xfrm>
-            <a:off x="-1" y="1700825"/>
-            <a:ext cx="5348028" cy="4724400"/>
-          </a:xfrm>
-          <a:custGeom>
-            <a:avLst/>
-            <a:gdLst>
-              <a:gd name="connsiteX0" fmla="*/ 0 w 5348028"/>
-              <a:gd name="connsiteY0" fmla="*/ 0 h 4724400"/>
-              <a:gd name="connsiteX1" fmla="*/ 2985828 w 5348028"/>
-              <a:gd name="connsiteY1" fmla="*/ 0 h 4724400"/>
-              <a:gd name="connsiteX2" fmla="*/ 5348028 w 5348028"/>
-              <a:gd name="connsiteY2" fmla="*/ 2362200 h 4724400"/>
-              <a:gd name="connsiteX3" fmla="*/ 2985828 w 5348028"/>
-              <a:gd name="connsiteY3" fmla="*/ 4724400 h 4724400"/>
-              <a:gd name="connsiteX4" fmla="*/ 0 w 5348028"/>
-              <a:gd name="connsiteY4" fmla="*/ 4724400 h 4724400"/>
-            </a:gdLst>
-            <a:ahLst/>
-            <a:cxnLst>
-              <a:cxn ang="0">
-                <a:pos x="connsiteX0" y="connsiteY0"/>
-              </a:cxn>
-              <a:cxn ang="0">
-                <a:pos x="connsiteX1" y="connsiteY1"/>
-              </a:cxn>
-              <a:cxn ang="0">
-                <a:pos x="connsiteX2" y="connsiteY2"/>
-              </a:cxn>
-              <a:cxn ang="0">
-                <a:pos x="connsiteX3" y="connsiteY3"/>
-              </a:cxn>
-              <a:cxn ang="0">
-                <a:pos x="connsiteX4" y="connsiteY4"/>
-              </a:cxn>
-            </a:cxnLst>
-            <a:rect l="l" t="t" r="r" b="b"/>
-            <a:pathLst>
-              <a:path w="5348028" h="4724400">
-                <a:moveTo>
-                  <a:pt x="0" y="0"/>
-                </a:moveTo>
-                <a:lnTo>
-                  <a:pt x="2985828" y="0"/>
-                </a:lnTo>
-                <a:cubicBezTo>
-                  <a:pt x="4290118" y="0"/>
-                  <a:pt x="5348028" y="1057910"/>
-                  <a:pt x="5348028" y="2362200"/>
-                </a:cubicBezTo>
-                <a:cubicBezTo>
-                  <a:pt x="5348028" y="3666490"/>
-                  <a:pt x="4290118" y="4724400"/>
-                  <a:pt x="2985828" y="4724400"/>
-                </a:cubicBezTo>
-                <a:lnTo>
-                  <a:pt x="0" y="4724400"/>
-                </a:lnTo>
-                <a:close/>
-              </a:path>
-            </a:pathLst>
-          </a:custGeom>
-          <a:ln w="9525" cap="flat" cmpd="sng" algn="ctr">
-            <a:solidFill>
-              <a:schemeClr val="dk1">
-                <a:lumMod val="40000"/>
-                <a:lumOff val="60000"/>
-                <a:alpha val="50000"/>
-              </a:schemeClr>
-            </a:solidFill>
-            <a:prstDash val="solid"/>
-            <a:round/>
-            <a:headEnd type="none" w="med" len="med"/>
-            <a:tailEnd type="none" w="med" len="med"/>
-          </a:ln>
-        </p:spPr>
-      </p:pic>
+          </a:p>
+        </p:txBody>
+      </p:sp>
       <p:sp>
         <p:nvSpPr>
           <p:cNvPr id="13" name="矩形 12"/>
           <p:cNvSpPr/>
           <p:nvPr>
             <p:custDataLst>
-              <p:tags r:id="rId4"/>
+              <p:tags r:id="rId3"/>
             </p:custDataLst>
           </p:nvPr>
         </p:nvSpPr>
@@ -12907,6 +12654,7 @@
           <a:bodyPr wrap="square" lIns="0" tIns="0" rIns="0" bIns="0" rtlCol="0" anchor="t" anchorCtr="0">
             <a:normAutofit/>
           </a:bodyPr>
+          <a:lstStyle/>
           <a:p>
             <a:pPr>
               <a:lnSpc>
@@ -12932,16 +12680,6 @@
               </a:rPr>
               <a:t>Создаёт эффект погружения в игру и помогает забираться в недоступные места</a:t>
             </a:r>
-            <a:endParaRPr lang="ru-RU" altLang="en-US" sz="1200" dirty="0">
-              <a:solidFill>
-                <a:schemeClr val="tx1">
-                  <a:lumMod val="85000"/>
-                  <a:lumOff val="15000"/>
-                </a:schemeClr>
-              </a:solidFill>
-              <a:latin typeface="+mn-lt"/>
-              <a:sym typeface="+mn-ea"/>
-            </a:endParaRPr>
           </a:p>
         </p:txBody>
       </p:sp>
@@ -12951,7 +12689,7 @@
           <p:cNvSpPr/>
           <p:nvPr>
             <p:custDataLst>
-              <p:tags r:id="rId5"/>
+              <p:tags r:id="rId4"/>
             </p:custDataLst>
           </p:nvPr>
         </p:nvSpPr>
@@ -12967,8 +12705,9 @@
         </p:spPr>
         <p:txBody>
           <a:bodyPr wrap="square" lIns="0" tIns="0" rIns="0" bIns="0" rtlCol="0" anchor="b">
-            <a:normAutofit fontScale="80000"/>
+            <a:normAutofit fontScale="95000"/>
           </a:bodyPr>
+          <a:lstStyle/>
           <a:p>
             <a:pPr>
               <a:spcBef>
@@ -12988,13 +12727,6 @@
               </a:rPr>
               <a:t>Реалистичная физика</a:t>
             </a:r>
-            <a:endParaRPr lang="ru-RU" altLang="en-US" sz="2000" b="1" dirty="0">
-              <a:solidFill>
-                <a:schemeClr val="accent1"/>
-              </a:solidFill>
-              <a:latin typeface="+mj-lt"/>
-              <a:sym typeface="+mn-ea"/>
-            </a:endParaRPr>
           </a:p>
         </p:txBody>
       </p:sp>
@@ -13004,7 +12736,7 @@
           <p:cNvSpPr/>
           <p:nvPr>
             <p:custDataLst>
-              <p:tags r:id="rId6"/>
+              <p:tags r:id="rId5"/>
             </p:custDataLst>
           </p:nvPr>
         </p:nvSpPr>
@@ -13044,6 +12776,7 @@
           <a:bodyPr wrap="none" lIns="0" tIns="0" rIns="0" bIns="0" rtlCol="0" anchor="ctr">
             <a:noAutofit/>
           </a:bodyPr>
+          <a:lstStyle/>
           <a:p>
             <a:pPr algn="ctr">
               <a:spcBef>
@@ -13063,13 +12796,6 @@
               </a:rPr>
               <a:t>01</a:t>
             </a:r>
-            <a:endParaRPr lang="en-US" sz="2000" b="1" dirty="0">
-              <a:solidFill>
-                <a:schemeClr val="bg1"/>
-              </a:solidFill>
-              <a:latin typeface="+mn-lt"/>
-              <a:sym typeface="+mn-lt"/>
-            </a:endParaRPr>
           </a:p>
         </p:txBody>
       </p:sp>
@@ -13079,7 +12805,7 @@
           <p:cNvSpPr/>
           <p:nvPr>
             <p:custDataLst>
-              <p:tags r:id="rId7"/>
+              <p:tags r:id="rId6"/>
             </p:custDataLst>
           </p:nvPr>
         </p:nvSpPr>
@@ -13097,6 +12823,7 @@
           <a:bodyPr wrap="square" lIns="0" tIns="0" rIns="0" bIns="0" rtlCol="0" anchor="t" anchorCtr="0">
             <a:normAutofit/>
           </a:bodyPr>
+          <a:lstStyle/>
           <a:p>
             <a:pPr>
               <a:lnSpc>
@@ -13122,16 +12849,6 @@
               </a:rPr>
               <a:t>Даёт игроку ещё больший простор для иследования и игрой с физикой</a:t>
             </a:r>
-            <a:endParaRPr lang="ru-RU" altLang="en-US" sz="1200" dirty="0">
-              <a:solidFill>
-                <a:schemeClr val="tx1">
-                  <a:lumMod val="85000"/>
-                  <a:lumOff val="15000"/>
-                </a:schemeClr>
-              </a:solidFill>
-              <a:latin typeface="+mn-lt"/>
-              <a:sym typeface="+mn-ea"/>
-            </a:endParaRPr>
           </a:p>
         </p:txBody>
       </p:sp>
@@ -13141,7 +12858,7 @@
           <p:cNvSpPr/>
           <p:nvPr>
             <p:custDataLst>
-              <p:tags r:id="rId8"/>
+              <p:tags r:id="rId7"/>
             </p:custDataLst>
           </p:nvPr>
         </p:nvSpPr>
@@ -13157,8 +12874,9 @@
         </p:spPr>
         <p:txBody>
           <a:bodyPr wrap="square" lIns="0" tIns="0" rIns="0" bIns="0" rtlCol="0" anchor="b">
-            <a:normAutofit fontScale="80000"/>
+            <a:normAutofit fontScale="87500"/>
           </a:bodyPr>
+          <a:lstStyle/>
           <a:p>
             <a:pPr>
               <a:spcBef>
@@ -13178,13 +12896,6 @@
               </a:rPr>
               <a:t>Интересная механика передвижения</a:t>
             </a:r>
-            <a:endParaRPr lang="ru-RU" altLang="en-US" sz="2000" b="1" dirty="0">
-              <a:solidFill>
-                <a:schemeClr val="accent1"/>
-              </a:solidFill>
-              <a:latin typeface="+mj-lt"/>
-              <a:sym typeface="+mn-ea"/>
-            </a:endParaRPr>
           </a:p>
         </p:txBody>
       </p:sp>
@@ -13194,7 +12905,7 @@
           <p:cNvSpPr/>
           <p:nvPr>
             <p:custDataLst>
-              <p:tags r:id="rId9"/>
+              <p:tags r:id="rId8"/>
             </p:custDataLst>
           </p:nvPr>
         </p:nvSpPr>
@@ -13234,6 +12945,7 @@
           <a:bodyPr wrap="none" lIns="0" tIns="0" rIns="0" bIns="0" rtlCol="0" anchor="ctr">
             <a:noAutofit/>
           </a:bodyPr>
+          <a:lstStyle/>
           <a:p>
             <a:pPr algn="ctr">
               <a:spcBef>
@@ -13253,13 +12965,6 @@
               </a:rPr>
               <a:t>02</a:t>
             </a:r>
-            <a:endParaRPr lang="en-US" sz="2000" b="1" dirty="0">
-              <a:solidFill>
-                <a:schemeClr val="bg1"/>
-              </a:solidFill>
-              <a:latin typeface="+mn-lt"/>
-              <a:sym typeface="+mn-lt"/>
-            </a:endParaRPr>
           </a:p>
         </p:txBody>
       </p:sp>
@@ -13269,7 +12974,7 @@
           <p:cNvSpPr/>
           <p:nvPr>
             <p:custDataLst>
-              <p:tags r:id="rId10"/>
+              <p:tags r:id="rId9"/>
             </p:custDataLst>
           </p:nvPr>
         </p:nvSpPr>
@@ -13287,6 +12992,7 @@
           <a:bodyPr wrap="square" lIns="0" tIns="0" rIns="0" bIns="0" rtlCol="0" anchor="t" anchorCtr="0">
             <a:normAutofit/>
           </a:bodyPr>
+          <a:lstStyle/>
           <a:p>
             <a:pPr>
               <a:lnSpc>
@@ -13312,16 +13018,6 @@
               </a:rPr>
               <a:t>Игроку всегда будет что поиследовать, каждая новая локация будет удивлять чем-то особенным</a:t>
             </a:r>
-            <a:endParaRPr lang="ru-RU" altLang="en-US" sz="1200" dirty="0">
-              <a:solidFill>
-                <a:schemeClr val="tx1">
-                  <a:lumMod val="85000"/>
-                  <a:lumOff val="15000"/>
-                </a:schemeClr>
-              </a:solidFill>
-              <a:latin typeface="+mn-lt"/>
-              <a:sym typeface="+mn-ea"/>
-            </a:endParaRPr>
           </a:p>
         </p:txBody>
       </p:sp>
@@ -13331,7 +13027,7 @@
           <p:cNvSpPr/>
           <p:nvPr>
             <p:custDataLst>
-              <p:tags r:id="rId11"/>
+              <p:tags r:id="rId10"/>
             </p:custDataLst>
           </p:nvPr>
         </p:nvSpPr>
@@ -13347,8 +13043,9 @@
         </p:spPr>
         <p:txBody>
           <a:bodyPr wrap="square" lIns="0" tIns="0" rIns="0" bIns="0" rtlCol="0" anchor="b">
-            <a:normAutofit fontScale="80000"/>
+            <a:normAutofit fontScale="95000"/>
           </a:bodyPr>
+          <a:lstStyle/>
           <a:p>
             <a:pPr>
               <a:spcBef>
@@ -13368,13 +13065,6 @@
               </a:rPr>
               <a:t>Много локаций</a:t>
             </a:r>
-            <a:endParaRPr lang="ru-RU" altLang="en-US" sz="2000" b="1" dirty="0">
-              <a:solidFill>
-                <a:schemeClr val="accent1"/>
-              </a:solidFill>
-              <a:latin typeface="+mj-lt"/>
-              <a:sym typeface="+mn-ea"/>
-            </a:endParaRPr>
           </a:p>
         </p:txBody>
       </p:sp>
@@ -13384,7 +13074,7 @@
           <p:cNvSpPr/>
           <p:nvPr>
             <p:custDataLst>
-              <p:tags r:id="rId12"/>
+              <p:tags r:id="rId11"/>
             </p:custDataLst>
           </p:nvPr>
         </p:nvSpPr>
@@ -13424,6 +13114,7 @@
           <a:bodyPr wrap="none" lIns="0" tIns="0" rIns="0" bIns="0" rtlCol="0" anchor="ctr">
             <a:noAutofit/>
           </a:bodyPr>
+          <a:lstStyle/>
           <a:p>
             <a:pPr algn="ctr">
               <a:spcBef>
@@ -13443,19 +13134,36 @@
               </a:rPr>
               <a:t>03</a:t>
             </a:r>
-            <a:endParaRPr lang="en-US" sz="2000" b="1" dirty="0">
-              <a:solidFill>
-                <a:schemeClr val="bg1"/>
-              </a:solidFill>
-              <a:latin typeface="+mn-lt"/>
-              <a:sym typeface="+mn-lt"/>
-            </a:endParaRPr>
-          </a:p>
-        </p:txBody>
-      </p:sp>
+          </a:p>
+        </p:txBody>
+      </p:sp>
+      <p:pic>
+        <p:nvPicPr>
+          <p:cNvPr id="2" name="Рисунок 1"/>
+          <p:cNvPicPr>
+            <a:picLocks noChangeAspect="1"/>
+          </p:cNvPicPr>
+          <p:nvPr/>
+        </p:nvPicPr>
+        <p:blipFill>
+          <a:blip r:embed="rId13"/>
+          <a:stretch>
+            <a:fillRect/>
+          </a:stretch>
+        </p:blipFill>
+        <p:spPr>
+          <a:xfrm>
+            <a:off x="154317" y="2570068"/>
+            <a:ext cx="5790476" cy="2942857"/>
+          </a:xfrm>
+          <a:prstGeom prst="rect">
+            <a:avLst/>
+          </a:prstGeom>
+        </p:spPr>
+      </p:pic>
     </p:spTree>
     <p:custDataLst>
-      <p:tags r:id="rId13"/>
+      <p:tags r:id="rId1"/>
     </p:custDataLst>
   </p:cSld>
   <p:clrMapOvr>
@@ -13490,7 +13198,7 @@
           <p:nvPr/>
         </p:nvPicPr>
         <p:blipFill>
-          <a:blip r:embed="rId1"/>
+          <a:blip r:embed="rId13"/>
           <a:stretch>
             <a:fillRect/>
           </a:stretch>
@@ -13526,7 +13234,7 @@
         </p:spPr>
         <p:txBody>
           <a:bodyPr wrap="square" lIns="0" tIns="0" rIns="0" bIns="0" anchor="b">
-            <a:normAutofit fontScale="90000"/>
+            <a:normAutofit/>
           </a:bodyPr>
           <a:lstStyle/>
           <a:p>
@@ -13557,124 +13265,13 @@
           </a:p>
         </p:txBody>
       </p:sp>
-      <p:pic>
-        <p:nvPicPr>
-          <p:cNvPr id="18" name="图片 17"/>
-          <p:cNvPicPr>
-            <a:picLocks noChangeAspect="1"/>
-          </p:cNvPicPr>
+      <p:sp>
+        <p:nvSpPr>
+          <p:cNvPr id="11" name="矩形 10"/>
+          <p:cNvSpPr/>
           <p:nvPr>
             <p:custDataLst>
               <p:tags r:id="rId3"/>
-            </p:custDataLst>
-          </p:nvPr>
-        </p:nvPicPr>
-        <p:blipFill>
-          <a:blip r:embed="rId4"/>
-          <a:stretch>
-            <a:fillRect/>
-          </a:stretch>
-        </p:blipFill>
-        <p:spPr>
-          <a:xfrm>
-            <a:off x="6155050" y="2"/>
-            <a:ext cx="6036950" cy="6040857"/>
-          </a:xfrm>
-          <a:custGeom>
-            <a:avLst/>
-            <a:gdLst>
-              <a:gd name="connsiteX0" fmla="*/ 2276483 w 6036950"/>
-              <a:gd name="connsiteY0" fmla="*/ 0 h 6040857"/>
-              <a:gd name="connsiteX1" fmla="*/ 6036950 w 6036950"/>
-              <a:gd name="connsiteY1" fmla="*/ 0 h 6040857"/>
-              <a:gd name="connsiteX2" fmla="*/ 6036950 w 6036950"/>
-              <a:gd name="connsiteY2" fmla="*/ 2936006 h 6040857"/>
-              <a:gd name="connsiteX3" fmla="*/ 4238679 w 6036950"/>
-              <a:gd name="connsiteY3" fmla="*/ 5156686 h 6040857"/>
-              <a:gd name="connsiteX4" fmla="*/ 884172 w 6036950"/>
-              <a:gd name="connsiteY4" fmla="*/ 5509259 h 6040857"/>
-              <a:gd name="connsiteX5" fmla="*/ 531600 w 6036950"/>
-              <a:gd name="connsiteY5" fmla="*/ 2154752 h 6040857"/>
-            </a:gdLst>
-            <a:ahLst/>
-            <a:cxnLst>
-              <a:cxn ang="0">
-                <a:pos x="connsiteX0" y="connsiteY0"/>
-              </a:cxn>
-              <a:cxn ang="0">
-                <a:pos x="connsiteX1" y="connsiteY1"/>
-              </a:cxn>
-              <a:cxn ang="0">
-                <a:pos x="connsiteX2" y="connsiteY2"/>
-              </a:cxn>
-              <a:cxn ang="0">
-                <a:pos x="connsiteX3" y="connsiteY3"/>
-              </a:cxn>
-              <a:cxn ang="0">
-                <a:pos x="connsiteX4" y="connsiteY4"/>
-              </a:cxn>
-              <a:cxn ang="0">
-                <a:pos x="connsiteX5" y="connsiteY5"/>
-              </a:cxn>
-            </a:cxnLst>
-            <a:rect l="l" t="t" r="r" b="b"/>
-            <a:pathLst>
-              <a:path w="6036950" h="6040857">
-                <a:moveTo>
-                  <a:pt x="2276483" y="0"/>
-                </a:moveTo>
-                <a:lnTo>
-                  <a:pt x="6036950" y="0"/>
-                </a:lnTo>
-                <a:lnTo>
-                  <a:pt x="6036950" y="2936006"/>
-                </a:lnTo>
-                <a:lnTo>
-                  <a:pt x="4238679" y="5156686"/>
-                </a:lnTo>
-                <a:cubicBezTo>
-                  <a:pt x="3409718" y="6180367"/>
-                  <a:pt x="1907854" y="6338220"/>
-                  <a:pt x="884172" y="5509259"/>
-                </a:cubicBezTo>
-                <a:cubicBezTo>
-                  <a:pt x="-139509" y="4680298"/>
-                  <a:pt x="-297361" y="3178434"/>
-                  <a:pt x="531600" y="2154752"/>
-                </a:cubicBezTo>
-                <a:close/>
-              </a:path>
-            </a:pathLst>
-          </a:custGeom>
-          <a:ln w="9525" cap="flat" cmpd="sng" algn="ctr">
-            <a:solidFill>
-              <a:schemeClr val="tx1">
-                <a:lumMod val="40000"/>
-                <a:lumOff val="60000"/>
-                <a:alpha val="50000"/>
-              </a:schemeClr>
-            </a:solidFill>
-            <a:prstDash val="solid"/>
-            <a:round/>
-            <a:headEnd type="none" w="med" len="med"/>
-            <a:tailEnd type="none" w="med" len="med"/>
-          </a:ln>
-          <a:effectLst>
-            <a:outerShdw dist="254000" dir="4200000" algn="ctr" rotWithShape="0">
-              <a:schemeClr val="accent1">
-                <a:alpha val="15000"/>
-              </a:schemeClr>
-            </a:outerShdw>
-          </a:effectLst>
-        </p:spPr>
-      </p:pic>
-      <p:sp>
-        <p:nvSpPr>
-          <p:cNvPr id="11" name="矩形 10"/>
-          <p:cNvSpPr/>
-          <p:nvPr>
-            <p:custDataLst>
-              <p:tags r:id="rId5"/>
             </p:custDataLst>
           </p:nvPr>
         </p:nvSpPr>
@@ -13692,6 +13289,7 @@
           <a:bodyPr wrap="square" lIns="0" tIns="0" rIns="0" bIns="0" rtlCol="0" anchor="t" anchorCtr="0">
             <a:normAutofit/>
           </a:bodyPr>
+          <a:lstStyle/>
           <a:p>
             <a:pPr>
               <a:lnSpc>
@@ -13716,15 +13314,6 @@
               </a:rPr>
               <a:t>Кем будет ваш персонаж - зависит только от вашего воображения</a:t>
             </a:r>
-            <a:endParaRPr lang="ru-RU" altLang="en-US" sz="1400" dirty="0">
-              <a:solidFill>
-                <a:schemeClr val="tx1">
-                  <a:lumMod val="85000"/>
-                  <a:lumOff val="15000"/>
-                </a:schemeClr>
-              </a:solidFill>
-              <a:latin typeface="+mn-lt"/>
-            </a:endParaRPr>
           </a:p>
         </p:txBody>
       </p:sp>
@@ -13734,7 +13323,7 @@
           <p:cNvSpPr/>
           <p:nvPr>
             <p:custDataLst>
-              <p:tags r:id="rId6"/>
+              <p:tags r:id="rId4"/>
             </p:custDataLst>
           </p:nvPr>
         </p:nvSpPr>
@@ -13750,8 +13339,9 @@
         </p:spPr>
         <p:txBody>
           <a:bodyPr wrap="square" lIns="0" tIns="0" rIns="0" bIns="0" rtlCol="0" anchor="b">
-            <a:normAutofit fontScale="80000"/>
+            <a:normAutofit fontScale="95000"/>
           </a:bodyPr>
+          <a:lstStyle/>
           <a:p>
             <a:pPr>
               <a:spcBef>
@@ -13770,12 +13360,6 @@
               </a:rPr>
               <a:t>Изменение спрайта персонажа</a:t>
             </a:r>
-            <a:endParaRPr lang="ru-RU" altLang="en-US" b="1" dirty="0">
-              <a:solidFill>
-                <a:schemeClr val="accent1"/>
-              </a:solidFill>
-              <a:latin typeface="+mj-lt"/>
-            </a:endParaRPr>
           </a:p>
         </p:txBody>
       </p:sp>
@@ -13785,7 +13369,7 @@
           <p:cNvSpPr/>
           <p:nvPr>
             <p:custDataLst>
-              <p:tags r:id="rId7"/>
+              <p:tags r:id="rId5"/>
             </p:custDataLst>
           </p:nvPr>
         </p:nvSpPr>
@@ -13812,6 +13396,7 @@
           <a:bodyPr wrap="none" lIns="0" tIns="0" rIns="0" bIns="0" rtlCol="0" anchor="ctr" anchorCtr="0">
             <a:normAutofit/>
           </a:bodyPr>
+          <a:lstStyle/>
           <a:p>
             <a:pPr algn="ctr">
               <a:spcBef>
@@ -13830,12 +13415,6 @@
               </a:rPr>
               <a:t>01</a:t>
             </a:r>
-            <a:endParaRPr lang="en-US" sz="1600" b="1" dirty="0">
-              <a:solidFill>
-                <a:schemeClr val="bg1"/>
-              </a:solidFill>
-              <a:latin typeface="+mn-lt"/>
-            </a:endParaRPr>
           </a:p>
         </p:txBody>
       </p:sp>
@@ -13845,7 +13424,7 @@
           <p:cNvSpPr/>
           <p:nvPr>
             <p:custDataLst>
-              <p:tags r:id="rId8"/>
+              <p:tags r:id="rId6"/>
             </p:custDataLst>
           </p:nvPr>
         </p:nvSpPr>
@@ -13872,6 +13451,7 @@
           <a:bodyPr wrap="none" lIns="0" tIns="0" rIns="0" bIns="0" rtlCol="0" anchor="ctr" anchorCtr="0">
             <a:normAutofit/>
           </a:bodyPr>
+          <a:lstStyle/>
           <a:p>
             <a:pPr algn="ctr">
               <a:spcBef>
@@ -13890,12 +13470,6 @@
               </a:rPr>
               <a:t>03</a:t>
             </a:r>
-            <a:endParaRPr lang="en-US" sz="1600" b="1" dirty="0">
-              <a:solidFill>
-                <a:schemeClr val="bg1"/>
-              </a:solidFill>
-              <a:latin typeface="+mn-lt"/>
-            </a:endParaRPr>
           </a:p>
         </p:txBody>
       </p:sp>
@@ -13905,7 +13479,7 @@
           <p:cNvSpPr/>
           <p:nvPr>
             <p:custDataLst>
-              <p:tags r:id="rId9"/>
+              <p:tags r:id="rId7"/>
             </p:custDataLst>
           </p:nvPr>
         </p:nvSpPr>
@@ -13923,6 +13497,7 @@
           <a:bodyPr wrap="square" lIns="0" tIns="0" rIns="0" bIns="0" rtlCol="0" anchor="t" anchorCtr="0">
             <a:noAutofit/>
           </a:bodyPr>
+          <a:lstStyle/>
           <a:p>
             <a:pPr>
               <a:lnSpc>
@@ -13959,15 +13534,6 @@
               </a:rPr>
               <a:t>FPS</a:t>
             </a:r>
-            <a:endParaRPr lang="en-US" altLang="en-US" sz="1400" dirty="0">
-              <a:solidFill>
-                <a:schemeClr val="tx1">
-                  <a:lumMod val="85000"/>
-                  <a:lumOff val="15000"/>
-                </a:schemeClr>
-              </a:solidFill>
-              <a:latin typeface="+mn-lt"/>
-            </a:endParaRPr>
           </a:p>
         </p:txBody>
       </p:sp>
@@ -13977,7 +13543,7 @@
           <p:cNvSpPr/>
           <p:nvPr>
             <p:custDataLst>
-              <p:tags r:id="rId10"/>
+              <p:tags r:id="rId8"/>
             </p:custDataLst>
           </p:nvPr>
         </p:nvSpPr>
@@ -13993,8 +13559,9 @@
         </p:spPr>
         <p:txBody>
           <a:bodyPr wrap="square" lIns="0" tIns="0" rIns="0" bIns="0" rtlCol="0" anchor="b">
-            <a:normAutofit fontScale="80000"/>
+            <a:normAutofit fontScale="87500"/>
           </a:bodyPr>
+          <a:lstStyle/>
           <a:p>
             <a:pPr>
               <a:spcBef>
@@ -14049,12 +13616,6 @@
               </a:rPr>
               <a:t> аксесуаров игрока</a:t>
             </a:r>
-            <a:endParaRPr lang="ru-RU" altLang="en-US" b="1">
-              <a:solidFill>
-                <a:schemeClr val="accent1"/>
-              </a:solidFill>
-              <a:latin typeface="+mj-lt"/>
-            </a:endParaRPr>
           </a:p>
         </p:txBody>
       </p:sp>
@@ -14064,7 +13625,7 @@
           <p:cNvSpPr/>
           <p:nvPr>
             <p:custDataLst>
-              <p:tags r:id="rId11"/>
+              <p:tags r:id="rId9"/>
             </p:custDataLst>
           </p:nvPr>
         </p:nvSpPr>
@@ -14091,6 +13652,7 @@
           <a:bodyPr wrap="none" lIns="0" tIns="0" rIns="0" bIns="0" rtlCol="0" anchor="ctr" anchorCtr="0">
             <a:normAutofit/>
           </a:bodyPr>
+          <a:lstStyle/>
           <a:p>
             <a:pPr algn="ctr">
               <a:spcBef>
@@ -14109,12 +13671,6 @@
               </a:rPr>
               <a:t>02</a:t>
             </a:r>
-            <a:endParaRPr lang="en-US" sz="1600" b="1" dirty="0">
-              <a:solidFill>
-                <a:schemeClr val="bg1"/>
-              </a:solidFill>
-              <a:latin typeface="+mn-lt"/>
-            </a:endParaRPr>
           </a:p>
         </p:txBody>
       </p:sp>
@@ -14124,7 +13680,7 @@
           <p:cNvSpPr/>
           <p:nvPr>
             <p:custDataLst>
-              <p:tags r:id="rId12"/>
+              <p:tags r:id="rId10"/>
             </p:custDataLst>
           </p:nvPr>
         </p:nvSpPr>
@@ -14142,6 +13698,7 @@
           <a:bodyPr wrap="square" lIns="0" tIns="0" rIns="0" bIns="0" rtlCol="0" anchor="t" anchorCtr="0">
             <a:normAutofit/>
           </a:bodyPr>
+          <a:lstStyle/>
           <a:p>
             <a:pPr>
               <a:lnSpc>
@@ -14166,15 +13723,6 @@
               </a:rPr>
               <a:t>Можно задать игроку любое имя которое пожелаете</a:t>
             </a:r>
-            <a:endParaRPr lang="ru-RU" altLang="en-US" sz="1400" dirty="0">
-              <a:solidFill>
-                <a:schemeClr val="tx1">
-                  <a:lumMod val="85000"/>
-                  <a:lumOff val="15000"/>
-                </a:schemeClr>
-              </a:solidFill>
-              <a:latin typeface="+mn-lt"/>
-            </a:endParaRPr>
           </a:p>
         </p:txBody>
       </p:sp>
@@ -14184,7 +13732,7 @@
           <p:cNvSpPr/>
           <p:nvPr>
             <p:custDataLst>
-              <p:tags r:id="rId13"/>
+              <p:tags r:id="rId11"/>
             </p:custDataLst>
           </p:nvPr>
         </p:nvSpPr>
@@ -14200,8 +13748,9 @@
         </p:spPr>
         <p:txBody>
           <a:bodyPr wrap="square" lIns="0" tIns="0" rIns="0" bIns="0" rtlCol="0" anchor="b">
-            <a:normAutofit fontScale="80000"/>
+            <a:normAutofit fontScale="95000"/>
           </a:bodyPr>
+          <a:lstStyle/>
           <a:p>
             <a:pPr>
               <a:spcBef>
@@ -14220,18 +13769,36 @@
               </a:rPr>
               <a:t>Пользовательские ники</a:t>
             </a:r>
-            <a:endParaRPr lang="ru-RU" altLang="en-US" b="1">
-              <a:solidFill>
-                <a:schemeClr val="accent1"/>
-              </a:solidFill>
-              <a:latin typeface="+mj-lt"/>
-            </a:endParaRPr>
-          </a:p>
-        </p:txBody>
-      </p:sp>
+          </a:p>
+        </p:txBody>
+      </p:sp>
+      <p:pic>
+        <p:nvPicPr>
+          <p:cNvPr id="4" name="Рисунок 3"/>
+          <p:cNvPicPr>
+            <a:picLocks noChangeAspect="1"/>
+          </p:cNvPicPr>
+          <p:nvPr/>
+        </p:nvPicPr>
+        <p:blipFill>
+          <a:blip r:embed="rId14"/>
+          <a:stretch>
+            <a:fillRect/>
+          </a:stretch>
+        </p:blipFill>
+        <p:spPr>
+          <a:xfrm>
+            <a:off x="5820728" y="2306919"/>
+            <a:ext cx="5571429" cy="3038095"/>
+          </a:xfrm>
+          <a:prstGeom prst="rect">
+            <a:avLst/>
+          </a:prstGeom>
+        </p:spPr>
+      </p:pic>
     </p:spTree>
     <p:custDataLst>
-      <p:tags r:id="rId14"/>
+      <p:tags r:id="rId1"/>
     </p:custDataLst>
   </p:cSld>
   <p:clrMapOvr>
@@ -14266,7 +13833,7 @@
           <p:nvPr>
             <p:ph type="title"/>
             <p:custDataLst>
-              <p:tags r:id="rId1"/>
+              <p:tags r:id="rId2"/>
             </p:custDataLst>
           </p:nvPr>
         </p:nvSpPr>
@@ -14287,103 +13854,16 @@
               <a:rPr lang="ru-RU" altLang="en-US" spc="0" dirty="0"/>
               <a:t>Система мультиплеера</a:t>
             </a:r>
-            <a:endParaRPr lang="ru-RU" altLang="en-US" spc="0" dirty="0"/>
-          </a:p>
-        </p:txBody>
-      </p:sp>
-      <p:pic>
-        <p:nvPicPr>
-          <p:cNvPr id="9" name="http://photo-static-api.fotomore.com/creative/vcg/veer/400/new/VCG41N531480994.jpg?uid=386&amp;timestamp=1685070879&amp;sign=638fe59e20d56783b78d4e80af2eb419"/>
-          <p:cNvPicPr>
-            <a:picLocks noChangeAspect="1"/>
-          </p:cNvPicPr>
-          <p:nvPr>
-            <p:custDataLst>
-              <p:tags r:id="rId2"/>
-            </p:custDataLst>
-          </p:nvPr>
-        </p:nvPicPr>
-        <p:blipFill>
-          <a:blip r:embed="rId3"/>
-          <a:srcRect l="7049" r="7049"/>
-          <a:stretch>
-            <a:fillRect/>
-          </a:stretch>
-        </p:blipFill>
-        <p:spPr>
-          <a:xfrm>
-            <a:off x="7502167" y="0"/>
-            <a:ext cx="4714875" cy="6858000"/>
-          </a:xfrm>
-          <a:custGeom>
-            <a:avLst/>
-            <a:gdLst/>
-            <a:ahLst/>
-            <a:cxnLst>
-              <a:cxn ang="3">
-                <a:pos x="hc" y="t"/>
-              </a:cxn>
-              <a:cxn ang="cd2">
-                <a:pos x="l" y="vc"/>
-              </a:cxn>
-              <a:cxn ang="cd4">
-                <a:pos x="hc" y="b"/>
-              </a:cxn>
-              <a:cxn ang="0">
-                <a:pos x="r" y="vc"/>
-              </a:cxn>
-            </a:cxnLst>
-            <a:rect l="l" t="t" r="r" b="b"/>
-            <a:pathLst>
-              <a:path w="7425" h="10800">
-                <a:moveTo>
-                  <a:pt x="2" y="5375"/>
-                </a:moveTo>
-                <a:cubicBezTo>
-                  <a:pt x="-52" y="3149"/>
-                  <a:pt x="1257" y="1045"/>
-                  <a:pt x="2815" y="0"/>
-                </a:cubicBezTo>
-                <a:lnTo>
-                  <a:pt x="7425" y="0"/>
-                </a:lnTo>
-                <a:lnTo>
-                  <a:pt x="7425" y="10800"/>
-                </a:lnTo>
-                <a:lnTo>
-                  <a:pt x="2888" y="10800"/>
-                </a:lnTo>
-                <a:cubicBezTo>
-                  <a:pt x="1119" y="9677"/>
-                  <a:pt x="-33" y="7429"/>
-                  <a:pt x="2" y="5375"/>
-                </a:cubicBezTo>
-                <a:close/>
-              </a:path>
-            </a:pathLst>
-          </a:custGeom>
-          <a:ln w="9525" cap="flat" cmpd="sng" algn="ctr">
-            <a:solidFill>
-              <a:schemeClr val="dk1">
-                <a:lumMod val="40000"/>
-                <a:lumOff val="60000"/>
-                <a:alpha val="50000"/>
-              </a:schemeClr>
-            </a:solidFill>
-            <a:prstDash val="solid"/>
-            <a:round/>
-            <a:headEnd type="none" w="med" len="med"/>
-            <a:tailEnd type="none" w="med" len="med"/>
-          </a:ln>
-        </p:spPr>
-      </p:pic>
+          </a:p>
+        </p:txBody>
+      </p:sp>
       <p:sp>
         <p:nvSpPr>
           <p:cNvPr id="2" name="矩形 1"/>
           <p:cNvSpPr/>
           <p:nvPr>
             <p:custDataLst>
-              <p:tags r:id="rId4"/>
+              <p:tags r:id="rId3"/>
             </p:custDataLst>
           </p:nvPr>
         </p:nvSpPr>
@@ -14401,6 +13881,7 @@
           <a:bodyPr wrap="square" lIns="0" tIns="0" rIns="0" bIns="0" rtlCol="0" anchor="t" anchorCtr="0">
             <a:normAutofit/>
           </a:bodyPr>
+          <a:lstStyle/>
           <a:p>
             <a:pPr>
               <a:lnSpc>
@@ -14426,16 +13907,6 @@
               </a:rPr>
               <a:t>Каждый игрок может запустить сервер на своём устройстве и пригласить друга</a:t>
             </a:r>
-            <a:endParaRPr lang="ru-RU" altLang="en-US" sz="1400" dirty="0">
-              <a:solidFill>
-                <a:schemeClr val="tx1">
-                  <a:lumMod val="85000"/>
-                  <a:lumOff val="15000"/>
-                </a:schemeClr>
-              </a:solidFill>
-              <a:latin typeface="+mn-lt"/>
-              <a:sym typeface="+mn-ea"/>
-            </a:endParaRPr>
           </a:p>
         </p:txBody>
       </p:sp>
@@ -14445,7 +13916,7 @@
           <p:cNvSpPr/>
           <p:nvPr>
             <p:custDataLst>
-              <p:tags r:id="rId5"/>
+              <p:tags r:id="rId4"/>
             </p:custDataLst>
           </p:nvPr>
         </p:nvSpPr>
@@ -14461,8 +13932,9 @@
         </p:spPr>
         <p:txBody>
           <a:bodyPr wrap="square" lIns="0" tIns="0" rIns="0" bIns="0" rtlCol="0" anchor="b">
-            <a:normAutofit fontScale="90000"/>
+            <a:normAutofit fontScale="97500"/>
           </a:bodyPr>
+          <a:lstStyle/>
           <a:p>
             <a:pPr>
               <a:spcBef>
@@ -14482,13 +13954,6 @@
               </a:rPr>
               <a:t>Создание локальных серверов</a:t>
             </a:r>
-            <a:endParaRPr lang="ru-RU" altLang="en-US" sz="2000" b="1" dirty="0">
-              <a:solidFill>
-                <a:schemeClr val="accent1"/>
-              </a:solidFill>
-              <a:latin typeface="+mj-lt"/>
-              <a:sym typeface="+mn-ea"/>
-            </a:endParaRPr>
           </a:p>
         </p:txBody>
       </p:sp>
@@ -14498,7 +13963,7 @@
           <p:cNvSpPr/>
           <p:nvPr>
             <p:custDataLst>
-              <p:tags r:id="rId6"/>
+              <p:tags r:id="rId5"/>
             </p:custDataLst>
           </p:nvPr>
         </p:nvSpPr>
@@ -14538,6 +14003,7 @@
           <a:bodyPr wrap="none" lIns="0" tIns="0" rIns="0" bIns="0" rtlCol="0" anchor="ctr">
             <a:noAutofit/>
           </a:bodyPr>
+          <a:lstStyle/>
           <a:p>
             <a:pPr algn="ctr">
               <a:spcBef>
@@ -14557,13 +14023,6 @@
               </a:rPr>
               <a:t>01</a:t>
             </a:r>
-            <a:endParaRPr lang="en-US" sz="2000" b="1" dirty="0">
-              <a:solidFill>
-                <a:schemeClr val="bg1"/>
-              </a:solidFill>
-              <a:latin typeface="+mn-lt"/>
-              <a:sym typeface="+mn-lt"/>
-            </a:endParaRPr>
           </a:p>
         </p:txBody>
       </p:sp>
@@ -14573,7 +14032,7 @@
           <p:cNvSpPr/>
           <p:nvPr>
             <p:custDataLst>
-              <p:tags r:id="rId7"/>
+              <p:tags r:id="rId6"/>
             </p:custDataLst>
           </p:nvPr>
         </p:nvSpPr>
@@ -14591,6 +14050,7 @@
           <a:bodyPr wrap="square" lIns="0" tIns="0" rIns="0" bIns="0" rtlCol="0" anchor="t" anchorCtr="0">
             <a:normAutofit/>
           </a:bodyPr>
+          <a:lstStyle/>
           <a:p>
             <a:pPr>
               <a:lnSpc>
@@ -14616,16 +14076,6 @@
               </a:rPr>
               <a:t>Даже на слабом компьютере сервер не будет сильно нагружать процессор</a:t>
             </a:r>
-            <a:endParaRPr lang="ru-RU" altLang="en-US" sz="1400" dirty="0">
-              <a:solidFill>
-                <a:schemeClr val="tx1">
-                  <a:lumMod val="85000"/>
-                  <a:lumOff val="15000"/>
-                </a:schemeClr>
-              </a:solidFill>
-              <a:latin typeface="+mn-lt"/>
-              <a:sym typeface="+mn-ea"/>
-            </a:endParaRPr>
           </a:p>
         </p:txBody>
       </p:sp>
@@ -14635,7 +14085,7 @@
           <p:cNvSpPr/>
           <p:nvPr>
             <p:custDataLst>
-              <p:tags r:id="rId8"/>
+              <p:tags r:id="rId7"/>
             </p:custDataLst>
           </p:nvPr>
         </p:nvSpPr>
@@ -14651,8 +14101,9 @@
         </p:spPr>
         <p:txBody>
           <a:bodyPr wrap="square" lIns="0" tIns="0" rIns="0" bIns="0" rtlCol="0" anchor="b">
-            <a:normAutofit fontScale="90000"/>
+            <a:normAutofit fontScale="97500"/>
           </a:bodyPr>
+          <a:lstStyle/>
           <a:p>
             <a:pPr>
               <a:spcBef>
@@ -14672,13 +14123,6 @@
               </a:rPr>
               <a:t>Хорошая оптимизация сервера</a:t>
             </a:r>
-            <a:endParaRPr lang="ru-RU" altLang="en-US" sz="2000" b="1" dirty="0">
-              <a:solidFill>
-                <a:schemeClr val="accent1"/>
-              </a:solidFill>
-              <a:latin typeface="+mj-lt"/>
-              <a:sym typeface="+mn-ea"/>
-            </a:endParaRPr>
           </a:p>
         </p:txBody>
       </p:sp>
@@ -14688,7 +14132,7 @@
           <p:cNvSpPr/>
           <p:nvPr>
             <p:custDataLst>
-              <p:tags r:id="rId9"/>
+              <p:tags r:id="rId8"/>
             </p:custDataLst>
           </p:nvPr>
         </p:nvSpPr>
@@ -14728,6 +14172,7 @@
           <a:bodyPr wrap="none" lIns="0" tIns="0" rIns="0" bIns="0" rtlCol="0" anchor="ctr">
             <a:noAutofit/>
           </a:bodyPr>
+          <a:lstStyle/>
           <a:p>
             <a:pPr algn="ctr">
               <a:spcBef>
@@ -14747,13 +14192,6 @@
               </a:rPr>
               <a:t>02</a:t>
             </a:r>
-            <a:endParaRPr lang="en-US" sz="2000" b="1" dirty="0">
-              <a:solidFill>
-                <a:schemeClr val="bg1"/>
-              </a:solidFill>
-              <a:latin typeface="+mn-lt"/>
-              <a:sym typeface="+mn-lt"/>
-            </a:endParaRPr>
           </a:p>
         </p:txBody>
       </p:sp>
@@ -14763,7 +14201,7 @@
           <p:cNvSpPr/>
           <p:nvPr>
             <p:custDataLst>
-              <p:tags r:id="rId10"/>
+              <p:tags r:id="rId9"/>
             </p:custDataLst>
           </p:nvPr>
         </p:nvSpPr>
@@ -14781,6 +14219,7 @@
           <a:bodyPr wrap="square" lIns="0" tIns="0" rIns="0" bIns="0" rtlCol="0" anchor="t" anchorCtr="0">
             <a:normAutofit/>
           </a:bodyPr>
+          <a:lstStyle/>
           <a:p>
             <a:pPr>
               <a:lnSpc>
@@ -14832,16 +14271,6 @@
               </a:rPr>
               <a:t>он может легко запустить сервер на нём</a:t>
             </a:r>
-            <a:endParaRPr lang="ru-RU" altLang="en-US" sz="1400" dirty="0">
-              <a:solidFill>
-                <a:schemeClr val="tx1">
-                  <a:lumMod val="85000"/>
-                  <a:lumOff val="15000"/>
-                </a:schemeClr>
-              </a:solidFill>
-              <a:latin typeface="+mn-lt"/>
-              <a:sym typeface="+mn-ea"/>
-            </a:endParaRPr>
           </a:p>
         </p:txBody>
       </p:sp>
@@ -14851,7 +14280,7 @@
           <p:cNvSpPr/>
           <p:nvPr>
             <p:custDataLst>
-              <p:tags r:id="rId11"/>
+              <p:tags r:id="rId10"/>
             </p:custDataLst>
           </p:nvPr>
         </p:nvSpPr>
@@ -14867,8 +14296,9 @@
         </p:spPr>
         <p:txBody>
           <a:bodyPr wrap="square" lIns="0" tIns="0" rIns="0" bIns="0" rtlCol="0" anchor="b">
-            <a:normAutofit fontScale="90000"/>
+            <a:normAutofit fontScale="97500"/>
           </a:bodyPr>
+          <a:lstStyle/>
           <a:p>
             <a:pPr>
               <a:spcBef>
@@ -14888,13 +14318,6 @@
               </a:rPr>
               <a:t>Отдельный модуль сервера</a:t>
             </a:r>
-            <a:endParaRPr lang="ru-RU" altLang="en-US" sz="2000" b="1" dirty="0">
-              <a:solidFill>
-                <a:schemeClr val="accent1"/>
-              </a:solidFill>
-              <a:latin typeface="+mj-lt"/>
-              <a:sym typeface="+mn-ea"/>
-            </a:endParaRPr>
           </a:p>
         </p:txBody>
       </p:sp>
@@ -14904,7 +14327,7 @@
           <p:cNvSpPr/>
           <p:nvPr>
             <p:custDataLst>
-              <p:tags r:id="rId12"/>
+              <p:tags r:id="rId11"/>
             </p:custDataLst>
           </p:nvPr>
         </p:nvSpPr>
@@ -14944,6 +14367,7 @@
           <a:bodyPr wrap="none" lIns="0" tIns="0" rIns="0" bIns="0" rtlCol="0" anchor="ctr">
             <a:noAutofit/>
           </a:bodyPr>
+          <a:lstStyle/>
           <a:p>
             <a:pPr algn="ctr">
               <a:spcBef>
@@ -14963,19 +14387,36 @@
               </a:rPr>
               <a:t>03</a:t>
             </a:r>
-            <a:endParaRPr lang="en-US" sz="2000" b="1" dirty="0">
-              <a:solidFill>
-                <a:schemeClr val="bg1"/>
-              </a:solidFill>
-              <a:latin typeface="+mn-lt"/>
-              <a:sym typeface="+mn-lt"/>
-            </a:endParaRPr>
-          </a:p>
-        </p:txBody>
-      </p:sp>
+          </a:p>
+        </p:txBody>
+      </p:sp>
+      <p:pic>
+        <p:nvPicPr>
+          <p:cNvPr id="13" name="Рисунок 12"/>
+          <p:cNvPicPr>
+            <a:picLocks noChangeAspect="1"/>
+          </p:cNvPicPr>
+          <p:nvPr/>
+        </p:nvPicPr>
+        <p:blipFill>
+          <a:blip r:embed="rId14"/>
+          <a:stretch>
+            <a:fillRect/>
+          </a:stretch>
+        </p:blipFill>
+        <p:spPr>
+          <a:xfrm>
+            <a:off x="6460809" y="2101186"/>
+            <a:ext cx="5571429" cy="3038095"/>
+          </a:xfrm>
+          <a:prstGeom prst="rect">
+            <a:avLst/>
+          </a:prstGeom>
+        </p:spPr>
+      </p:pic>
     </p:spTree>
     <p:custDataLst>
-      <p:tags r:id="rId13"/>
+      <p:tags r:id="rId1"/>
     </p:custDataLst>
   </p:cSld>
   <p:clrMapOvr>
@@ -15010,7 +14451,7 @@
           <p:nvPr>
             <p:ph type="body" idx="3"/>
             <p:custDataLst>
-              <p:tags r:id="rId1"/>
+              <p:tags r:id="rId2"/>
             </p:custDataLst>
           </p:nvPr>
         </p:nvSpPr>
@@ -15022,7 +14463,7 @@
         </p:spPr>
         <p:txBody>
           <a:bodyPr>
-            <a:normAutofit lnSpcReduction="20000"/>
+            <a:normAutofit fontScale="92500"/>
           </a:bodyPr>
           <a:lstStyle/>
           <a:p>
@@ -15030,7 +14471,6 @@
               <a:rPr lang="ru-RU"/>
               <a:t>Зайцев Кирилл</a:t>
             </a:r>
-            <a:endParaRPr lang="ru-RU"/>
           </a:p>
         </p:txBody>
       </p:sp>
@@ -15043,7 +14483,7 @@
           <p:nvPr>
             <p:ph type="body" idx="2"/>
             <p:custDataLst>
-              <p:tags r:id="rId2"/>
+              <p:tags r:id="rId3"/>
             </p:custDataLst>
           </p:nvPr>
         </p:nvSpPr>
@@ -15065,7 +14505,6 @@
               <a:rPr lang="ru-RU" altLang="en-US"/>
               <a:t>песочница</a:t>
             </a:r>
-            <a:endParaRPr lang="ru-RU" altLang="en-US"/>
           </a:p>
         </p:txBody>
       </p:sp>
@@ -15078,7 +14517,7 @@
           <p:nvPr>
             <p:ph type="title" idx="1"/>
             <p:custDataLst>
-              <p:tags r:id="rId3"/>
+              <p:tags r:id="rId4"/>
             </p:custDataLst>
           </p:nvPr>
         </p:nvSpPr>
@@ -15096,7 +14535,6 @@
               <a:rPr lang="en-US" dirty="0"/>
               <a:t>CUBE</a:t>
             </a:r>
-            <a:endParaRPr lang="en-US" dirty="0"/>
           </a:p>
         </p:txBody>
       </p:sp>
@@ -15120,6 +14558,7 @@
           <a:bodyPr wrap="square" rtlCol="0">
             <a:spAutoFit/>
           </a:bodyPr>
+          <a:lstStyle/>
           <a:p>
             <a:endParaRPr lang="ru-RU" altLang="en-US"/>
           </a:p>
@@ -15127,7 +14566,7 @@
       </p:sp>
     </p:spTree>
     <p:custDataLst>
-      <p:tags r:id="rId4"/>
+      <p:tags r:id="rId1"/>
     </p:custDataLst>
   </p:cSld>
   <p:clrMapOvr>
@@ -15137,7 +14576,186 @@
 </file>
 
 <file path=ppt/tags/tag1.xml><?xml version="1.0" encoding="utf-8"?>
-<p:tagLst xmlns:p="http://schemas.openxmlformats.org/presentationml/2006/main">
+<p:tagLst xmlns:a="http://schemas.openxmlformats.org/drawingml/2006/main" xmlns:r="http://schemas.openxmlformats.org/officeDocument/2006/relationships" xmlns:p="http://schemas.openxmlformats.org/presentationml/2006/main">
+  <p:tag name="KSO_WM_PRESENTATION_SOURCE" val="WPPAIGeneratePPT"/>
+</p:tagLst>
+</file>
+
+<file path=ppt/tags/tag10.xml><?xml version="1.0" encoding="utf-8"?>
+<p:tagLst xmlns:a="http://schemas.openxmlformats.org/drawingml/2006/main" xmlns:r="http://schemas.openxmlformats.org/officeDocument/2006/relationships" xmlns:p="http://schemas.openxmlformats.org/presentationml/2006/main">
+  <p:tag name="KSO_WM_TEMPLATE_THUMBS_INDEX" val="1、9"/>
+  <p:tag name="KSO_WM_SPECIAL_SOURCE" val="bdnull"/>
+  <p:tag name="KSO_WM_TEMPLATE_SUBCATEGORY" val="29"/>
+  <p:tag name="KSO_WM_TEMPLATE_MASTER_TYPE" val="0"/>
+  <p:tag name="KSO_WM_TEMPLATE_COLOR_TYPE" val="0"/>
+  <p:tag name="KSO_WM_TAG_VERSION" val="3.0"/>
+  <p:tag name="KSO_WM_BEAUTIFY_FLAG" val="#wm#"/>
+  <p:tag name="KSO_WM_TEMPLATE_CATEGORY" val="custom"/>
+  <p:tag name="KSO_WM_TEMPLATE_INDEX" val="20233430"/>
+</p:tagLst>
+</file>
+
+<file path=ppt/tags/tag100.xml><?xml version="1.0" encoding="utf-8"?>
+<p:tagLst xmlns:a="http://schemas.openxmlformats.org/drawingml/2006/main" xmlns:r="http://schemas.openxmlformats.org/officeDocument/2006/relationships" xmlns:p="http://schemas.openxmlformats.org/presentationml/2006/main">
+  <p:tag name="KSO_WM_UNIT_HIGHLIGHT" val="0"/>
+  <p:tag name="KSO_WM_UNIT_COMPATIBLE" val="0"/>
+  <p:tag name="KSO_WM_UNIT_DIAGRAM_ISNUMVISUAL" val="0"/>
+  <p:tag name="KSO_WM_UNIT_DIAGRAM_ISREFERUNIT" val="0"/>
+  <p:tag name="KSO_WM_UNIT_CONTENT_GROUP_TYPE" val="contentchip"/>
+  <p:tag name="KSO_WM_UNIT_TYPE" val="i"/>
+  <p:tag name="KSO_WM_UNIT_INDEX" val="3"/>
+  <p:tag name="KSO_WM_UNIT_ID" val="_11*i*3"/>
+  <p:tag name="KSO_WM_UNIT_LAYERLEVEL" val="1"/>
+  <p:tag name="KSO_WM_TAG_VERSION" val="3.0"/>
+  <p:tag name="KSO_WM_BEAUTIFY_FLAG" val="#wm#"/>
+</p:tagLst>
+</file>
+
+<file path=ppt/tags/tag101.xml><?xml version="1.0" encoding="utf-8"?>
+<p:tagLst xmlns:a="http://schemas.openxmlformats.org/drawingml/2006/main" xmlns:r="http://schemas.openxmlformats.org/officeDocument/2006/relationships" xmlns:p="http://schemas.openxmlformats.org/presentationml/2006/main">
+  <p:tag name="KSO_WM_UNIT_HIGHLIGHT" val="0"/>
+  <p:tag name="KSO_WM_UNIT_COMPATIBLE" val="0"/>
+  <p:tag name="KSO_WM_UNIT_DIAGRAM_ISNUMVISUAL" val="0"/>
+  <p:tag name="KSO_WM_UNIT_DIAGRAM_ISREFERUNIT" val="0"/>
+  <p:tag name="KSO_WM_UNIT_CONTENT_GROUP_TYPE" val="contentchip"/>
+  <p:tag name="KSO_WM_UNIT_TYPE" val="i"/>
+  <p:tag name="KSO_WM_UNIT_INDEX" val="4"/>
+  <p:tag name="KSO_WM_UNIT_ID" val="_11*i*4"/>
+  <p:tag name="KSO_WM_UNIT_LAYERLEVEL" val="1"/>
+  <p:tag name="KSO_WM_TAG_VERSION" val="3.0"/>
+  <p:tag name="KSO_WM_BEAUTIFY_FLAG" val="#wm#"/>
+</p:tagLst>
+</file>
+
+<file path=ppt/tags/tag102.xml><?xml version="1.0" encoding="utf-8"?>
+<p:tagLst xmlns:a="http://schemas.openxmlformats.org/drawingml/2006/main" xmlns:r="http://schemas.openxmlformats.org/officeDocument/2006/relationships" xmlns:p="http://schemas.openxmlformats.org/presentationml/2006/main">
+  <p:tag name="KSO_WM_UNIT_HIGHLIGHT" val="0"/>
+  <p:tag name="KSO_WM_UNIT_COMPATIBLE" val="0"/>
+  <p:tag name="KSO_WM_UNIT_DIAGRAM_ISNUMVISUAL" val="0"/>
+  <p:tag name="KSO_WM_UNIT_DIAGRAM_ISREFERUNIT" val="0"/>
+  <p:tag name="KSO_WM_UNIT_TYPE" val="i"/>
+  <p:tag name="KSO_WM_UNIT_INDEX" val="5"/>
+  <p:tag name="KSO_WM_UNIT_ID" val="_11*i*5"/>
+  <p:tag name="KSO_WM_UNIT_LAYERLEVEL" val="1"/>
+  <p:tag name="KSO_WM_TAG_VERSION" val="3.0"/>
+  <p:tag name="KSO_WM_BEAUTIFY_FLAG" val="#wm#"/>
+</p:tagLst>
+</file>
+
+<file path=ppt/tags/tag103.xml><?xml version="1.0" encoding="utf-8"?>
+<p:tagLst xmlns:a="http://schemas.openxmlformats.org/drawingml/2006/main" xmlns:r="http://schemas.openxmlformats.org/officeDocument/2006/relationships" xmlns:p="http://schemas.openxmlformats.org/presentationml/2006/main">
+  <p:tag name="KSO_WM_UNIT_HIGHLIGHT" val="0"/>
+  <p:tag name="KSO_WM_UNIT_COMPATIBLE" val="0"/>
+  <p:tag name="KSO_WM_UNIT_DIAGRAM_ISNUMVISUAL" val="0"/>
+  <p:tag name="KSO_WM_UNIT_DIAGRAM_ISREFERUNIT" val="0"/>
+  <p:tag name="KSO_WM_UNIT_TYPE" val="i"/>
+  <p:tag name="KSO_WM_UNIT_INDEX" val="6"/>
+  <p:tag name="KSO_WM_UNIT_ID" val="_11*i*6"/>
+  <p:tag name="KSO_WM_UNIT_LAYERLEVEL" val="1"/>
+  <p:tag name="KSO_WM_TAG_VERSION" val="3.0"/>
+  <p:tag name="KSO_WM_BEAUTIFY_FLAG" val="#wm#"/>
+</p:tagLst>
+</file>
+
+<file path=ppt/tags/tag104.xml><?xml version="1.0" encoding="utf-8"?>
+<p:tagLst xmlns:a="http://schemas.openxmlformats.org/drawingml/2006/main" xmlns:r="http://schemas.openxmlformats.org/officeDocument/2006/relationships" xmlns:p="http://schemas.openxmlformats.org/presentationml/2006/main">
+  <p:tag name="KSO_WM_UNIT_HIGHLIGHT" val="0"/>
+  <p:tag name="KSO_WM_UNIT_COMPATIBLE" val="0"/>
+  <p:tag name="KSO_WM_UNIT_DIAGRAM_ISNUMVISUAL" val="0"/>
+  <p:tag name="KSO_WM_UNIT_DIAGRAM_ISREFERUNIT" val="0"/>
+  <p:tag name="KSO_WM_UNIT_TYPE" val="i"/>
+  <p:tag name="KSO_WM_UNIT_INDEX" val="7"/>
+  <p:tag name="KSO_WM_UNIT_ID" val="_11*i*7"/>
+  <p:tag name="KSO_WM_UNIT_LAYERLEVEL" val="1"/>
+  <p:tag name="KSO_WM_TAG_VERSION" val="3.0"/>
+  <p:tag name="KSO_WM_BEAUTIFY_FLAG" val="#wm#"/>
+</p:tagLst>
+</file>
+
+<file path=ppt/tags/tag105.xml><?xml version="1.0" encoding="utf-8"?>
+<p:tagLst xmlns:a="http://schemas.openxmlformats.org/drawingml/2006/main" xmlns:r="http://schemas.openxmlformats.org/officeDocument/2006/relationships" xmlns:p="http://schemas.openxmlformats.org/presentationml/2006/main">
+  <p:tag name="KSO_WM_UNIT_HIGHLIGHT" val="0"/>
+  <p:tag name="KSO_WM_UNIT_COMPATIBLE" val="0"/>
+  <p:tag name="KSO_WM_UNIT_DIAGRAM_ISNUMVISUAL" val="0"/>
+  <p:tag name="KSO_WM_UNIT_DIAGRAM_ISREFERUNIT" val="0"/>
+  <p:tag name="KSO_WM_UNIT_TYPE" val="i"/>
+  <p:tag name="KSO_WM_UNIT_INDEX" val="8"/>
+  <p:tag name="KSO_WM_UNIT_ID" val="_11*i*8"/>
+  <p:tag name="KSO_WM_UNIT_LAYERLEVEL" val="1"/>
+  <p:tag name="KSO_WM_TAG_VERSION" val="3.0"/>
+  <p:tag name="KSO_WM_BEAUTIFY_FLAG" val="#wm#"/>
+</p:tagLst>
+</file>
+
+<file path=ppt/tags/tag106.xml><?xml version="1.0" encoding="utf-8"?>
+<p:tagLst xmlns:a="http://schemas.openxmlformats.org/drawingml/2006/main" xmlns:r="http://schemas.openxmlformats.org/officeDocument/2006/relationships" xmlns:p="http://schemas.openxmlformats.org/presentationml/2006/main">
+  <p:tag name="KSO_WM_UNIT_SUBTYPE" val="b"/>
+  <p:tag name="KSO_WM_UNIT_PRESET_TEXT" val="汇报人：稻小壳"/>
+  <p:tag name="KSO_WM_UNIT_NOCLEAR" val="0"/>
+  <p:tag name="KSO_WM_UNIT_VALUE" val="60"/>
+  <p:tag name="KSO_WM_UNIT_HIGHLIGHT" val="0"/>
+  <p:tag name="KSO_WM_UNIT_COMPATIBLE" val="0"/>
+  <p:tag name="KSO_WM_UNIT_DIAGRAM_ISNUMVISUAL" val="0"/>
+  <p:tag name="KSO_WM_UNIT_DIAGRAM_ISREFERUNIT" val="0"/>
+  <p:tag name="KSO_WM_UNIT_CONTENT_GROUP_TYPE" val="contentchip"/>
+  <p:tag name="KSO_WM_UNIT_TYPE" val="f"/>
+  <p:tag name="KSO_WM_UNIT_INDEX" val="1"/>
+  <p:tag name="KSO_WM_UNIT_ID" val="_11*f*1"/>
+  <p:tag name="KSO_WM_UNIT_LAYERLEVEL" val="1"/>
+  <p:tag name="KSO_WM_TAG_VERSION" val="3.0"/>
+  <p:tag name="KSO_WM_BEAUTIFY_FLAG" val="#wm#"/>
+</p:tagLst>
+</file>
+
+<file path=ppt/tags/tag107.xml><?xml version="1.0" encoding="utf-8"?>
+<p:tagLst xmlns:a="http://schemas.openxmlformats.org/drawingml/2006/main" xmlns:r="http://schemas.openxmlformats.org/officeDocument/2006/relationships" xmlns:p="http://schemas.openxmlformats.org/presentationml/2006/main">
+  <p:tag name="KSO_WM_UNIT_ISCONTENTSTITLE" val="0"/>
+  <p:tag name="KSO_WM_UNIT_ISNUMDGMTITLE" val="0"/>
+  <p:tag name="KSO_WM_UNIT_PRESET_TEXT" val="THANKS"/>
+  <p:tag name="KSO_WM_UNIT_NOCLEAR" val="0"/>
+  <p:tag name="KSO_WM_UNIT_VALUE" val="10"/>
+  <p:tag name="KSO_WM_UNIT_HIGHLIGHT" val="0"/>
+  <p:tag name="KSO_WM_UNIT_COMPATIBLE" val="0"/>
+  <p:tag name="KSO_WM_UNIT_DIAGRAM_ISNUMVISUAL" val="0"/>
+  <p:tag name="KSO_WM_UNIT_DIAGRAM_ISREFERUNIT" val="0"/>
+  <p:tag name="KSO_WM_UNIT_CONTENT_GROUP_TYPE" val="contentchip"/>
+  <p:tag name="KSO_WM_UNIT_TYPE" val="a"/>
+  <p:tag name="KSO_WM_UNIT_INDEX" val="1"/>
+  <p:tag name="KSO_WM_UNIT_ID" val="_11*a*1"/>
+  <p:tag name="KSO_WM_UNIT_LAYERLEVEL" val="1"/>
+  <p:tag name="KSO_WM_TAG_VERSION" val="3.0"/>
+  <p:tag name="KSO_WM_BEAUTIFY_FLAG" val="#wm#"/>
+</p:tagLst>
+</file>
+
+<file path=ppt/tags/tag108.xml><?xml version="1.0" encoding="utf-8"?>
+<p:tagLst xmlns:a="http://schemas.openxmlformats.org/drawingml/2006/main" xmlns:r="http://schemas.openxmlformats.org/officeDocument/2006/relationships" xmlns:p="http://schemas.openxmlformats.org/presentationml/2006/main">
+  <p:tag name="KSO_WM_UNIT_HIGHLIGHT" val="0"/>
+  <p:tag name="KSO_WM_UNIT_COMPATIBLE" val="0"/>
+  <p:tag name="KSO_WM_UNIT_DIAGRAM_ISNUMVISUAL" val="0"/>
+  <p:tag name="KSO_WM_UNIT_DIAGRAM_ISREFERUNIT" val="0"/>
+  <p:tag name="KSO_WM_UNIT_ID" val="_11**"/>
+  <p:tag name="KSO_WM_UNIT_LAYERLEVEL" val="1"/>
+  <p:tag name="KSO_WM_TAG_VERSION" val="3.0"/>
+  <p:tag name="KSO_WM_BEAUTIFY_FLAG" val="#wm#"/>
+</p:tagLst>
+</file>
+
+<file path=ppt/tags/tag109.xml><?xml version="1.0" encoding="utf-8"?>
+<p:tagLst xmlns:a="http://schemas.openxmlformats.org/drawingml/2006/main" xmlns:r="http://schemas.openxmlformats.org/officeDocument/2006/relationships" xmlns:p="http://schemas.openxmlformats.org/presentationml/2006/main">
+  <p:tag name="KSO_WM_UNIT_HIGHLIGHT" val="0"/>
+  <p:tag name="KSO_WM_UNIT_COMPATIBLE" val="0"/>
+  <p:tag name="KSO_WM_UNIT_DIAGRAM_ISNUMVISUAL" val="0"/>
+  <p:tag name="KSO_WM_UNIT_DIAGRAM_ISREFERUNIT" val="0"/>
+  <p:tag name="KSO_WM_UNIT_ID" val="_11**"/>
+  <p:tag name="KSO_WM_UNIT_LAYERLEVEL" val="1"/>
+  <p:tag name="KSO_WM_TAG_VERSION" val="3.0"/>
+  <p:tag name="KSO_WM_BEAUTIFY_FLAG" val="#wm#"/>
+</p:tagLst>
+</file>
+
+<file path=ppt/tags/tag11.xml><?xml version="1.0" encoding="utf-8"?>
+<p:tagLst xmlns:a="http://schemas.openxmlformats.org/drawingml/2006/main" xmlns:r="http://schemas.openxmlformats.org/officeDocument/2006/relationships" xmlns:p="http://schemas.openxmlformats.org/presentationml/2006/main">
   <p:tag name="KSO_WM_UNIT_HIGHLIGHT" val="0"/>
   <p:tag name="KSO_WM_UNIT_COMPATIBLE" val="0"/>
   <p:tag name="KSO_WM_UNIT_DIAGRAM_ISNUMVISUAL" val="0"/>
@@ -15152,29 +14770,8 @@
 </p:tagLst>
 </file>
 
-<file path=ppt/tags/tag10.xml><?xml version="1.0" encoding="utf-8"?>
-<p:tagLst xmlns:p="http://schemas.openxmlformats.org/presentationml/2006/main">
-  <p:tag name="KSO_WM_UNIT_ISCONTENTSTITLE" val="0"/>
-  <p:tag name="KSO_WM_UNIT_ISNUMDGMTITLE" val="0"/>
-  <p:tag name="KSO_WM_UNIT_PRESET_TEXT" val="Click to add subtitle"/>
-  <p:tag name="KSO_WM_UNIT_NOCLEAR" val="0"/>
-  <p:tag name="KSO_WM_UNIT_VALUE" val="17"/>
-  <p:tag name="KSO_WM_UNIT_HIGHLIGHT" val="0"/>
-  <p:tag name="KSO_WM_UNIT_COMPATIBLE" val="0"/>
-  <p:tag name="KSO_WM_UNIT_DIAGRAM_ISNUMVISUAL" val="0"/>
-  <p:tag name="KSO_WM_UNIT_DIAGRAM_ISREFERUNIT" val="0"/>
-  <p:tag name="KSO_WM_UNIT_CONTENT_GROUP_TYPE" val="contentchip"/>
-  <p:tag name="KSO_WM_UNIT_TYPE" val="b"/>
-  <p:tag name="KSO_WM_UNIT_INDEX" val="1"/>
-  <p:tag name="KSO_WM_UNIT_ID" val="_1*b*1"/>
-  <p:tag name="KSO_WM_UNIT_LAYERLEVEL" val="1"/>
-  <p:tag name="KSO_WM_TAG_VERSION" val="3.0"/>
-  <p:tag name="KSO_WM_BEAUTIFY_FLAG" val="#wm#"/>
-</p:tagLst>
-</file>
-
-<file path=ppt/tags/tag100.xml><?xml version="1.0" encoding="utf-8"?>
-<p:tagLst xmlns:p="http://schemas.openxmlformats.org/presentationml/2006/main">
+<file path=ppt/tags/tag110.xml><?xml version="1.0" encoding="utf-8"?>
+<p:tagLst xmlns:a="http://schemas.openxmlformats.org/drawingml/2006/main" xmlns:r="http://schemas.openxmlformats.org/officeDocument/2006/relationships" xmlns:p="http://schemas.openxmlformats.org/presentationml/2006/main">
   <p:tag name="KSO_WM_UNIT_HIGHLIGHT" val="0"/>
   <p:tag name="KSO_WM_UNIT_COMPATIBLE" val="0"/>
   <p:tag name="KSO_WM_UNIT_DIAGRAM_ISNUMVISUAL" val="0"/>
@@ -15186,8 +14783,8 @@
 </p:tagLst>
 </file>
 
-<file path=ppt/tags/tag101.xml><?xml version="1.0" encoding="utf-8"?>
-<p:tagLst xmlns:p="http://schemas.openxmlformats.org/presentationml/2006/main">
+<file path=ppt/tags/tag111.xml><?xml version="1.0" encoding="utf-8"?>
+<p:tagLst xmlns:a="http://schemas.openxmlformats.org/drawingml/2006/main" xmlns:r="http://schemas.openxmlformats.org/officeDocument/2006/relationships" xmlns:p="http://schemas.openxmlformats.org/presentationml/2006/main">
   <p:tag name="KSO_WM_UNIT_HIGHLIGHT" val="0"/>
   <p:tag name="KSO_WM_UNIT_COMPATIBLE" val="0"/>
   <p:tag name="KSO_WM_UNIT_DIAGRAM_ISNUMVISUAL" val="0"/>
@@ -15199,8 +14796,8 @@
 </p:tagLst>
 </file>
 
-<file path=ppt/tags/tag102.xml><?xml version="1.0" encoding="utf-8"?>
-<p:tagLst xmlns:p="http://schemas.openxmlformats.org/presentationml/2006/main">
+<file path=ppt/tags/tag112.xml><?xml version="1.0" encoding="utf-8"?>
+<p:tagLst xmlns:a="http://schemas.openxmlformats.org/drawingml/2006/main" xmlns:r="http://schemas.openxmlformats.org/officeDocument/2006/relationships" xmlns:p="http://schemas.openxmlformats.org/presentationml/2006/main">
   <p:tag name="KSO_WM_UNIT_HIGHLIGHT" val="0"/>
   <p:tag name="KSO_WM_UNIT_COMPATIBLE" val="0"/>
   <p:tag name="KSO_WM_UNIT_DIAGRAM_ISNUMVISUAL" val="0"/>
@@ -15212,8 +14809,8 @@
 </p:tagLst>
 </file>
 
-<file path=ppt/tags/tag103.xml><?xml version="1.0" encoding="utf-8"?>
-<p:tagLst xmlns:p="http://schemas.openxmlformats.org/presentationml/2006/main">
+<file path=ppt/tags/tag113.xml><?xml version="1.0" encoding="utf-8"?>
+<p:tagLst xmlns:a="http://schemas.openxmlformats.org/drawingml/2006/main" xmlns:r="http://schemas.openxmlformats.org/officeDocument/2006/relationships" xmlns:p="http://schemas.openxmlformats.org/presentationml/2006/main">
   <p:tag name="KSO_WM_UNIT_HIGHLIGHT" val="0"/>
   <p:tag name="KSO_WM_UNIT_COMPATIBLE" val="0"/>
   <p:tag name="KSO_WM_UNIT_DIAGRAM_ISNUMVISUAL" val="0"/>
@@ -15225,8 +14822,8 @@
 </p:tagLst>
 </file>
 
-<file path=ppt/tags/tag104.xml><?xml version="1.0" encoding="utf-8"?>
-<p:tagLst xmlns:p="http://schemas.openxmlformats.org/presentationml/2006/main">
+<file path=ppt/tags/tag114.xml><?xml version="1.0" encoding="utf-8"?>
+<p:tagLst xmlns:a="http://schemas.openxmlformats.org/drawingml/2006/main" xmlns:r="http://schemas.openxmlformats.org/officeDocument/2006/relationships" xmlns:p="http://schemas.openxmlformats.org/presentationml/2006/main">
   <p:tag name="KSO_WM_UNIT_HIGHLIGHT" val="0"/>
   <p:tag name="KSO_WM_UNIT_COMPATIBLE" val="0"/>
   <p:tag name="KSO_WM_UNIT_DIAGRAM_ISNUMVISUAL" val="0"/>
@@ -15238,171 +14835,30 @@
 </p:tagLst>
 </file>
 
-<file path=ppt/tags/tag105.xml><?xml version="1.0" encoding="utf-8"?>
-<p:tagLst xmlns:p="http://schemas.openxmlformats.org/presentationml/2006/main">
-  <p:tag name="KSO_WM_UNIT_HIGHLIGHT" val="0"/>
-  <p:tag name="KSO_WM_UNIT_COMPATIBLE" val="0"/>
-  <p:tag name="KSO_WM_UNIT_DIAGRAM_ISNUMVISUAL" val="0"/>
-  <p:tag name="KSO_WM_UNIT_DIAGRAM_ISREFERUNIT" val="0"/>
-  <p:tag name="KSO_WM_UNIT_CONTENT_GROUP_TYPE" val="titlestyle"/>
-  <p:tag name="KSO_WM_UNIT_TYPE" val="i"/>
-  <p:tag name="KSO_WM_UNIT_INDEX" val="1"/>
-  <p:tag name="KSO_WM_UNIT_ID" val="_0*i*1"/>
-  <p:tag name="KSO_WM_UNIT_LAYERLEVEL" val="1"/>
-  <p:tag name="KSO_WM_TAG_VERSION" val="3.0"/>
-  <p:tag name="KSO_WM_BEAUTIFY_FLAG" val="#wm#"/>
-</p:tagLst>
-</file>
-
-<file path=ppt/tags/tag106.xml><?xml version="1.0" encoding="utf-8"?>
-<p:tagLst xmlns:p="http://schemas.openxmlformats.org/presentationml/2006/main">
-  <p:tag name="KSO_WM_UNIT_HIGHLIGHT" val="0"/>
-  <p:tag name="KSO_WM_UNIT_COMPATIBLE" val="0"/>
-  <p:tag name="KSO_WM_UNIT_DIAGRAM_ISNUMVISUAL" val="0"/>
-  <p:tag name="KSO_WM_UNIT_DIAGRAM_ISREFERUNIT" val="0"/>
-  <p:tag name="KSO_WM_UNIT_CONTENT_GROUP_TYPE" val="titlestyle"/>
-  <p:tag name="KSO_WM_UNIT_TYPE" val="i"/>
-  <p:tag name="KSO_WM_UNIT_INDEX" val="2"/>
-  <p:tag name="KSO_WM_UNIT_ID" val="_0*i*2"/>
-  <p:tag name="KSO_WM_UNIT_LAYERLEVEL" val="1"/>
-  <p:tag name="KSO_WM_TAG_VERSION" val="3.0"/>
-  <p:tag name="KSO_WM_BEAUTIFY_FLAG" val="#wm#"/>
-</p:tagLst>
-</file>
-
-<file path=ppt/tags/tag107.xml><?xml version="1.0" encoding="utf-8"?>
-<p:tagLst xmlns:p="http://schemas.openxmlformats.org/presentationml/2006/main">
-  <p:tag name="KSO_WM_UNIT_HIGHLIGHT" val="0"/>
-  <p:tag name="KSO_WM_UNIT_COMPATIBLE" val="0"/>
-  <p:tag name="KSO_WM_UNIT_DIAGRAM_ISNUMVISUAL" val="0"/>
-  <p:tag name="KSO_WM_UNIT_DIAGRAM_ISREFERUNIT" val="0"/>
-  <p:tag name="KSO_WM_UNIT_CONTENT_GROUP_TYPE" val="titlestyle"/>
-  <p:tag name="KSO_WM_UNIT_TYPE" val="i"/>
-  <p:tag name="KSO_WM_UNIT_INDEX" val="3"/>
-  <p:tag name="KSO_WM_UNIT_ID" val="_0*i*3"/>
-  <p:tag name="KSO_WM_UNIT_LAYERLEVEL" val="1"/>
-  <p:tag name="KSO_WM_TAG_VERSION" val="3.0"/>
-  <p:tag name="KSO_WM_BEAUTIFY_FLAG" val="#wm#"/>
-</p:tagLst>
-</file>
-
-<file path=ppt/tags/tag108.xml><?xml version="1.0" encoding="utf-8"?>
-<p:tagLst xmlns:p="http://schemas.openxmlformats.org/presentationml/2006/main">
-  <p:tag name="KSO_WM_UNIT_HIGHLIGHT" val="0"/>
-  <p:tag name="KSO_WM_UNIT_COMPATIBLE" val="0"/>
-  <p:tag name="KSO_WM_UNIT_DIAGRAM_ISNUMVISUAL" val="0"/>
-  <p:tag name="KSO_WM_UNIT_DIAGRAM_ISREFERUNIT" val="0"/>
-  <p:tag name="KSO_WM_UNIT_ID" val="_0**"/>
-  <p:tag name="KSO_WM_UNIT_LAYERLEVEL" val="1"/>
-  <p:tag name="KSO_WM_TAG_VERSION" val="3.0"/>
-  <p:tag name="KSO_WM_BEAUTIFY_FLAG" val="#wm#"/>
-</p:tagLst>
-</file>
-
-<file path=ppt/tags/tag109.xml><?xml version="1.0" encoding="utf-8"?>
-<p:tagLst xmlns:p="http://schemas.openxmlformats.org/presentationml/2006/main">
-  <p:tag name="KSO_WM_UNIT_HIGHLIGHT" val="0"/>
-  <p:tag name="KSO_WM_UNIT_COMPATIBLE" val="0"/>
-  <p:tag name="KSO_WM_UNIT_DIAGRAM_ISNUMVISUAL" val="0"/>
-  <p:tag name="KSO_WM_UNIT_DIAGRAM_ISREFERUNIT" val="0"/>
-  <p:tag name="KSO_WM_UNIT_ID" val="_0**"/>
-  <p:tag name="KSO_WM_UNIT_LAYERLEVEL" val="1"/>
-  <p:tag name="KSO_WM_TAG_VERSION" val="3.0"/>
-  <p:tag name="KSO_WM_BEAUTIFY_FLAG" val="#wm#"/>
-</p:tagLst>
-</file>
-
-<file path=ppt/tags/tag11.xml><?xml version="1.0" encoding="utf-8"?>
-<p:tagLst xmlns:p="http://schemas.openxmlformats.org/presentationml/2006/main">
-  <p:tag name="KSO_WM_UNIT_ISCONTENTSTITLE" val="0"/>
-  <p:tag name="KSO_WM_UNIT_ISNUMDGMTITLE" val="0"/>
-  <p:tag name="KSO_WM_UNIT_PRESET_TEXT" val="单击添加文档标题"/>
-  <p:tag name="KSO_WM_UNIT_NOCLEAR" val="0"/>
-  <p:tag name="KSO_WM_UNIT_VALUE" val="10"/>
-  <p:tag name="KSO_WM_UNIT_HIGHLIGHT" val="0"/>
-  <p:tag name="KSO_WM_UNIT_COMPATIBLE" val="0"/>
-  <p:tag name="KSO_WM_UNIT_DIAGRAM_ISNUMVISUAL" val="0"/>
-  <p:tag name="KSO_WM_UNIT_DIAGRAM_ISREFERUNIT" val="0"/>
-  <p:tag name="KSO_WM_UNIT_CONTENT_GROUP_TYPE" val="contentchip"/>
-  <p:tag name="KSO_WM_UNIT_TYPE" val="a"/>
-  <p:tag name="KSO_WM_UNIT_INDEX" val="1"/>
-  <p:tag name="KSO_WM_UNIT_ID" val="_1*a*1"/>
-  <p:tag name="KSO_WM_UNIT_LAYERLEVEL" val="1"/>
-  <p:tag name="KSO_WM_TAG_VERSION" val="3.0"/>
-  <p:tag name="KSO_WM_BEAUTIFY_FLAG" val="#wm#"/>
-</p:tagLst>
-</file>
-
-<file path=ppt/tags/tag110.xml><?xml version="1.0" encoding="utf-8"?>
-<p:tagLst xmlns:p="http://schemas.openxmlformats.org/presentationml/2006/main">
-  <p:tag name="KSO_WM_UNIT_HIGHLIGHT" val="0"/>
-  <p:tag name="KSO_WM_UNIT_COMPATIBLE" val="0"/>
-  <p:tag name="KSO_WM_UNIT_DIAGRAM_ISNUMVISUAL" val="0"/>
-  <p:tag name="KSO_WM_UNIT_DIAGRAM_ISREFERUNIT" val="0"/>
-  <p:tag name="KSO_WM_UNIT_ID" val="_0**"/>
-  <p:tag name="KSO_WM_UNIT_LAYERLEVEL" val="1"/>
-  <p:tag name="KSO_WM_TAG_VERSION" val="3.0"/>
-  <p:tag name="KSO_WM_BEAUTIFY_FLAG" val="#wm#"/>
-</p:tagLst>
-</file>
-
-<file path=ppt/tags/tag111.xml><?xml version="1.0" encoding="utf-8"?>
-<p:tagLst xmlns:p="http://schemas.openxmlformats.org/presentationml/2006/main">
-  <p:tag name="KSO_WM_UNIT_ISCONTENTSTITLE" val="0"/>
-  <p:tag name="KSO_WM_UNIT_ISNUMDGMTITLE" val="0"/>
-  <p:tag name="KSO_WM_UNIT_PRESET_TEXT" val="单击此处编辑母版标题样式"/>
-  <p:tag name="KSO_WM_UNIT_NOCLEAR" val="0"/>
-  <p:tag name="KSO_WM_UNIT_HIGHLIGHT" val="0"/>
-  <p:tag name="KSO_WM_UNIT_COMPATIBLE" val="0"/>
-  <p:tag name="KSO_WM_UNIT_DIAGRAM_ISNUMVISUAL" val="0"/>
-  <p:tag name="KSO_WM_UNIT_DIAGRAM_ISREFERUNIT" val="0"/>
-  <p:tag name="KSO_WM_UNIT_TYPE" val="a"/>
-  <p:tag name="KSO_WM_UNIT_INDEX" val="1"/>
-  <p:tag name="KSO_WM_UNIT_ID" val="_0*a*1"/>
-  <p:tag name="KSO_WM_UNIT_LAYERLEVEL" val="1"/>
-  <p:tag name="KSO_WM_TAG_VERSION" val="1.0"/>
-  <p:tag name="KSO_WM_BEAUTIFY_FLAG" val="#wm#"/>
-  <p:tag name="KSO_WM_TEMPLATE_CATEGORY" val="custom"/>
-  <p:tag name="KSO_WM_TEMPLATE_INDEX" val="20233430"/>
-</p:tagLst>
-</file>
-
-<file path=ppt/tags/tag112.xml><?xml version="1.0" encoding="utf-8"?>
-<p:tagLst xmlns:p="http://schemas.openxmlformats.org/presentationml/2006/main">
-  <p:tag name="KSO_WM_UNIT_SUBTYPE" val="a"/>
-  <p:tag name="KSO_WM_UNIT_PRESET_TEXT" val="单击此处编辑母版文本样式&#10;二级&#10;三级&#10;四级&#10;五级"/>
-  <p:tag name="KSO_WM_UNIT_NOCLEAR" val="0"/>
-  <p:tag name="KSO_WM_UNIT_HIGHLIGHT" val="0"/>
-  <p:tag name="KSO_WM_UNIT_COMPATIBLE" val="0"/>
-  <p:tag name="KSO_WM_UNIT_DIAGRAM_ISNUMVISUAL" val="0"/>
-  <p:tag name="KSO_WM_UNIT_DIAGRAM_ISREFERUNIT" val="0"/>
-  <p:tag name="KSO_WM_UNIT_TYPE" val="f"/>
-  <p:tag name="KSO_WM_UNIT_INDEX" val="1"/>
-  <p:tag name="KSO_WM_UNIT_ID" val="_0*f*1"/>
-  <p:tag name="KSO_WM_UNIT_LAYERLEVEL" val="1"/>
-  <p:tag name="KSO_WM_TAG_VERSION" val="1.0"/>
-  <p:tag name="KSO_WM_BEAUTIFY_FLAG" val="#wm#"/>
-  <p:tag name="KSO_WM_TEMPLATE_CATEGORY" val="custom"/>
-  <p:tag name="KSO_WM_TEMPLATE_INDEX" val="20233430"/>
-</p:tagLst>
-</file>
-
-<file path=ppt/tags/tag113.xml><?xml version="1.0" encoding="utf-8"?>
-<p:tagLst xmlns:p="http://schemas.openxmlformats.org/presentationml/2006/main">
+<file path=ppt/tags/tag115.xml><?xml version="1.0" encoding="utf-8"?>
+<p:tagLst xmlns:a="http://schemas.openxmlformats.org/drawingml/2006/main" xmlns:r="http://schemas.openxmlformats.org/officeDocument/2006/relationships" xmlns:p="http://schemas.openxmlformats.org/presentationml/2006/main">
   <p:tag name="KSO_WM_TEMPLATE_THUMBS_INDEX" val="1、9"/>
+  <p:tag name="KSO_WM_SLIDE_CONTENT_AREA" val="{&quot;left&quot;:&quot;81.45&quot;,&quot;top&quot;:&quot;106.8&quot;,&quot;width&quot;:&quot;739.1&quot;,&quot;height&quot;:&quot;290.25&quot;}"/>
   <p:tag name="KSO_WM_SPECIAL_SOURCE" val="bdnull"/>
+  <p:tag name="KSO_WM_SLIDE_ID" val="custom20233430_1"/>
   <p:tag name="KSO_WM_TEMPLATE_SUBCATEGORY" val="29"/>
   <p:tag name="KSO_WM_TEMPLATE_MASTER_TYPE" val="0"/>
   <p:tag name="KSO_WM_TEMPLATE_COLOR_TYPE" val="0"/>
+  <p:tag name="KSO_WM_SLIDE_TYPE" val="title"/>
+  <p:tag name="KSO_WM_SLIDE_SUBTYPE" val="pureTxt"/>
+  <p:tag name="KSO_WM_SLIDE_ITEM_CNT" val="0"/>
+  <p:tag name="KSO_WM_SLIDE_INDEX" val="1"/>
   <p:tag name="KSO_WM_TAG_VERSION" val="3.0"/>
   <p:tag name="KSO_WM_BEAUTIFY_FLAG" val="#wm#"/>
   <p:tag name="KSO_WM_TEMPLATE_CATEGORY" val="custom"/>
   <p:tag name="KSO_WM_TEMPLATE_INDEX" val="20233430"/>
+  <p:tag name="KSO_WM_SLIDE_LAYOUT" val="a_b_f"/>
+  <p:tag name="KSO_WM_SLIDE_LAYOUT_CNT" val="1_1_1"/>
 </p:tagLst>
 </file>
 
-<file path=ppt/tags/tag114.xml><?xml version="1.0" encoding="utf-8"?>
-<p:tagLst xmlns:p="http://schemas.openxmlformats.org/presentationml/2006/main">
+<file path=ppt/tags/tag116.xml><?xml version="1.0" encoding="utf-8"?>
+<p:tagLst xmlns:a="http://schemas.openxmlformats.org/drawingml/2006/main" xmlns:r="http://schemas.openxmlformats.org/officeDocument/2006/relationships" xmlns:p="http://schemas.openxmlformats.org/presentationml/2006/main">
   <p:tag name="KSO_WM_UNIT_SUBTYPE" val="b"/>
   <p:tag name="KSO_WM_UNIT_NOCLEAR" val="0"/>
   <p:tag name="KSO_WM_UNIT_VALUE" val="60"/>
@@ -15423,8 +14879,8 @@
 </p:tagLst>
 </file>
 
-<file path=ppt/tags/tag115.xml><?xml version="1.0" encoding="utf-8"?>
-<p:tagLst xmlns:p="http://schemas.openxmlformats.org/presentationml/2006/main">
+<file path=ppt/tags/tag117.xml><?xml version="1.0" encoding="utf-8"?>
+<p:tagLst xmlns:a="http://schemas.openxmlformats.org/drawingml/2006/main" xmlns:r="http://schemas.openxmlformats.org/officeDocument/2006/relationships" xmlns:p="http://schemas.openxmlformats.org/presentationml/2006/main">
   <p:tag name="KSO_WM_UNIT_ISCONTENTSTITLE" val="0"/>
   <p:tag name="KSO_WM_UNIT_ISNUMDGMTITLE" val="0"/>
   <p:tag name="KSO_WM_UNIT_NOCLEAR" val="0"/>
@@ -15446,8 +14902,8 @@
 </p:tagLst>
 </file>
 
-<file path=ppt/tags/tag116.xml><?xml version="1.0" encoding="utf-8"?>
-<p:tagLst xmlns:p="http://schemas.openxmlformats.org/presentationml/2006/main">
+<file path=ppt/tags/tag118.xml><?xml version="1.0" encoding="utf-8"?>
+<p:tagLst xmlns:a="http://schemas.openxmlformats.org/drawingml/2006/main" xmlns:r="http://schemas.openxmlformats.org/officeDocument/2006/relationships" xmlns:p="http://schemas.openxmlformats.org/presentationml/2006/main">
   <p:tag name="KSO_WM_UNIT_ISCONTENTSTITLE" val="0"/>
   <p:tag name="KSO_WM_UNIT_ISNUMDGMTITLE" val="0"/>
   <p:tag name="KSO_WM_UNIT_NOCLEAR" val="0"/>
@@ -15469,30 +14925,48 @@
 </p:tagLst>
 </file>
 
-<file path=ppt/tags/tag117.xml><?xml version="1.0" encoding="utf-8"?>
-<p:tagLst xmlns:p="http://schemas.openxmlformats.org/presentationml/2006/main">
-  <p:tag name="KSO_WM_TEMPLATE_THUMBS_INDEX" val="1、9"/>
-  <p:tag name="KSO_WM_SLIDE_CONTENT_AREA" val="{&quot;left&quot;:&quot;81.45&quot;,&quot;top&quot;:&quot;106.8&quot;,&quot;width&quot;:&quot;739.1&quot;,&quot;height&quot;:&quot;290.25&quot;}"/>
-  <p:tag name="KSO_WM_SPECIAL_SOURCE" val="bdnull"/>
-  <p:tag name="KSO_WM_SLIDE_ID" val="custom20233430_1"/>
-  <p:tag name="KSO_WM_TEMPLATE_SUBCATEGORY" val="29"/>
+<file path=ppt/tags/tag119.xml><?xml version="1.0" encoding="utf-8"?>
+<p:tagLst xmlns:a="http://schemas.openxmlformats.org/drawingml/2006/main" xmlns:r="http://schemas.openxmlformats.org/officeDocument/2006/relationships" xmlns:p="http://schemas.openxmlformats.org/presentationml/2006/main">
+  <p:tag name="KSO_WM_SLIDE_ID" val="custom20238245_1"/>
+  <p:tag name="KSO_WM_TEMPLATE_SUBCATEGORY" val="0"/>
   <p:tag name="KSO_WM_TEMPLATE_MASTER_TYPE" val="0"/>
   <p:tag name="KSO_WM_TEMPLATE_COLOR_TYPE" val="0"/>
-  <p:tag name="KSO_WM_SLIDE_TYPE" val="title"/>
-  <p:tag name="KSO_WM_SLIDE_SUBTYPE" val="pureTxt"/>
-  <p:tag name="KSO_WM_SLIDE_ITEM_CNT" val="0"/>
+  <p:tag name="KSO_WM_SLIDE_ITEM_CNT" val="3"/>
   <p:tag name="KSO_WM_SLIDE_INDEX" val="1"/>
   <p:tag name="KSO_WM_TAG_VERSION" val="3.0"/>
   <p:tag name="KSO_WM_BEAUTIFY_FLAG" val="#wm#"/>
   <p:tag name="KSO_WM_TEMPLATE_CATEGORY" val="custom"/>
-  <p:tag name="KSO_WM_TEMPLATE_INDEX" val="20233430"/>
-  <p:tag name="KSO_WM_SLIDE_LAYOUT" val="a_b_f"/>
-  <p:tag name="KSO_WM_SLIDE_LAYOUT_CNT" val="1_1_1"/>
+  <p:tag name="KSO_WM_TEMPLATE_INDEX" val="20238245"/>
+  <p:tag name="KSO_WM_SLIDE_TYPE" val="text"/>
+  <p:tag name="KSO_WM_SLIDE_SUBTYPE" val="picTxt"/>
+  <p:tag name="KSO_WM_SLIDE_SIZE" val="850.448*382.064"/>
+  <p:tag name="KSO_WM_SLIDE_POSITION" val="54.7493*107.097"/>
+  <p:tag name="KSO_WM_SLIDE_LAYOUT" val="a_l"/>
+  <p:tag name="KSO_WM_SLIDE_LAYOUT_CNT" val="1_1"/>
+  <p:tag name="KSO_WM_SPECIAL_SOURCE" val="bdnull"/>
+  <p:tag name="KSO_WM_DIAGRAM_GROUP_CODE" val="l1-1"/>
+  <p:tag name="KSO_WM_SLIDE_DIAGTYPE" val="l"/>
 </p:tagLst>
 </file>
 
-<file path=ppt/tags/tag118.xml><?xml version="1.0" encoding="utf-8"?>
-<p:tagLst xmlns:p="http://schemas.openxmlformats.org/presentationml/2006/main">
+<file path=ppt/tags/tag12.xml><?xml version="1.0" encoding="utf-8"?>
+<p:tagLst xmlns:a="http://schemas.openxmlformats.org/drawingml/2006/main" xmlns:r="http://schemas.openxmlformats.org/officeDocument/2006/relationships" xmlns:p="http://schemas.openxmlformats.org/presentationml/2006/main">
+  <p:tag name="KSO_WM_UNIT_HIGHLIGHT" val="0"/>
+  <p:tag name="KSO_WM_UNIT_COMPATIBLE" val="0"/>
+  <p:tag name="KSO_WM_UNIT_DIAGRAM_ISNUMVISUAL" val="0"/>
+  <p:tag name="KSO_WM_UNIT_DIAGRAM_ISREFERUNIT" val="0"/>
+  <p:tag name="KSO_WM_UNIT_CONTENT_GROUP_TYPE" val="contentchip"/>
+  <p:tag name="KSO_WM_UNIT_TYPE" val="i"/>
+  <p:tag name="KSO_WM_UNIT_INDEX" val="2"/>
+  <p:tag name="KSO_WM_UNIT_ID" val="_1*i*2"/>
+  <p:tag name="KSO_WM_UNIT_LAYERLEVEL" val="1"/>
+  <p:tag name="KSO_WM_TAG_VERSION" val="3.0"/>
+  <p:tag name="KSO_WM_BEAUTIFY_FLAG" val="#wm#"/>
+</p:tagLst>
+</file>
+
+<file path=ppt/tags/tag120.xml><?xml version="1.0" encoding="utf-8"?>
+<p:tagLst xmlns:a="http://schemas.openxmlformats.org/drawingml/2006/main" xmlns:r="http://schemas.openxmlformats.org/officeDocument/2006/relationships" xmlns:p="http://schemas.openxmlformats.org/presentationml/2006/main">
   <p:tag name="KSO_WM_UNIT_HIGHLIGHT" val="0"/>
   <p:tag name="KSO_WM_UNIT_COMPATIBLE" val="0"/>
   <p:tag name="KSO_WM_UNIT_DIAGRAM_ISNUMVISUAL" val="0"/>
@@ -15516,79 +14990,8 @@
 </p:tagLst>
 </file>
 
-<file path=ppt/tags/tag119.xml><?xml version="1.0" encoding="utf-8"?>
-<p:tagLst xmlns:p="http://schemas.openxmlformats.org/presentationml/2006/main">
-  <p:tag name="KSO_WM_UNIT_HIGHLIGHT" val="0"/>
-  <p:tag name="KSO_WM_UNIT_COMPATIBLE" val="0"/>
-  <p:tag name="KSO_WM_UNIT_DIAGRAM_ISNUMVISUAL" val="0"/>
-  <p:tag name="KSO_WM_UNIT_DIAGRAM_ISREFERUNIT" val="0"/>
-  <p:tag name="KSO_WM_DIAGRAM_GROUP_CODE" val="l1-1"/>
-  <p:tag name="KSO_WM_UNIT_TYPE" val="l_h_d"/>
-  <p:tag name="KSO_WM_UNIT_INDEX" val="1_2_1"/>
-  <p:tag name="KSO_WM_UNIT_ID" val="diagram20238251_1*l_h_d*1_2_1"/>
-  <p:tag name="KSO_WM_TEMPLATE_CATEGORY" val="diagram"/>
-  <p:tag name="KSO_WM_TEMPLATE_INDEX" val="20238251"/>
-  <p:tag name="KSO_WM_UNIT_LAYERLEVEL" val="1_1_1"/>
-  <p:tag name="KSO_WM_TAG_VERSION" val="3.0"/>
-  <p:tag name="KSO_WM_BEAUTIFY_FLAG" val="#wm#"/>
-  <p:tag name="KSO_WM_DIAGRAM_VERSION" val="3"/>
-  <p:tag name="KSO_WM_DIAGRAM_COLOR_TRICK" val="1"/>
-  <p:tag name="KSO_WM_DIAGRAM_COLOR_TEXT_CAN_REMOVE" val="n"/>
-  <p:tag name="KSO_WM_UNIT_VALUE" val="547*1449"/>
-  <p:tag name="KSO_WM_DIAGRAM_MAX_ITEMCNT" val="4"/>
-  <p:tag name="KSO_WM_DIAGRAM_MIN_ITEMCNT" val="2"/>
-  <p:tag name="KSO_WM_DIAGRAM_VIRTUALLY_FRAME" val="{&quot;height&quot;:382.094970703125,&quot;left&quot;:54.42494628906261,&quot;top&quot;:107.07200283741386,&quot;width&quot;:851.110107421875}"/>
-  <p:tag name="KSO_WM_DIAGRAM_COLOR_MATCH_VALUE" val="{&quot;shape&quot;:{&quot;fill&quot;:{&quot;type&quot;:0},&quot;glow&quot;:{&quot;colorType&quot;:0},&quot;line&quot;:{&quot;solidLine&quot;:{&quot;brightness&quot;:0.6000000238418579,&quot;colorType&quot;:1,&quot;foreColorIndex&quot;:13,&quot;transparency&quot;:0.800000011920929},&quot;type&quot;:1},&quot;shadow&quot;:{&quot;colorType&quot;:0},&quot;threeD&quot;:{&quot;curvedSurface&quot;:{&quot;brightness&quot;:0,&quot;colorType&quot;:2,&quot;rgb&quot;:&quot;#000000&quot;},&quot;depth&quot;:{&quot;colorType&quot;:0}}},&quot;text&quot;:{&quot;fill&quot;:{},&quot;glow&quot;:{},&quot;line&quot;:{},&quot;shadow&quot;:{},&quot;threeD&quot;:{}}}"/>
-  <p:tag name="KSO_WM_UNIT_LINE_FORE_SCHEMECOLOR_INDEX" val="13"/>
-  <p:tag name="KSO_WM_UNIT_LINE_FILL_TYPE" val="2"/>
-  <p:tag name="KSO_WM_UNIT_USESOURCEFORMAT_APPLY" val="1"/>
-</p:tagLst>
-</file>
-
-<file path=ppt/tags/tag12.xml><?xml version="1.0" encoding="utf-8"?>
-<p:tagLst xmlns:p="http://schemas.openxmlformats.org/presentationml/2006/main">
-  <p:tag name="KSO_WM_UNIT_HIGHLIGHT" val="0"/>
-  <p:tag name="KSO_WM_UNIT_COMPATIBLE" val="0"/>
-  <p:tag name="KSO_WM_UNIT_DIAGRAM_ISNUMVISUAL" val="0"/>
-  <p:tag name="KSO_WM_UNIT_DIAGRAM_ISREFERUNIT" val="0"/>
-  <p:tag name="KSO_WM_UNIT_ID" val="_1**"/>
-  <p:tag name="KSO_WM_UNIT_LAYERLEVEL" val="1"/>
-  <p:tag name="KSO_WM_TAG_VERSION" val="3.0"/>
-  <p:tag name="KSO_WM_BEAUTIFY_FLAG" val="#wm#"/>
-</p:tagLst>
-</file>
-
-<file path=ppt/tags/tag120.xml><?xml version="1.0" encoding="utf-8"?>
-<p:tagLst xmlns:p="http://schemas.openxmlformats.org/presentationml/2006/main">
-  <p:tag name="KSO_WM_UNIT_HIGHLIGHT" val="0"/>
-  <p:tag name="KSO_WM_UNIT_COMPATIBLE" val="0"/>
-  <p:tag name="KSO_WM_UNIT_DIAGRAM_ISNUMVISUAL" val="0"/>
-  <p:tag name="KSO_WM_UNIT_DIAGRAM_ISREFERUNIT" val="0"/>
-  <p:tag name="KSO_WM_DIAGRAM_GROUP_CODE" val="l1-1"/>
-  <p:tag name="KSO_WM_UNIT_TYPE" val="l_h_d"/>
-  <p:tag name="KSO_WM_UNIT_INDEX" val="1_1_1"/>
-  <p:tag name="KSO_WM_UNIT_ID" val="diagram20238251_1*l_h_d*1_1_1"/>
-  <p:tag name="KSO_WM_TEMPLATE_CATEGORY" val="diagram"/>
-  <p:tag name="KSO_WM_TEMPLATE_INDEX" val="20238251"/>
-  <p:tag name="KSO_WM_UNIT_LAYERLEVEL" val="1_1_1"/>
-  <p:tag name="KSO_WM_TAG_VERSION" val="3.0"/>
-  <p:tag name="KSO_WM_BEAUTIFY_FLAG" val="#wm#"/>
-  <p:tag name="KSO_WM_DIAGRAM_VERSION" val="3"/>
-  <p:tag name="KSO_WM_DIAGRAM_COLOR_TRICK" val="1"/>
-  <p:tag name="KSO_WM_DIAGRAM_COLOR_TEXT_CAN_REMOVE" val="n"/>
-  <p:tag name="KSO_WM_UNIT_VALUE" val="547*1449"/>
-  <p:tag name="KSO_WM_DIAGRAM_MAX_ITEMCNT" val="4"/>
-  <p:tag name="KSO_WM_DIAGRAM_MIN_ITEMCNT" val="2"/>
-  <p:tag name="KSO_WM_DIAGRAM_VIRTUALLY_FRAME" val="{&quot;height&quot;:382.094970703125,&quot;left&quot;:54.42494628906261,&quot;top&quot;:107.07200283741386,&quot;width&quot;:851.110107421875}"/>
-  <p:tag name="KSO_WM_DIAGRAM_COLOR_MATCH_VALUE" val="{&quot;shape&quot;:{&quot;fill&quot;:{&quot;type&quot;:0},&quot;glow&quot;:{&quot;colorType&quot;:0},&quot;line&quot;:{&quot;solidLine&quot;:{&quot;brightness&quot;:0.6000000238418579,&quot;colorType&quot;:1,&quot;foreColorIndex&quot;:13,&quot;transparency&quot;:0.800000011920929},&quot;type&quot;:1},&quot;shadow&quot;:{&quot;colorType&quot;:0},&quot;threeD&quot;:{&quot;curvedSurface&quot;:{&quot;brightness&quot;:0,&quot;colorType&quot;:2,&quot;rgb&quot;:&quot;#000000&quot;},&quot;depth&quot;:{&quot;colorType&quot;:0}}},&quot;text&quot;:{&quot;fill&quot;:{},&quot;glow&quot;:{},&quot;line&quot;:{},&quot;shadow&quot;:{},&quot;threeD&quot;:{}}}"/>
-  <p:tag name="KSO_WM_UNIT_LINE_FORE_SCHEMECOLOR_INDEX" val="13"/>
-  <p:tag name="KSO_WM_UNIT_LINE_FILL_TYPE" val="2"/>
-  <p:tag name="KSO_WM_UNIT_USESOURCEFORMAT_APPLY" val="1"/>
-</p:tagLst>
-</file>
-
 <file path=ppt/tags/tag121.xml><?xml version="1.0" encoding="utf-8"?>
-<p:tagLst xmlns:p="http://schemas.openxmlformats.org/presentationml/2006/main">
+<p:tagLst xmlns:a="http://schemas.openxmlformats.org/drawingml/2006/main" xmlns:r="http://schemas.openxmlformats.org/officeDocument/2006/relationships" xmlns:p="http://schemas.openxmlformats.org/presentationml/2006/main">
   <p:tag name="KSO_WM_UNIT_HIGHLIGHT" val="0"/>
   <p:tag name="KSO_WM_UNIT_COMPATIBLE" val="0"/>
   <p:tag name="KSO_WM_UNIT_DIAGRAM_ISNUMVISUAL" val="0"/>
@@ -15616,7 +15019,7 @@
 </file>
 
 <file path=ppt/tags/tag122.xml><?xml version="1.0" encoding="utf-8"?>
-<p:tagLst xmlns:p="http://schemas.openxmlformats.org/presentationml/2006/main">
+<p:tagLst xmlns:a="http://schemas.openxmlformats.org/drawingml/2006/main" xmlns:r="http://schemas.openxmlformats.org/officeDocument/2006/relationships" xmlns:p="http://schemas.openxmlformats.org/presentationml/2006/main">
   <p:tag name="KSO_WM_UNIT_SUBTYPE" val="a"/>
   <p:tag name="KSO_WM_UNIT_NOCLEAR" val="0"/>
   <p:tag name="KSO_WM_UNIT_VALUE" val="60"/>
@@ -15649,7 +15052,7 @@
 </file>
 
 <file path=ppt/tags/tag123.xml><?xml version="1.0" encoding="utf-8"?>
-<p:tagLst xmlns:p="http://schemas.openxmlformats.org/presentationml/2006/main">
+<p:tagLst xmlns:a="http://schemas.openxmlformats.org/drawingml/2006/main" xmlns:r="http://schemas.openxmlformats.org/officeDocument/2006/relationships" xmlns:p="http://schemas.openxmlformats.org/presentationml/2006/main">
   <p:tag name="KSO_WM_UNIT_ISCONTENTSTITLE" val="0"/>
   <p:tag name="KSO_WM_UNIT_ISNUMDGMTITLE" val="0"/>
   <p:tag name="KSO_WM_UNIT_NOCLEAR" val="0"/>
@@ -15683,7 +15086,7 @@
 </file>
 
 <file path=ppt/tags/tag124.xml><?xml version="1.0" encoding="utf-8"?>
-<p:tagLst xmlns:p="http://schemas.openxmlformats.org/presentationml/2006/main">
+<p:tagLst xmlns:a="http://schemas.openxmlformats.org/drawingml/2006/main" xmlns:r="http://schemas.openxmlformats.org/officeDocument/2006/relationships" xmlns:p="http://schemas.openxmlformats.org/presentationml/2006/main">
   <p:tag name="KSO_WM_UNIT_HIGHLIGHT" val="0"/>
   <p:tag name="KSO_WM_UNIT_COMPATIBLE" val="0"/>
   <p:tag name="KSO_WM_UNIT_DIAGRAM_ISNUMVISUAL" val="0"/>
@@ -15711,7 +15114,7 @@
 </file>
 
 <file path=ppt/tags/tag125.xml><?xml version="1.0" encoding="utf-8"?>
-<p:tagLst xmlns:p="http://schemas.openxmlformats.org/presentationml/2006/main">
+<p:tagLst xmlns:a="http://schemas.openxmlformats.org/drawingml/2006/main" xmlns:r="http://schemas.openxmlformats.org/officeDocument/2006/relationships" xmlns:p="http://schemas.openxmlformats.org/presentationml/2006/main">
   <p:tag name="KSO_WM_UNIT_SUBTYPE" val="a"/>
   <p:tag name="KSO_WM_UNIT_NOCLEAR" val="0"/>
   <p:tag name="KSO_WM_UNIT_VALUE" val="60"/>
@@ -15744,7 +15147,7 @@
 </file>
 
 <file path=ppt/tags/tag126.xml><?xml version="1.0" encoding="utf-8"?>
-<p:tagLst xmlns:p="http://schemas.openxmlformats.org/presentationml/2006/main">
+<p:tagLst xmlns:a="http://schemas.openxmlformats.org/drawingml/2006/main" xmlns:r="http://schemas.openxmlformats.org/officeDocument/2006/relationships" xmlns:p="http://schemas.openxmlformats.org/presentationml/2006/main">
   <p:tag name="KSO_WM_UNIT_ISCONTENTSTITLE" val="0"/>
   <p:tag name="KSO_WM_UNIT_ISNUMDGMTITLE" val="0"/>
   <p:tag name="KSO_WM_UNIT_NOCLEAR" val="0"/>
@@ -15778,31 +15181,31 @@
 </file>
 
 <file path=ppt/tags/tag127.xml><?xml version="1.0" encoding="utf-8"?>
-<p:tagLst xmlns:p="http://schemas.openxmlformats.org/presentationml/2006/main">
-  <p:tag name="KSO_WM_SLIDE_ID" val="custom20238245_1"/>
-  <p:tag name="KSO_WM_TEMPLATE_SUBCATEGORY" val="0"/>
+<p:tagLst xmlns:a="http://schemas.openxmlformats.org/drawingml/2006/main" xmlns:r="http://schemas.openxmlformats.org/officeDocument/2006/relationships" xmlns:p="http://schemas.openxmlformats.org/presentationml/2006/main">
   <p:tag name="KSO_WM_TEMPLATE_MASTER_TYPE" val="0"/>
   <p:tag name="KSO_WM_TEMPLATE_COLOR_TYPE" val="0"/>
-  <p:tag name="KSO_WM_SLIDE_ITEM_CNT" val="3"/>
-  <p:tag name="KSO_WM_SLIDE_INDEX" val="1"/>
-  <p:tag name="KSO_WM_TAG_VERSION" val="3.0"/>
   <p:tag name="KSO_WM_BEAUTIFY_FLAG" val="#wm#"/>
   <p:tag name="KSO_WM_TEMPLATE_CATEGORY" val="custom"/>
-  <p:tag name="KSO_WM_TEMPLATE_INDEX" val="20238245"/>
   <p:tag name="KSO_WM_SLIDE_TYPE" val="text"/>
   <p:tag name="KSO_WM_SLIDE_SUBTYPE" val="picTxt"/>
-  <p:tag name="KSO_WM_SLIDE_SIZE" val="850.448*382.064"/>
-  <p:tag name="KSO_WM_SLIDE_POSITION" val="54.7493*107.097"/>
-  <p:tag name="KSO_WM_SLIDE_LAYOUT" val="a_l"/>
-  <p:tag name="KSO_WM_SLIDE_LAYOUT_CNT" val="1_1"/>
+  <p:tag name="KSO_WM_SLIDE_SIZE" val="413.271*363.279"/>
+  <p:tag name="KSO_WM_SLIDE_POSITION" val="491.465*138.66"/>
+  <p:tag name="KSO_WM_SLIDE_LAYOUT" val="a_d_l"/>
+  <p:tag name="KSO_WM_SLIDE_LAYOUT_CNT" val="1_1_1"/>
   <p:tag name="KSO_WM_SPECIAL_SOURCE" val="bdnull"/>
   <p:tag name="KSO_WM_DIAGRAM_GROUP_CODE" val="l1-1"/>
   <p:tag name="KSO_WM_SLIDE_DIAGTYPE" val="l"/>
+  <p:tag name="KSO_WM_TEMPLATE_INDEX" val="20238262"/>
+  <p:tag name="KSO_WM_TEMPLATE_SUBCATEGORY" val="0"/>
+  <p:tag name="KSO_WM_SLIDE_INDEX" val="1"/>
+  <p:tag name="KSO_WM_TAG_VERSION" val="3.0"/>
+  <p:tag name="KSO_WM_SLIDE_ID" val="custom20238262_1"/>
+  <p:tag name="KSO_WM_SLIDE_ITEM_CNT" val="3"/>
 </p:tagLst>
 </file>
 
 <file path=ppt/tags/tag128.xml><?xml version="1.0" encoding="utf-8"?>
-<p:tagLst xmlns:p="http://schemas.openxmlformats.org/presentationml/2006/main">
+<p:tagLst xmlns:a="http://schemas.openxmlformats.org/drawingml/2006/main" xmlns:r="http://schemas.openxmlformats.org/officeDocument/2006/relationships" xmlns:p="http://schemas.openxmlformats.org/presentationml/2006/main">
   <p:tag name="KSO_WM_UNIT_ISCONTENTSTITLE" val="0"/>
   <p:tag name="KSO_WM_UNIT_ISNUMDGMTITLE" val="0"/>
   <p:tag name="KSO_WM_UNIT_NOCLEAR" val="0"/>
@@ -15827,42 +15230,7 @@
 </file>
 
 <file path=ppt/tags/tag129.xml><?xml version="1.0" encoding="utf-8"?>
-<p:tagLst xmlns:p="http://schemas.openxmlformats.org/presentationml/2006/main">
-  <p:tag name="KSO_WM_UNIT_VALUE" val="1311*1484"/>
-  <p:tag name="KSO_WM_UNIT_HIGHLIGHT" val="0"/>
-  <p:tag name="KSO_WM_UNIT_COMPATIBLE" val="0"/>
-  <p:tag name="KSO_WM_UNIT_DIAGRAM_ISNUMVISUAL" val="0"/>
-  <p:tag name="KSO_WM_UNIT_DIAGRAM_ISREFERUNIT" val="0"/>
-  <p:tag name="KSO_WM_DIAGRAM_GROUP_CODE" val="l1-1"/>
-  <p:tag name="KSO_WM_UNIT_TYPE" val="d"/>
-  <p:tag name="KSO_WM_UNIT_INDEX" val="1"/>
-  <p:tag name="KSO_WM_UNIT_ID" val="custom20238262_1*d*1"/>
-  <p:tag name="KSO_WM_TEMPLATE_CATEGORY" val="custom"/>
-  <p:tag name="KSO_WM_TEMPLATE_INDEX" val="20238262"/>
-  <p:tag name="KSO_WM_UNIT_LAYERLEVEL" val="1"/>
-  <p:tag name="KSO_WM_TAG_VERSION" val="3.0"/>
-  <p:tag name="KSO_WM_BEAUTIFY_FLAG" val="#wm#"/>
-  <p:tag name="KSO_WM_UNIT_LINE_FORE_SCHEMECOLOR_INDEX" val="1"/>
-  <p:tag name="KSO_WM_UNIT_LINE_FILL_TYPE" val="2"/>
-  <p:tag name="KSO_WM_UNIT_USESOURCEFORMAT_APPLY" val="1"/>
-</p:tagLst>
-</file>
-
-<file path=ppt/tags/tag13.xml><?xml version="1.0" encoding="utf-8"?>
-<p:tagLst xmlns:p="http://schemas.openxmlformats.org/presentationml/2006/main">
-  <p:tag name="KSO_WM_UNIT_HIGHLIGHT" val="0"/>
-  <p:tag name="KSO_WM_UNIT_COMPATIBLE" val="0"/>
-  <p:tag name="KSO_WM_UNIT_DIAGRAM_ISNUMVISUAL" val="0"/>
-  <p:tag name="KSO_WM_UNIT_DIAGRAM_ISREFERUNIT" val="0"/>
-  <p:tag name="KSO_WM_UNIT_ID" val="_1**"/>
-  <p:tag name="KSO_WM_UNIT_LAYERLEVEL" val="1"/>
-  <p:tag name="KSO_WM_TAG_VERSION" val="3.0"/>
-  <p:tag name="KSO_WM_BEAUTIFY_FLAG" val="#wm#"/>
-</p:tagLst>
-</file>
-
-<file path=ppt/tags/tag130.xml><?xml version="1.0" encoding="utf-8"?>
-<p:tagLst xmlns:p="http://schemas.openxmlformats.org/presentationml/2006/main">
+<p:tagLst xmlns:a="http://schemas.openxmlformats.org/drawingml/2006/main" xmlns:r="http://schemas.openxmlformats.org/officeDocument/2006/relationships" xmlns:p="http://schemas.openxmlformats.org/presentationml/2006/main">
   <p:tag name="KSO_WM_UNIT_TEXT_FILL_FORE_SCHEMECOLOR_INDEX_BRIGHTNESS" val="0.15"/>
   <p:tag name="KSO_WM_DIAGRAM_MAX_ITEMCNT" val="4"/>
   <p:tag name="KSO_WM_DIAGRAM_MIN_ITEMCNT" val="2"/>
@@ -15894,8 +15262,24 @@
 </p:tagLst>
 </file>
 
-<file path=ppt/tags/tag131.xml><?xml version="1.0" encoding="utf-8"?>
-<p:tagLst xmlns:p="http://schemas.openxmlformats.org/presentationml/2006/main">
+<file path=ppt/tags/tag13.xml><?xml version="1.0" encoding="utf-8"?>
+<p:tagLst xmlns:a="http://schemas.openxmlformats.org/drawingml/2006/main" xmlns:r="http://schemas.openxmlformats.org/officeDocument/2006/relationships" xmlns:p="http://schemas.openxmlformats.org/presentationml/2006/main">
+  <p:tag name="KSO_WM_UNIT_HIGHLIGHT" val="0"/>
+  <p:tag name="KSO_WM_UNIT_COMPATIBLE" val="0"/>
+  <p:tag name="KSO_WM_UNIT_DIAGRAM_ISNUMVISUAL" val="0"/>
+  <p:tag name="KSO_WM_UNIT_DIAGRAM_ISREFERUNIT" val="0"/>
+  <p:tag name="KSO_WM_UNIT_CONTENT_GROUP_TYPE" val="contentchip"/>
+  <p:tag name="KSO_WM_UNIT_TYPE" val="i"/>
+  <p:tag name="KSO_WM_UNIT_INDEX" val="3"/>
+  <p:tag name="KSO_WM_UNIT_ID" val="_1*i*3"/>
+  <p:tag name="KSO_WM_UNIT_LAYERLEVEL" val="1"/>
+  <p:tag name="KSO_WM_TAG_VERSION" val="3.0"/>
+  <p:tag name="KSO_WM_BEAUTIFY_FLAG" val="#wm#"/>
+</p:tagLst>
+</file>
+
+<file path=ppt/tags/tag130.xml><?xml version="1.0" encoding="utf-8"?>
+<p:tagLst xmlns:a="http://schemas.openxmlformats.org/drawingml/2006/main" xmlns:r="http://schemas.openxmlformats.org/officeDocument/2006/relationships" xmlns:p="http://schemas.openxmlformats.org/presentationml/2006/main">
   <p:tag name="KSO_WM_UNIT_TEXT_FILL_FORE_SCHEMECOLOR_INDEX_BRIGHTNESS" val="0.15"/>
   <p:tag name="KSO_WM_DIAGRAM_MAX_ITEMCNT" val="4"/>
   <p:tag name="KSO_WM_DIAGRAM_MIN_ITEMCNT" val="2"/>
@@ -15928,8 +15312,8 @@
 </p:tagLst>
 </file>
 
-<file path=ppt/tags/tag132.xml><?xml version="1.0" encoding="utf-8"?>
-<p:tagLst xmlns:p="http://schemas.openxmlformats.org/presentationml/2006/main">
+<file path=ppt/tags/tag131.xml><?xml version="1.0" encoding="utf-8"?>
+<p:tagLst xmlns:a="http://schemas.openxmlformats.org/drawingml/2006/main" xmlns:r="http://schemas.openxmlformats.org/officeDocument/2006/relationships" xmlns:p="http://schemas.openxmlformats.org/presentationml/2006/main">
   <p:tag name="KSO_WM_UNIT_TEXT_FILL_FORE_SCHEMECOLOR_INDEX_BRIGHTNESS" val="0.15"/>
   <p:tag name="KSO_WM_DIAGRAM_MAX_ITEMCNT" val="4"/>
   <p:tag name="KSO_WM_DIAGRAM_MIN_ITEMCNT" val="2"/>
@@ -15962,8 +15346,8 @@
 </p:tagLst>
 </file>
 
-<file path=ppt/tags/tag133.xml><?xml version="1.0" encoding="utf-8"?>
-<p:tagLst xmlns:p="http://schemas.openxmlformats.org/presentationml/2006/main">
+<file path=ppt/tags/tag132.xml><?xml version="1.0" encoding="utf-8"?>
+<p:tagLst xmlns:a="http://schemas.openxmlformats.org/drawingml/2006/main" xmlns:r="http://schemas.openxmlformats.org/officeDocument/2006/relationships" xmlns:p="http://schemas.openxmlformats.org/presentationml/2006/main">
   <p:tag name="KSO_WM_UNIT_TEXT_FILL_FORE_SCHEMECOLOR_INDEX_BRIGHTNESS" val="0.15"/>
   <p:tag name="KSO_WM_DIAGRAM_MAX_ITEMCNT" val="4"/>
   <p:tag name="KSO_WM_DIAGRAM_MIN_ITEMCNT" val="2"/>
@@ -15995,8 +15379,8 @@
 </p:tagLst>
 </file>
 
-<file path=ppt/tags/tag134.xml><?xml version="1.0" encoding="utf-8"?>
-<p:tagLst xmlns:p="http://schemas.openxmlformats.org/presentationml/2006/main">
+<file path=ppt/tags/tag133.xml><?xml version="1.0" encoding="utf-8"?>
+<p:tagLst xmlns:a="http://schemas.openxmlformats.org/drawingml/2006/main" xmlns:r="http://schemas.openxmlformats.org/officeDocument/2006/relationships" xmlns:p="http://schemas.openxmlformats.org/presentationml/2006/main">
   <p:tag name="KSO_WM_UNIT_TEXT_FILL_FORE_SCHEMECOLOR_INDEX_BRIGHTNESS" val="0.15"/>
   <p:tag name="KSO_WM_DIAGRAM_MAX_ITEMCNT" val="4"/>
   <p:tag name="KSO_WM_DIAGRAM_MIN_ITEMCNT" val="2"/>
@@ -16029,8 +15413,8 @@
 </p:tagLst>
 </file>
 
-<file path=ppt/tags/tag135.xml><?xml version="1.0" encoding="utf-8"?>
-<p:tagLst xmlns:p="http://schemas.openxmlformats.org/presentationml/2006/main">
+<file path=ppt/tags/tag134.xml><?xml version="1.0" encoding="utf-8"?>
+<p:tagLst xmlns:a="http://schemas.openxmlformats.org/drawingml/2006/main" xmlns:r="http://schemas.openxmlformats.org/officeDocument/2006/relationships" xmlns:p="http://schemas.openxmlformats.org/presentationml/2006/main">
   <p:tag name="KSO_WM_UNIT_TEXT_FILL_FORE_SCHEMECOLOR_INDEX_BRIGHTNESS" val="0.15"/>
   <p:tag name="KSO_WM_DIAGRAM_MAX_ITEMCNT" val="4"/>
   <p:tag name="KSO_WM_DIAGRAM_MIN_ITEMCNT" val="2"/>
@@ -16063,8 +15447,8 @@
 </p:tagLst>
 </file>
 
-<file path=ppt/tags/tag136.xml><?xml version="1.0" encoding="utf-8"?>
-<p:tagLst xmlns:p="http://schemas.openxmlformats.org/presentationml/2006/main">
+<file path=ppt/tags/tag135.xml><?xml version="1.0" encoding="utf-8"?>
+<p:tagLst xmlns:a="http://schemas.openxmlformats.org/drawingml/2006/main" xmlns:r="http://schemas.openxmlformats.org/officeDocument/2006/relationships" xmlns:p="http://schemas.openxmlformats.org/presentationml/2006/main">
   <p:tag name="KSO_WM_UNIT_TEXT_FILL_FORE_SCHEMECOLOR_INDEX_BRIGHTNESS" val="0.15"/>
   <p:tag name="KSO_WM_DIAGRAM_MAX_ITEMCNT" val="4"/>
   <p:tag name="KSO_WM_DIAGRAM_MIN_ITEMCNT" val="2"/>
@@ -16096,8 +15480,8 @@
 </p:tagLst>
 </file>
 
-<file path=ppt/tags/tag137.xml><?xml version="1.0" encoding="utf-8"?>
-<p:tagLst xmlns:p="http://schemas.openxmlformats.org/presentationml/2006/main">
+<file path=ppt/tags/tag136.xml><?xml version="1.0" encoding="utf-8"?>
+<p:tagLst xmlns:a="http://schemas.openxmlformats.org/drawingml/2006/main" xmlns:r="http://schemas.openxmlformats.org/officeDocument/2006/relationships" xmlns:p="http://schemas.openxmlformats.org/presentationml/2006/main">
   <p:tag name="KSO_WM_UNIT_TEXT_FILL_FORE_SCHEMECOLOR_INDEX_BRIGHTNESS" val="0.15"/>
   <p:tag name="KSO_WM_DIAGRAM_MAX_ITEMCNT" val="4"/>
   <p:tag name="KSO_WM_DIAGRAM_MIN_ITEMCNT" val="2"/>
@@ -16130,8 +15514,8 @@
 </p:tagLst>
 </file>
 
-<file path=ppt/tags/tag138.xml><?xml version="1.0" encoding="utf-8"?>
-<p:tagLst xmlns:p="http://schemas.openxmlformats.org/presentationml/2006/main">
+<file path=ppt/tags/tag137.xml><?xml version="1.0" encoding="utf-8"?>
+<p:tagLst xmlns:a="http://schemas.openxmlformats.org/drawingml/2006/main" xmlns:r="http://schemas.openxmlformats.org/officeDocument/2006/relationships" xmlns:p="http://schemas.openxmlformats.org/presentationml/2006/main">
   <p:tag name="KSO_WM_UNIT_TEXT_FILL_FORE_SCHEMECOLOR_INDEX_BRIGHTNESS" val="0.15"/>
   <p:tag name="KSO_WM_DIAGRAM_MAX_ITEMCNT" val="4"/>
   <p:tag name="KSO_WM_DIAGRAM_MIN_ITEMCNT" val="2"/>
@@ -16164,45 +15548,32 @@
 </p:tagLst>
 </file>
 
-<file path=ppt/tags/tag139.xml><?xml version="1.0" encoding="utf-8"?>
-<p:tagLst xmlns:p="http://schemas.openxmlformats.org/presentationml/2006/main">
+<file path=ppt/tags/tag138.xml><?xml version="1.0" encoding="utf-8"?>
+<p:tagLst xmlns:a="http://schemas.openxmlformats.org/drawingml/2006/main" xmlns:r="http://schemas.openxmlformats.org/officeDocument/2006/relationships" xmlns:p="http://schemas.openxmlformats.org/presentationml/2006/main">
   <p:tag name="KSO_WM_TEMPLATE_MASTER_TYPE" val="0"/>
   <p:tag name="KSO_WM_TEMPLATE_COLOR_TYPE" val="0"/>
   <p:tag name="KSO_WM_BEAUTIFY_FLAG" val="#wm#"/>
   <p:tag name="KSO_WM_TEMPLATE_CATEGORY" val="custom"/>
   <p:tag name="KSO_WM_SLIDE_TYPE" val="text"/>
   <p:tag name="KSO_WM_SLIDE_SUBTYPE" val="picTxt"/>
-  <p:tag name="KSO_WM_SLIDE_SIZE" val="413.271*363.279"/>
-  <p:tag name="KSO_WM_SLIDE_POSITION" val="491.465*138.66"/>
+  <p:tag name="KSO_WM_SLIDE_SIZE" val="362.75*317.05"/>
+  <p:tag name="KSO_WM_SLIDE_POSITION" val="52.7*161.5"/>
   <p:tag name="KSO_WM_SLIDE_LAYOUT" val="a_d_l"/>
   <p:tag name="KSO_WM_SLIDE_LAYOUT_CNT" val="1_1_1"/>
   <p:tag name="KSO_WM_SPECIAL_SOURCE" val="bdnull"/>
   <p:tag name="KSO_WM_DIAGRAM_GROUP_CODE" val="l1-1"/>
   <p:tag name="KSO_WM_SLIDE_DIAGTYPE" val="l"/>
-  <p:tag name="KSO_WM_TEMPLATE_INDEX" val="20238262"/>
+  <p:tag name="KSO_WM_TEMPLATE_INDEX" val="20238264"/>
   <p:tag name="KSO_WM_TEMPLATE_SUBCATEGORY" val="0"/>
   <p:tag name="KSO_WM_SLIDE_INDEX" val="1"/>
   <p:tag name="KSO_WM_TAG_VERSION" val="3.0"/>
-  <p:tag name="KSO_WM_SLIDE_ID" val="custom20238262_1"/>
+  <p:tag name="KSO_WM_SLIDE_ID" val="custom20238264_1"/>
   <p:tag name="KSO_WM_SLIDE_ITEM_CNT" val="3"/>
 </p:tagLst>
 </file>
 
-<file path=ppt/tags/tag14.xml><?xml version="1.0" encoding="utf-8"?>
-<p:tagLst xmlns:p="http://schemas.openxmlformats.org/presentationml/2006/main">
-  <p:tag name="KSO_WM_UNIT_HIGHLIGHT" val="0"/>
-  <p:tag name="KSO_WM_UNIT_COMPATIBLE" val="0"/>
-  <p:tag name="KSO_WM_UNIT_DIAGRAM_ISNUMVISUAL" val="0"/>
-  <p:tag name="KSO_WM_UNIT_DIAGRAM_ISREFERUNIT" val="0"/>
-  <p:tag name="KSO_WM_UNIT_ID" val="_1**"/>
-  <p:tag name="KSO_WM_UNIT_LAYERLEVEL" val="1"/>
-  <p:tag name="KSO_WM_TAG_VERSION" val="3.0"/>
-  <p:tag name="KSO_WM_BEAUTIFY_FLAG" val="#wm#"/>
-</p:tagLst>
-</file>
-
-<file path=ppt/tags/tag140.xml><?xml version="1.0" encoding="utf-8"?>
-<p:tagLst xmlns:p="http://schemas.openxmlformats.org/presentationml/2006/main">
+<file path=ppt/tags/tag139.xml><?xml version="1.0" encoding="utf-8"?>
+<p:tagLst xmlns:a="http://schemas.openxmlformats.org/drawingml/2006/main" xmlns:r="http://schemas.openxmlformats.org/officeDocument/2006/relationships" xmlns:p="http://schemas.openxmlformats.org/presentationml/2006/main">
   <p:tag name="KSO_WM_UNIT_ISCONTENTSTITLE" val="0"/>
   <p:tag name="KSO_WM_UNIT_ISNUMDGMTITLE" val="0"/>
   <p:tag name="KSO_WM_UNIT_NOCLEAR" val="0"/>
@@ -16227,31 +15598,24 @@
 </p:tagLst>
 </file>
 
-<file path=ppt/tags/tag141.xml><?xml version="1.0" encoding="utf-8"?>
-<p:tagLst xmlns:p="http://schemas.openxmlformats.org/presentationml/2006/main">
-  <p:tag name="KSO_WM_UNIT_VALUE" val="1677*1676"/>
+<file path=ppt/tags/tag14.xml><?xml version="1.0" encoding="utf-8"?>
+<p:tagLst xmlns:a="http://schemas.openxmlformats.org/drawingml/2006/main" xmlns:r="http://schemas.openxmlformats.org/officeDocument/2006/relationships" xmlns:p="http://schemas.openxmlformats.org/presentationml/2006/main">
   <p:tag name="KSO_WM_UNIT_HIGHLIGHT" val="0"/>
   <p:tag name="KSO_WM_UNIT_COMPATIBLE" val="0"/>
   <p:tag name="KSO_WM_UNIT_DIAGRAM_ISNUMVISUAL" val="0"/>
   <p:tag name="KSO_WM_UNIT_DIAGRAM_ISREFERUNIT" val="0"/>
-  <p:tag name="KSO_WM_DIAGRAM_GROUP_CODE" val="l1-1"/>
-  <p:tag name="KSO_WM_UNIT_TYPE" val="d"/>
-  <p:tag name="KSO_WM_UNIT_INDEX" val="1"/>
-  <p:tag name="KSO_WM_UNIT_ID" val="custom20238264_1*d*1"/>
-  <p:tag name="KSO_WM_TEMPLATE_CATEGORY" val="custom"/>
-  <p:tag name="KSO_WM_TEMPLATE_INDEX" val="20238264"/>
+  <p:tag name="KSO_WM_UNIT_CONTENT_GROUP_TYPE" val="contentchip"/>
+  <p:tag name="KSO_WM_UNIT_TYPE" val="i"/>
+  <p:tag name="KSO_WM_UNIT_INDEX" val="4"/>
+  <p:tag name="KSO_WM_UNIT_ID" val="_1*i*4"/>
   <p:tag name="KSO_WM_UNIT_LAYERLEVEL" val="1"/>
   <p:tag name="KSO_WM_TAG_VERSION" val="3.0"/>
   <p:tag name="KSO_WM_BEAUTIFY_FLAG" val="#wm#"/>
-  <p:tag name="KSO_WM_UNIT_LINE_FORE_SCHEMECOLOR_INDEX" val="13"/>
-  <p:tag name="KSO_WM_UNIT_LINE_FILL_TYPE" val="2"/>
-  <p:tag name="KSO_WM_UNIT_SHADOW_SCHEMECOLOR_INDEX" val="5"/>
-  <p:tag name="KSO_WM_UNIT_USESOURCEFORMAT_APPLY" val="1"/>
 </p:tagLst>
 </file>
 
-<file path=ppt/tags/tag142.xml><?xml version="1.0" encoding="utf-8"?>
-<p:tagLst xmlns:p="http://schemas.openxmlformats.org/presentationml/2006/main">
+<file path=ppt/tags/tag140.xml><?xml version="1.0" encoding="utf-8"?>
+<p:tagLst xmlns:a="http://schemas.openxmlformats.org/drawingml/2006/main" xmlns:r="http://schemas.openxmlformats.org/officeDocument/2006/relationships" xmlns:p="http://schemas.openxmlformats.org/presentationml/2006/main">
   <p:tag name="KSO_WM_DIAGRAM_MAX_ITEMCNT" val="5"/>
   <p:tag name="KSO_WM_DIAGRAM_MIN_ITEMCNT" val="2"/>
   <p:tag name="KSO_WM_DIAGRAM_VIRTUALLY_FRAME" val="{&quot;height&quot;:319.8249969482422,&quot;left&quot;:36.82503937007873,&quot;top&quot;:147.07500305175782,&quot;width&quot;:402.47496062992127}"/>
@@ -16282,8 +15646,8 @@
 </p:tagLst>
 </file>
 
-<file path=ppt/tags/tag143.xml><?xml version="1.0" encoding="utf-8"?>
-<p:tagLst xmlns:p="http://schemas.openxmlformats.org/presentationml/2006/main">
+<file path=ppt/tags/tag141.xml><?xml version="1.0" encoding="utf-8"?>
+<p:tagLst xmlns:a="http://schemas.openxmlformats.org/drawingml/2006/main" xmlns:r="http://schemas.openxmlformats.org/officeDocument/2006/relationships" xmlns:p="http://schemas.openxmlformats.org/presentationml/2006/main">
   <p:tag name="KSO_WM_DIAGRAM_MAX_ITEMCNT" val="5"/>
   <p:tag name="KSO_WM_DIAGRAM_MIN_ITEMCNT" val="2"/>
   <p:tag name="KSO_WM_DIAGRAM_VIRTUALLY_FRAME" val="{&quot;height&quot;:319.8249969482422,&quot;left&quot;:36.82503937007873,&quot;top&quot;:147.07500305175782,&quot;width&quot;:402.47496062992127}"/>
@@ -16315,8 +15679,8 @@
 </p:tagLst>
 </file>
 
-<file path=ppt/tags/tag144.xml><?xml version="1.0" encoding="utf-8"?>
-<p:tagLst xmlns:p="http://schemas.openxmlformats.org/presentationml/2006/main">
+<file path=ppt/tags/tag142.xml><?xml version="1.0" encoding="utf-8"?>
+<p:tagLst xmlns:a="http://schemas.openxmlformats.org/drawingml/2006/main" xmlns:r="http://schemas.openxmlformats.org/officeDocument/2006/relationships" xmlns:p="http://schemas.openxmlformats.org/presentationml/2006/main">
   <p:tag name="KSO_WM_UNIT_TEXT_FILL_FORE_SCHEMECOLOR_INDEX_BRIGHTNESS" val="0.15"/>
   <p:tag name="KSO_WM_DIAGRAM_MAX_ITEMCNT" val="5"/>
   <p:tag name="KSO_WM_DIAGRAM_MIN_ITEMCNT" val="2"/>
@@ -16350,8 +15714,8 @@
 </p:tagLst>
 </file>
 
-<file path=ppt/tags/tag145.xml><?xml version="1.0" encoding="utf-8"?>
-<p:tagLst xmlns:p="http://schemas.openxmlformats.org/presentationml/2006/main">
+<file path=ppt/tags/tag143.xml><?xml version="1.0" encoding="utf-8"?>
+<p:tagLst xmlns:a="http://schemas.openxmlformats.org/drawingml/2006/main" xmlns:r="http://schemas.openxmlformats.org/officeDocument/2006/relationships" xmlns:p="http://schemas.openxmlformats.org/presentationml/2006/main">
   <p:tag name="KSO_WM_UNIT_TEXT_FILL_FORE_SCHEMECOLOR_INDEX_BRIGHTNESS" val="0.15"/>
   <p:tag name="KSO_WM_DIAGRAM_MAX_ITEMCNT" val="5"/>
   <p:tag name="KSO_WM_DIAGRAM_MIN_ITEMCNT" val="2"/>
@@ -16385,8 +15749,8 @@
 </p:tagLst>
 </file>
 
-<file path=ppt/tags/tag146.xml><?xml version="1.0" encoding="utf-8"?>
-<p:tagLst xmlns:p="http://schemas.openxmlformats.org/presentationml/2006/main">
+<file path=ppt/tags/tag144.xml><?xml version="1.0" encoding="utf-8"?>
+<p:tagLst xmlns:a="http://schemas.openxmlformats.org/drawingml/2006/main" xmlns:r="http://schemas.openxmlformats.org/officeDocument/2006/relationships" xmlns:p="http://schemas.openxmlformats.org/presentationml/2006/main">
   <p:tag name="KSO_WM_DIAGRAM_MAX_ITEMCNT" val="5"/>
   <p:tag name="KSO_WM_DIAGRAM_MIN_ITEMCNT" val="2"/>
   <p:tag name="KSO_WM_DIAGRAM_VIRTUALLY_FRAME" val="{&quot;height&quot;:319.8249969482422,&quot;left&quot;:36.82503937007873,&quot;top&quot;:147.07500305175782,&quot;width&quot;:402.47496062992127}"/>
@@ -16417,8 +15781,8 @@
 </p:tagLst>
 </file>
 
-<file path=ppt/tags/tag147.xml><?xml version="1.0" encoding="utf-8"?>
-<p:tagLst xmlns:p="http://schemas.openxmlformats.org/presentationml/2006/main">
+<file path=ppt/tags/tag145.xml><?xml version="1.0" encoding="utf-8"?>
+<p:tagLst xmlns:a="http://schemas.openxmlformats.org/drawingml/2006/main" xmlns:r="http://schemas.openxmlformats.org/officeDocument/2006/relationships" xmlns:p="http://schemas.openxmlformats.org/presentationml/2006/main">
   <p:tag name="KSO_WM_DIAGRAM_MAX_ITEMCNT" val="5"/>
   <p:tag name="KSO_WM_DIAGRAM_MIN_ITEMCNT" val="2"/>
   <p:tag name="KSO_WM_DIAGRAM_VIRTUALLY_FRAME" val="{&quot;height&quot;:319.8249969482422,&quot;left&quot;:36.82503937007873,&quot;top&quot;:147.07500305175782,&quot;width&quot;:402.47496062992127}"/>
@@ -16450,8 +15814,8 @@
 </p:tagLst>
 </file>
 
-<file path=ppt/tags/tag148.xml><?xml version="1.0" encoding="utf-8"?>
-<p:tagLst xmlns:p="http://schemas.openxmlformats.org/presentationml/2006/main">
+<file path=ppt/tags/tag146.xml><?xml version="1.0" encoding="utf-8"?>
+<p:tagLst xmlns:a="http://schemas.openxmlformats.org/drawingml/2006/main" xmlns:r="http://schemas.openxmlformats.org/officeDocument/2006/relationships" xmlns:p="http://schemas.openxmlformats.org/presentationml/2006/main">
   <p:tag name="KSO_WM_UNIT_TEXT_FILL_FORE_SCHEMECOLOR_INDEX_BRIGHTNESS" val="0.15"/>
   <p:tag name="KSO_WM_DIAGRAM_MAX_ITEMCNT" val="5"/>
   <p:tag name="KSO_WM_DIAGRAM_MIN_ITEMCNT" val="2"/>
@@ -16485,8 +15849,8 @@
 </p:tagLst>
 </file>
 
-<file path=ppt/tags/tag149.xml><?xml version="1.0" encoding="utf-8"?>
-<p:tagLst xmlns:p="http://schemas.openxmlformats.org/presentationml/2006/main">
+<file path=ppt/tags/tag147.xml><?xml version="1.0" encoding="utf-8"?>
+<p:tagLst xmlns:a="http://schemas.openxmlformats.org/drawingml/2006/main" xmlns:r="http://schemas.openxmlformats.org/officeDocument/2006/relationships" xmlns:p="http://schemas.openxmlformats.org/presentationml/2006/main">
   <p:tag name="KSO_WM_DIAGRAM_MAX_ITEMCNT" val="5"/>
   <p:tag name="KSO_WM_DIAGRAM_MIN_ITEMCNT" val="2"/>
   <p:tag name="KSO_WM_DIAGRAM_VIRTUALLY_FRAME" val="{&quot;height&quot;:319.8249969482422,&quot;left&quot;:36.82503937007873,&quot;top&quot;:147.07500305175782,&quot;width&quot;:402.47496062992127}"/>
@@ -16517,24 +15881,8 @@
 </p:tagLst>
 </file>
 
-<file path=ppt/tags/tag15.xml><?xml version="1.0" encoding="utf-8"?>
-<p:tagLst xmlns:p="http://schemas.openxmlformats.org/presentationml/2006/main">
-  <p:tag name="KSO_WM_UNIT_HIGHLIGHT" val="0"/>
-  <p:tag name="KSO_WM_UNIT_COMPATIBLE" val="0"/>
-  <p:tag name="KSO_WM_UNIT_DIAGRAM_ISNUMVISUAL" val="0"/>
-  <p:tag name="KSO_WM_UNIT_DIAGRAM_ISREFERUNIT" val="0"/>
-  <p:tag name="KSO_WM_UNIT_CONTENT_GROUP_TYPE" val="titlestyle"/>
-  <p:tag name="KSO_WM_UNIT_TYPE" val="i"/>
-  <p:tag name="KSO_WM_UNIT_INDEX" val="2"/>
-  <p:tag name="KSO_WM_UNIT_ID" val="_2*i*2"/>
-  <p:tag name="KSO_WM_UNIT_LAYERLEVEL" val="1"/>
-  <p:tag name="KSO_WM_TAG_VERSION" val="3.0"/>
-  <p:tag name="KSO_WM_BEAUTIFY_FLAG" val="#wm#"/>
-</p:tagLst>
-</file>
-
-<file path=ppt/tags/tag150.xml><?xml version="1.0" encoding="utf-8"?>
-<p:tagLst xmlns:p="http://schemas.openxmlformats.org/presentationml/2006/main">
+<file path=ppt/tags/tag148.xml><?xml version="1.0" encoding="utf-8"?>
+<p:tagLst xmlns:a="http://schemas.openxmlformats.org/drawingml/2006/main" xmlns:r="http://schemas.openxmlformats.org/officeDocument/2006/relationships" xmlns:p="http://schemas.openxmlformats.org/presentationml/2006/main">
   <p:tag name="KSO_WM_DIAGRAM_MAX_ITEMCNT" val="5"/>
   <p:tag name="KSO_WM_DIAGRAM_MIN_ITEMCNT" val="2"/>
   <p:tag name="KSO_WM_DIAGRAM_VIRTUALLY_FRAME" val="{&quot;height&quot;:319.8249969482422,&quot;left&quot;:36.82503937007873,&quot;top&quot;:147.07500305175782,&quot;width&quot;:402.47496062992127}"/>
@@ -16566,32 +15914,47 @@
 </p:tagLst>
 </file>
 
-<file path=ppt/tags/tag151.xml><?xml version="1.0" encoding="utf-8"?>
-<p:tagLst xmlns:p="http://schemas.openxmlformats.org/presentationml/2006/main">
+<file path=ppt/tags/tag149.xml><?xml version="1.0" encoding="utf-8"?>
+<p:tagLst xmlns:a="http://schemas.openxmlformats.org/drawingml/2006/main" xmlns:r="http://schemas.openxmlformats.org/officeDocument/2006/relationships" xmlns:p="http://schemas.openxmlformats.org/presentationml/2006/main">
   <p:tag name="KSO_WM_TEMPLATE_MASTER_TYPE" val="0"/>
   <p:tag name="KSO_WM_TEMPLATE_COLOR_TYPE" val="0"/>
   <p:tag name="KSO_WM_BEAUTIFY_FLAG" val="#wm#"/>
   <p:tag name="KSO_WM_TEMPLATE_CATEGORY" val="custom"/>
   <p:tag name="KSO_WM_SLIDE_TYPE" val="text"/>
   <p:tag name="KSO_WM_SLIDE_SUBTYPE" val="picTxt"/>
-  <p:tag name="KSO_WM_SLIDE_SIZE" val="362.75*317.05"/>
-  <p:tag name="KSO_WM_SLIDE_POSITION" val="52.7*161.5"/>
+  <p:tag name="KSO_WM_SLIDE_SIZE" val="413.271*363.279"/>
+  <p:tag name="KSO_WM_SLIDE_POSITION" val="54.7646*136.56"/>
   <p:tag name="KSO_WM_SLIDE_LAYOUT" val="a_d_l"/>
   <p:tag name="KSO_WM_SLIDE_LAYOUT_CNT" val="1_1_1"/>
   <p:tag name="KSO_WM_SPECIAL_SOURCE" val="bdnull"/>
   <p:tag name="KSO_WM_DIAGRAM_GROUP_CODE" val="l1-1"/>
   <p:tag name="KSO_WM_SLIDE_DIAGTYPE" val="l"/>
-  <p:tag name="KSO_WM_TEMPLATE_INDEX" val="20238264"/>
+  <p:tag name="KSO_WM_TEMPLATE_INDEX" val="20238255"/>
   <p:tag name="KSO_WM_TEMPLATE_SUBCATEGORY" val="0"/>
   <p:tag name="KSO_WM_SLIDE_INDEX" val="1"/>
   <p:tag name="KSO_WM_TAG_VERSION" val="3.0"/>
-  <p:tag name="KSO_WM_SLIDE_ID" val="custom20238264_1"/>
+  <p:tag name="KSO_WM_SLIDE_ID" val="custom20238255_1"/>
   <p:tag name="KSO_WM_SLIDE_ITEM_CNT" val="3"/>
 </p:tagLst>
 </file>
 
-<file path=ppt/tags/tag152.xml><?xml version="1.0" encoding="utf-8"?>
-<p:tagLst xmlns:p="http://schemas.openxmlformats.org/presentationml/2006/main">
+<file path=ppt/tags/tag15.xml><?xml version="1.0" encoding="utf-8"?>
+<p:tagLst xmlns:a="http://schemas.openxmlformats.org/drawingml/2006/main" xmlns:r="http://schemas.openxmlformats.org/officeDocument/2006/relationships" xmlns:p="http://schemas.openxmlformats.org/presentationml/2006/main">
+  <p:tag name="KSO_WM_UNIT_HIGHLIGHT" val="0"/>
+  <p:tag name="KSO_WM_UNIT_COMPATIBLE" val="0"/>
+  <p:tag name="KSO_WM_UNIT_DIAGRAM_ISNUMVISUAL" val="0"/>
+  <p:tag name="KSO_WM_UNIT_DIAGRAM_ISREFERUNIT" val="0"/>
+  <p:tag name="KSO_WM_UNIT_TYPE" val="i"/>
+  <p:tag name="KSO_WM_UNIT_INDEX" val="5"/>
+  <p:tag name="KSO_WM_UNIT_ID" val="_1*i*5"/>
+  <p:tag name="KSO_WM_UNIT_LAYERLEVEL" val="1"/>
+  <p:tag name="KSO_WM_TAG_VERSION" val="3.0"/>
+  <p:tag name="KSO_WM_BEAUTIFY_FLAG" val="#wm#"/>
+</p:tagLst>
+</file>
+
+<file path=ppt/tags/tag150.xml><?xml version="1.0" encoding="utf-8"?>
+<p:tagLst xmlns:a="http://schemas.openxmlformats.org/drawingml/2006/main" xmlns:r="http://schemas.openxmlformats.org/officeDocument/2006/relationships" xmlns:p="http://schemas.openxmlformats.org/presentationml/2006/main">
   <p:tag name="KSO_WM_UNIT_ISCONTENTSTITLE" val="0"/>
   <p:tag name="KSO_WM_UNIT_ISNUMDGMTITLE" val="0"/>
   <p:tag name="KSO_WM_UNIT_NOCLEAR" val="0"/>
@@ -16616,30 +15979,8 @@
 </p:tagLst>
 </file>
 
-<file path=ppt/tags/tag153.xml><?xml version="1.0" encoding="utf-8"?>
-<p:tagLst xmlns:p="http://schemas.openxmlformats.org/presentationml/2006/main">
-  <p:tag name="KSO_WM_UNIT_VALUE" val="1904*1309"/>
-  <p:tag name="KSO_WM_UNIT_HIGHLIGHT" val="0"/>
-  <p:tag name="KSO_WM_UNIT_COMPATIBLE" val="0"/>
-  <p:tag name="KSO_WM_UNIT_DIAGRAM_ISNUMVISUAL" val="0"/>
-  <p:tag name="KSO_WM_UNIT_DIAGRAM_ISREFERUNIT" val="0"/>
-  <p:tag name="KSO_WM_UNIT_TYPE" val="d"/>
-  <p:tag name="KSO_WM_UNIT_INDEX" val="1"/>
-  <p:tag name="KSO_WM_UNIT_ID" val="custom20238255_1*d*1"/>
-  <p:tag name="KSO_WM_TEMPLATE_CATEGORY" val="custom"/>
-  <p:tag name="KSO_WM_TEMPLATE_INDEX" val="20238255"/>
-  <p:tag name="KSO_WM_UNIT_LAYERLEVEL" val="1"/>
-  <p:tag name="KSO_WM_TAG_VERSION" val="3.0"/>
-  <p:tag name="KSO_WM_BEAUTIFY_FLAG" val="#wm#"/>
-  <p:tag name="KSO_WM_DIAGRAM_GROUP_CODE" val="l1-1"/>
-  <p:tag name="KSO_WM_UNIT_LINE_FORE_SCHEMECOLOR_INDEX" val="13"/>
-  <p:tag name="KSO_WM_UNIT_LINE_FILL_TYPE" val="2"/>
-  <p:tag name="KSO_WM_UNIT_USESOURCEFORMAT_APPLY" val="1"/>
-</p:tagLst>
-</file>
-
-<file path=ppt/tags/tag154.xml><?xml version="1.0" encoding="utf-8"?>
-<p:tagLst xmlns:p="http://schemas.openxmlformats.org/presentationml/2006/main">
+<file path=ppt/tags/tag151.xml><?xml version="1.0" encoding="utf-8"?>
+<p:tagLst xmlns:a="http://schemas.openxmlformats.org/drawingml/2006/main" xmlns:r="http://schemas.openxmlformats.org/officeDocument/2006/relationships" xmlns:p="http://schemas.openxmlformats.org/presentationml/2006/main">
   <p:tag name="KSO_WM_UNIT_TEXT_FILL_FORE_SCHEMECOLOR_INDEX_BRIGHTNESS" val="0.15"/>
   <p:tag name="KSO_WM_DIAGRAM_MAX_ITEMCNT" val="4"/>
   <p:tag name="KSO_WM_DIAGRAM_MIN_ITEMCNT" val="2"/>
@@ -16671,8 +16012,8 @@
 </p:tagLst>
 </file>
 
-<file path=ppt/tags/tag155.xml><?xml version="1.0" encoding="utf-8"?>
-<p:tagLst xmlns:p="http://schemas.openxmlformats.org/presentationml/2006/main">
+<file path=ppt/tags/tag152.xml><?xml version="1.0" encoding="utf-8"?>
+<p:tagLst xmlns:a="http://schemas.openxmlformats.org/drawingml/2006/main" xmlns:r="http://schemas.openxmlformats.org/officeDocument/2006/relationships" xmlns:p="http://schemas.openxmlformats.org/presentationml/2006/main">
   <p:tag name="KSO_WM_UNIT_TEXT_FILL_FORE_SCHEMECOLOR_INDEX_BRIGHTNESS" val="0.15"/>
   <p:tag name="KSO_WM_DIAGRAM_MAX_ITEMCNT" val="4"/>
   <p:tag name="KSO_WM_DIAGRAM_MIN_ITEMCNT" val="2"/>
@@ -16705,8 +16046,8 @@
 </p:tagLst>
 </file>
 
-<file path=ppt/tags/tag156.xml><?xml version="1.0" encoding="utf-8"?>
-<p:tagLst xmlns:p="http://schemas.openxmlformats.org/presentationml/2006/main">
+<file path=ppt/tags/tag153.xml><?xml version="1.0" encoding="utf-8"?>
+<p:tagLst xmlns:a="http://schemas.openxmlformats.org/drawingml/2006/main" xmlns:r="http://schemas.openxmlformats.org/officeDocument/2006/relationships" xmlns:p="http://schemas.openxmlformats.org/presentationml/2006/main">
   <p:tag name="KSO_WM_UNIT_TEXT_FILL_FORE_SCHEMECOLOR_INDEX_BRIGHTNESS" val="0.15"/>
   <p:tag name="KSO_WM_DIAGRAM_MAX_ITEMCNT" val="4"/>
   <p:tag name="KSO_WM_DIAGRAM_MIN_ITEMCNT" val="2"/>
@@ -16739,8 +16080,8 @@
 </p:tagLst>
 </file>
 
-<file path=ppt/tags/tag157.xml><?xml version="1.0" encoding="utf-8"?>
-<p:tagLst xmlns:p="http://schemas.openxmlformats.org/presentationml/2006/main">
+<file path=ppt/tags/tag154.xml><?xml version="1.0" encoding="utf-8"?>
+<p:tagLst xmlns:a="http://schemas.openxmlformats.org/drawingml/2006/main" xmlns:r="http://schemas.openxmlformats.org/officeDocument/2006/relationships" xmlns:p="http://schemas.openxmlformats.org/presentationml/2006/main">
   <p:tag name="KSO_WM_UNIT_TEXT_FILL_FORE_SCHEMECOLOR_INDEX_BRIGHTNESS" val="0.15"/>
   <p:tag name="KSO_WM_DIAGRAM_MAX_ITEMCNT" val="4"/>
   <p:tag name="KSO_WM_DIAGRAM_MIN_ITEMCNT" val="2"/>
@@ -16772,8 +16113,8 @@
 </p:tagLst>
 </file>
 
-<file path=ppt/tags/tag158.xml><?xml version="1.0" encoding="utf-8"?>
-<p:tagLst xmlns:p="http://schemas.openxmlformats.org/presentationml/2006/main">
+<file path=ppt/tags/tag155.xml><?xml version="1.0" encoding="utf-8"?>
+<p:tagLst xmlns:a="http://schemas.openxmlformats.org/drawingml/2006/main" xmlns:r="http://schemas.openxmlformats.org/officeDocument/2006/relationships" xmlns:p="http://schemas.openxmlformats.org/presentationml/2006/main">
   <p:tag name="KSO_WM_UNIT_TEXT_FILL_FORE_SCHEMECOLOR_INDEX_BRIGHTNESS" val="0.15"/>
   <p:tag name="KSO_WM_DIAGRAM_MAX_ITEMCNT" val="4"/>
   <p:tag name="KSO_WM_DIAGRAM_MIN_ITEMCNT" val="2"/>
@@ -16806,8 +16147,8 @@
 </p:tagLst>
 </file>
 
-<file path=ppt/tags/tag159.xml><?xml version="1.0" encoding="utf-8"?>
-<p:tagLst xmlns:p="http://schemas.openxmlformats.org/presentationml/2006/main">
+<file path=ppt/tags/tag156.xml><?xml version="1.0" encoding="utf-8"?>
+<p:tagLst xmlns:a="http://schemas.openxmlformats.org/drawingml/2006/main" xmlns:r="http://schemas.openxmlformats.org/officeDocument/2006/relationships" xmlns:p="http://schemas.openxmlformats.org/presentationml/2006/main">
   <p:tag name="KSO_WM_UNIT_TEXT_FILL_FORE_SCHEMECOLOR_INDEX_BRIGHTNESS" val="0.15"/>
   <p:tag name="KSO_WM_DIAGRAM_MAX_ITEMCNT" val="4"/>
   <p:tag name="KSO_WM_DIAGRAM_MIN_ITEMCNT" val="2"/>
@@ -16840,24 +16181,8 @@
 </p:tagLst>
 </file>
 
-<file path=ppt/tags/tag16.xml><?xml version="1.0" encoding="utf-8"?>
-<p:tagLst xmlns:p="http://schemas.openxmlformats.org/presentationml/2006/main">
-  <p:tag name="KSO_WM_UNIT_HIGHLIGHT" val="0"/>
-  <p:tag name="KSO_WM_UNIT_COMPATIBLE" val="0"/>
-  <p:tag name="KSO_WM_UNIT_DIAGRAM_ISNUMVISUAL" val="0"/>
-  <p:tag name="KSO_WM_UNIT_DIAGRAM_ISREFERUNIT" val="0"/>
-  <p:tag name="KSO_WM_UNIT_CONTENT_GROUP_TYPE" val="titlestyle"/>
-  <p:tag name="KSO_WM_UNIT_TYPE" val="i"/>
-  <p:tag name="KSO_WM_UNIT_INDEX" val="3"/>
-  <p:tag name="KSO_WM_UNIT_ID" val="_2*i*3"/>
-  <p:tag name="KSO_WM_UNIT_LAYERLEVEL" val="1"/>
-  <p:tag name="KSO_WM_TAG_VERSION" val="3.0"/>
-  <p:tag name="KSO_WM_BEAUTIFY_FLAG" val="#wm#"/>
-</p:tagLst>
-</file>
-
-<file path=ppt/tags/tag160.xml><?xml version="1.0" encoding="utf-8"?>
-<p:tagLst xmlns:p="http://schemas.openxmlformats.org/presentationml/2006/main">
+<file path=ppt/tags/tag157.xml><?xml version="1.0" encoding="utf-8"?>
+<p:tagLst xmlns:a="http://schemas.openxmlformats.org/drawingml/2006/main" xmlns:r="http://schemas.openxmlformats.org/officeDocument/2006/relationships" xmlns:p="http://schemas.openxmlformats.org/presentationml/2006/main">
   <p:tag name="KSO_WM_UNIT_TEXT_FILL_FORE_SCHEMECOLOR_INDEX_BRIGHTNESS" val="0.15"/>
   <p:tag name="KSO_WM_DIAGRAM_MAX_ITEMCNT" val="4"/>
   <p:tag name="KSO_WM_DIAGRAM_MIN_ITEMCNT" val="2"/>
@@ -16889,8 +16214,8 @@
 </p:tagLst>
 </file>
 
-<file path=ppt/tags/tag161.xml><?xml version="1.0" encoding="utf-8"?>
-<p:tagLst xmlns:p="http://schemas.openxmlformats.org/presentationml/2006/main">
+<file path=ppt/tags/tag158.xml><?xml version="1.0" encoding="utf-8"?>
+<p:tagLst xmlns:a="http://schemas.openxmlformats.org/drawingml/2006/main" xmlns:r="http://schemas.openxmlformats.org/officeDocument/2006/relationships" xmlns:p="http://schemas.openxmlformats.org/presentationml/2006/main">
   <p:tag name="KSO_WM_UNIT_TEXT_FILL_FORE_SCHEMECOLOR_INDEX_BRIGHTNESS" val="0.15"/>
   <p:tag name="KSO_WM_DIAGRAM_MAX_ITEMCNT" val="4"/>
   <p:tag name="KSO_WM_DIAGRAM_MIN_ITEMCNT" val="2"/>
@@ -16923,8 +16248,8 @@
 </p:tagLst>
 </file>
 
-<file path=ppt/tags/tag162.xml><?xml version="1.0" encoding="utf-8"?>
-<p:tagLst xmlns:p="http://schemas.openxmlformats.org/presentationml/2006/main">
+<file path=ppt/tags/tag159.xml><?xml version="1.0" encoding="utf-8"?>
+<p:tagLst xmlns:a="http://schemas.openxmlformats.org/drawingml/2006/main" xmlns:r="http://schemas.openxmlformats.org/officeDocument/2006/relationships" xmlns:p="http://schemas.openxmlformats.org/presentationml/2006/main">
   <p:tag name="KSO_WM_UNIT_TEXT_FILL_FORE_SCHEMECOLOR_INDEX_BRIGHTNESS" val="0.15"/>
   <p:tag name="KSO_WM_DIAGRAM_MAX_ITEMCNT" val="4"/>
   <p:tag name="KSO_WM_DIAGRAM_MIN_ITEMCNT" val="2"/>
@@ -16957,32 +16282,45 @@
 </p:tagLst>
 </file>
 
-<file path=ppt/tags/tag163.xml><?xml version="1.0" encoding="utf-8"?>
-<p:tagLst xmlns:p="http://schemas.openxmlformats.org/presentationml/2006/main">
+<file path=ppt/tags/tag16.xml><?xml version="1.0" encoding="utf-8"?>
+<p:tagLst xmlns:a="http://schemas.openxmlformats.org/drawingml/2006/main" xmlns:r="http://schemas.openxmlformats.org/officeDocument/2006/relationships" xmlns:p="http://schemas.openxmlformats.org/presentationml/2006/main">
+  <p:tag name="KSO_WM_UNIT_HIGHLIGHT" val="0"/>
+  <p:tag name="KSO_WM_UNIT_COMPATIBLE" val="0"/>
+  <p:tag name="KSO_WM_UNIT_DIAGRAM_ISNUMVISUAL" val="0"/>
+  <p:tag name="KSO_WM_UNIT_DIAGRAM_ISREFERUNIT" val="0"/>
+  <p:tag name="KSO_WM_UNIT_TYPE" val="i"/>
+  <p:tag name="KSO_WM_UNIT_INDEX" val="6"/>
+  <p:tag name="KSO_WM_UNIT_ID" val="_1*i*6"/>
+  <p:tag name="KSO_WM_UNIT_LAYERLEVEL" val="1"/>
+  <p:tag name="KSO_WM_TAG_VERSION" val="3.0"/>
+  <p:tag name="KSO_WM_BEAUTIFY_FLAG" val="#wm#"/>
+</p:tagLst>
+</file>
+
+<file path=ppt/tags/tag160.xml><?xml version="1.0" encoding="utf-8"?>
+<p:tagLst xmlns:a="http://schemas.openxmlformats.org/drawingml/2006/main" xmlns:r="http://schemas.openxmlformats.org/officeDocument/2006/relationships" xmlns:p="http://schemas.openxmlformats.org/presentationml/2006/main">
+  <p:tag name="KSO_WM_TEMPLATE_THUMBS_INDEX" val="1、9"/>
+  <p:tag name="KSO_WM_SLIDE_CONTENT_AREA" val="{&quot;left&quot;:&quot;81.45&quot;,&quot;top&quot;:&quot;106.8&quot;,&quot;width&quot;:&quot;739.1&quot;,&quot;height&quot;:&quot;290.25&quot;}"/>
+  <p:tag name="KSO_WM_SPECIAL_SOURCE" val="bdnull"/>
+  <p:tag name="KSO_WM_SLIDE_ID" val="custom20233430_1"/>
+  <p:tag name="KSO_WM_TEMPLATE_SUBCATEGORY" val="29"/>
   <p:tag name="KSO_WM_TEMPLATE_MASTER_TYPE" val="0"/>
   <p:tag name="KSO_WM_TEMPLATE_COLOR_TYPE" val="0"/>
+  <p:tag name="KSO_WM_SLIDE_TYPE" val="title"/>
+  <p:tag name="KSO_WM_SLIDE_SUBTYPE" val="pureTxt"/>
+  <p:tag name="KSO_WM_SLIDE_ITEM_CNT" val="0"/>
+  <p:tag name="KSO_WM_SLIDE_INDEX" val="1"/>
+  <p:tag name="KSO_WM_TAG_VERSION" val="3.0"/>
   <p:tag name="KSO_WM_BEAUTIFY_FLAG" val="#wm#"/>
   <p:tag name="KSO_WM_TEMPLATE_CATEGORY" val="custom"/>
-  <p:tag name="KSO_WM_SLIDE_TYPE" val="text"/>
-  <p:tag name="KSO_WM_SLIDE_SUBTYPE" val="picTxt"/>
-  <p:tag name="KSO_WM_SLIDE_SIZE" val="413.271*363.279"/>
-  <p:tag name="KSO_WM_SLIDE_POSITION" val="54.7646*136.56"/>
-  <p:tag name="KSO_WM_SLIDE_LAYOUT" val="a_d_l"/>
+  <p:tag name="KSO_WM_TEMPLATE_INDEX" val="20233430"/>
+  <p:tag name="KSO_WM_SLIDE_LAYOUT" val="a_b_f"/>
   <p:tag name="KSO_WM_SLIDE_LAYOUT_CNT" val="1_1_1"/>
-  <p:tag name="KSO_WM_SPECIAL_SOURCE" val="bdnull"/>
-  <p:tag name="KSO_WM_DIAGRAM_GROUP_CODE" val="l1-1"/>
-  <p:tag name="KSO_WM_SLIDE_DIAGTYPE" val="l"/>
-  <p:tag name="KSO_WM_TEMPLATE_INDEX" val="20238255"/>
-  <p:tag name="KSO_WM_TEMPLATE_SUBCATEGORY" val="0"/>
-  <p:tag name="KSO_WM_SLIDE_INDEX" val="1"/>
-  <p:tag name="KSO_WM_TAG_VERSION" val="3.0"/>
-  <p:tag name="KSO_WM_SLIDE_ID" val="custom20238255_1"/>
-  <p:tag name="KSO_WM_SLIDE_ITEM_CNT" val="3"/>
 </p:tagLst>
 </file>
 
-<file path=ppt/tags/tag164.xml><?xml version="1.0" encoding="utf-8"?>
-<p:tagLst xmlns:p="http://schemas.openxmlformats.org/presentationml/2006/main">
+<file path=ppt/tags/tag161.xml><?xml version="1.0" encoding="utf-8"?>
+<p:tagLst xmlns:a="http://schemas.openxmlformats.org/drawingml/2006/main" xmlns:r="http://schemas.openxmlformats.org/officeDocument/2006/relationships" xmlns:p="http://schemas.openxmlformats.org/presentationml/2006/main">
   <p:tag name="KSO_WM_UNIT_SUBTYPE" val="b"/>
   <p:tag name="KSO_WM_UNIT_NOCLEAR" val="0"/>
   <p:tag name="KSO_WM_UNIT_VALUE" val="60"/>
@@ -17003,8 +16341,8 @@
 </p:tagLst>
 </file>
 
-<file path=ppt/tags/tag165.xml><?xml version="1.0" encoding="utf-8"?>
-<p:tagLst xmlns:p="http://schemas.openxmlformats.org/presentationml/2006/main">
+<file path=ppt/tags/tag162.xml><?xml version="1.0" encoding="utf-8"?>
+<p:tagLst xmlns:a="http://schemas.openxmlformats.org/drawingml/2006/main" xmlns:r="http://schemas.openxmlformats.org/officeDocument/2006/relationships" xmlns:p="http://schemas.openxmlformats.org/presentationml/2006/main">
   <p:tag name="KSO_WM_UNIT_ISCONTENTSTITLE" val="0"/>
   <p:tag name="KSO_WM_UNIT_ISNUMDGMTITLE" val="0"/>
   <p:tag name="KSO_WM_UNIT_NOCLEAR" val="0"/>
@@ -17026,8 +16364,8 @@
 </p:tagLst>
 </file>
 
-<file path=ppt/tags/tag166.xml><?xml version="1.0" encoding="utf-8"?>
-<p:tagLst xmlns:p="http://schemas.openxmlformats.org/presentationml/2006/main">
+<file path=ppt/tags/tag163.xml><?xml version="1.0" encoding="utf-8"?>
+<p:tagLst xmlns:a="http://schemas.openxmlformats.org/drawingml/2006/main" xmlns:r="http://schemas.openxmlformats.org/officeDocument/2006/relationships" xmlns:p="http://schemas.openxmlformats.org/presentationml/2006/main">
   <p:tag name="KSO_WM_UNIT_ISCONTENTSTITLE" val="0"/>
   <p:tag name="KSO_WM_UNIT_ISNUMDGMTITLE" val="0"/>
   <p:tag name="KSO_WM_UNIT_NOCLEAR" val="0"/>
@@ -17049,36 +16387,187 @@
 </p:tagLst>
 </file>
 
-<file path=ppt/tags/tag167.xml><?xml version="1.0" encoding="utf-8"?>
-<p:tagLst xmlns:p="http://schemas.openxmlformats.org/presentationml/2006/main">
-  <p:tag name="KSO_WM_TEMPLATE_THUMBS_INDEX" val="1、9"/>
-  <p:tag name="KSO_WM_SLIDE_CONTENT_AREA" val="{&quot;left&quot;:&quot;81.45&quot;,&quot;top&quot;:&quot;106.8&quot;,&quot;width&quot;:&quot;739.1&quot;,&quot;height&quot;:&quot;290.25&quot;}"/>
-  <p:tag name="KSO_WM_SPECIAL_SOURCE" val="bdnull"/>
-  <p:tag name="KSO_WM_SLIDE_ID" val="custom20233430_1"/>
-  <p:tag name="KSO_WM_TEMPLATE_SUBCATEGORY" val="29"/>
-  <p:tag name="KSO_WM_TEMPLATE_MASTER_TYPE" val="0"/>
-  <p:tag name="KSO_WM_TEMPLATE_COLOR_TYPE" val="0"/>
-  <p:tag name="KSO_WM_SLIDE_TYPE" val="title"/>
-  <p:tag name="KSO_WM_SLIDE_SUBTYPE" val="pureTxt"/>
-  <p:tag name="KSO_WM_SLIDE_ITEM_CNT" val="0"/>
-  <p:tag name="KSO_WM_SLIDE_INDEX" val="1"/>
+<file path=ppt/tags/tag17.xml><?xml version="1.0" encoding="utf-8"?>
+<p:tagLst xmlns:a="http://schemas.openxmlformats.org/drawingml/2006/main" xmlns:r="http://schemas.openxmlformats.org/officeDocument/2006/relationships" xmlns:p="http://schemas.openxmlformats.org/presentationml/2006/main">
+  <p:tag name="KSO_WM_UNIT_HIGHLIGHT" val="0"/>
+  <p:tag name="KSO_WM_UNIT_COMPATIBLE" val="0"/>
+  <p:tag name="KSO_WM_UNIT_DIAGRAM_ISNUMVISUAL" val="0"/>
+  <p:tag name="KSO_WM_UNIT_DIAGRAM_ISREFERUNIT" val="0"/>
+  <p:tag name="KSO_WM_UNIT_TYPE" val="i"/>
+  <p:tag name="KSO_WM_UNIT_INDEX" val="7"/>
+  <p:tag name="KSO_WM_UNIT_ID" val="_1*i*7"/>
+  <p:tag name="KSO_WM_UNIT_LAYERLEVEL" val="1"/>
   <p:tag name="KSO_WM_TAG_VERSION" val="3.0"/>
   <p:tag name="KSO_WM_BEAUTIFY_FLAG" val="#wm#"/>
-  <p:tag name="KSO_WM_TEMPLATE_CATEGORY" val="custom"/>
-  <p:tag name="KSO_WM_TEMPLATE_INDEX" val="20233430"/>
-  <p:tag name="KSO_WM_SLIDE_LAYOUT" val="a_b_f"/>
-  <p:tag name="KSO_WM_SLIDE_LAYOUT_CNT" val="1_1_1"/>
 </p:tagLst>
 </file>
 
-<file path=ppt/tags/tag168.xml><?xml version="1.0" encoding="utf-8"?>
-<p:tagLst xmlns:p="http://schemas.openxmlformats.org/presentationml/2006/main">
-  <p:tag name="KSO_WM_PRESENTATION_SOURCE" val="WPPAIGeneratePPT"/>
+<file path=ppt/tags/tag18.xml><?xml version="1.0" encoding="utf-8"?>
+<p:tagLst xmlns:a="http://schemas.openxmlformats.org/drawingml/2006/main" xmlns:r="http://schemas.openxmlformats.org/officeDocument/2006/relationships" xmlns:p="http://schemas.openxmlformats.org/presentationml/2006/main">
+  <p:tag name="KSO_WM_UNIT_HIGHLIGHT" val="0"/>
+  <p:tag name="KSO_WM_UNIT_COMPATIBLE" val="0"/>
+  <p:tag name="KSO_WM_UNIT_DIAGRAM_ISNUMVISUAL" val="0"/>
+  <p:tag name="KSO_WM_UNIT_DIAGRAM_ISREFERUNIT" val="0"/>
+  <p:tag name="KSO_WM_UNIT_TYPE" val="i"/>
+  <p:tag name="KSO_WM_UNIT_INDEX" val="8"/>
+  <p:tag name="KSO_WM_UNIT_ID" val="_1*i*8"/>
+  <p:tag name="KSO_WM_UNIT_LAYERLEVEL" val="1"/>
+  <p:tag name="KSO_WM_TAG_VERSION" val="3.0"/>
+  <p:tag name="KSO_WM_BEAUTIFY_FLAG" val="#wm#"/>
 </p:tagLst>
 </file>
 
-<file path=ppt/tags/tag17.xml><?xml version="1.0" encoding="utf-8"?>
-<p:tagLst xmlns:p="http://schemas.openxmlformats.org/presentationml/2006/main">
+<file path=ppt/tags/tag19.xml><?xml version="1.0" encoding="utf-8"?>
+<p:tagLst xmlns:a="http://schemas.openxmlformats.org/drawingml/2006/main" xmlns:r="http://schemas.openxmlformats.org/officeDocument/2006/relationships" xmlns:p="http://schemas.openxmlformats.org/presentationml/2006/main">
+  <p:tag name="KSO_WM_UNIT_SUBTYPE" val="b"/>
+  <p:tag name="KSO_WM_UNIT_PRESET_TEXT" val="汇报人：稻小壳"/>
+  <p:tag name="KSO_WM_UNIT_NOCLEAR" val="0"/>
+  <p:tag name="KSO_WM_UNIT_VALUE" val="60"/>
+  <p:tag name="KSO_WM_UNIT_HIGHLIGHT" val="0"/>
+  <p:tag name="KSO_WM_UNIT_COMPATIBLE" val="0"/>
+  <p:tag name="KSO_WM_UNIT_DIAGRAM_ISNUMVISUAL" val="0"/>
+  <p:tag name="KSO_WM_UNIT_DIAGRAM_ISREFERUNIT" val="0"/>
+  <p:tag name="KSO_WM_UNIT_CONTENT_GROUP_TYPE" val="contentchip"/>
+  <p:tag name="KSO_WM_UNIT_TYPE" val="f"/>
+  <p:tag name="KSO_WM_UNIT_INDEX" val="1"/>
+  <p:tag name="KSO_WM_UNIT_ID" val="_1*f*1"/>
+  <p:tag name="KSO_WM_UNIT_LAYERLEVEL" val="1"/>
+  <p:tag name="KSO_WM_TAG_VERSION" val="3.0"/>
+  <p:tag name="KSO_WM_BEAUTIFY_FLAG" val="#wm#"/>
+</p:tagLst>
+</file>
+
+<file path=ppt/tags/tag2.xml><?xml version="1.0" encoding="utf-8"?>
+<p:tagLst xmlns:a="http://schemas.openxmlformats.org/drawingml/2006/main" xmlns:r="http://schemas.openxmlformats.org/officeDocument/2006/relationships" xmlns:p="http://schemas.openxmlformats.org/presentationml/2006/main">
+  <p:tag name="KSO_WM_UNIT_HIGHLIGHT" val="0"/>
+  <p:tag name="KSO_WM_UNIT_COMPATIBLE" val="0"/>
+  <p:tag name="KSO_WM_UNIT_DIAGRAM_ISNUMVISUAL" val="0"/>
+  <p:tag name="KSO_WM_UNIT_DIAGRAM_ISREFERUNIT" val="0"/>
+  <p:tag name="KSO_WM_UNIT_CONTENT_GROUP_TYPE" val="titlestyle"/>
+  <p:tag name="KSO_WM_UNIT_TYPE" val="i"/>
+  <p:tag name="KSO_WM_UNIT_INDEX" val="1"/>
+  <p:tag name="KSO_WM_UNIT_ID" val="_0*i*1"/>
+  <p:tag name="KSO_WM_UNIT_LAYERLEVEL" val="1"/>
+  <p:tag name="KSO_WM_TAG_VERSION" val="3.0"/>
+  <p:tag name="KSO_WM_BEAUTIFY_FLAG" val="#wm#"/>
+</p:tagLst>
+</file>
+
+<file path=ppt/tags/tag20.xml><?xml version="1.0" encoding="utf-8"?>
+<p:tagLst xmlns:a="http://schemas.openxmlformats.org/drawingml/2006/main" xmlns:r="http://schemas.openxmlformats.org/officeDocument/2006/relationships" xmlns:p="http://schemas.openxmlformats.org/presentationml/2006/main">
+  <p:tag name="KSO_WM_UNIT_ISCONTENTSTITLE" val="0"/>
+  <p:tag name="KSO_WM_UNIT_ISNUMDGMTITLE" val="0"/>
+  <p:tag name="KSO_WM_UNIT_PRESET_TEXT" val="Click to add subtitle"/>
+  <p:tag name="KSO_WM_UNIT_NOCLEAR" val="0"/>
+  <p:tag name="KSO_WM_UNIT_VALUE" val="17"/>
+  <p:tag name="KSO_WM_UNIT_HIGHLIGHT" val="0"/>
+  <p:tag name="KSO_WM_UNIT_COMPATIBLE" val="0"/>
+  <p:tag name="KSO_WM_UNIT_DIAGRAM_ISNUMVISUAL" val="0"/>
+  <p:tag name="KSO_WM_UNIT_DIAGRAM_ISREFERUNIT" val="0"/>
+  <p:tag name="KSO_WM_UNIT_CONTENT_GROUP_TYPE" val="contentchip"/>
+  <p:tag name="KSO_WM_UNIT_TYPE" val="b"/>
+  <p:tag name="KSO_WM_UNIT_INDEX" val="1"/>
+  <p:tag name="KSO_WM_UNIT_ID" val="_1*b*1"/>
+  <p:tag name="KSO_WM_UNIT_LAYERLEVEL" val="1"/>
+  <p:tag name="KSO_WM_TAG_VERSION" val="3.0"/>
+  <p:tag name="KSO_WM_BEAUTIFY_FLAG" val="#wm#"/>
+</p:tagLst>
+</file>
+
+<file path=ppt/tags/tag21.xml><?xml version="1.0" encoding="utf-8"?>
+<p:tagLst xmlns:a="http://schemas.openxmlformats.org/drawingml/2006/main" xmlns:r="http://schemas.openxmlformats.org/officeDocument/2006/relationships" xmlns:p="http://schemas.openxmlformats.org/presentationml/2006/main">
+  <p:tag name="KSO_WM_UNIT_ISCONTENTSTITLE" val="0"/>
+  <p:tag name="KSO_WM_UNIT_ISNUMDGMTITLE" val="0"/>
+  <p:tag name="KSO_WM_UNIT_PRESET_TEXT" val="单击添加文档标题"/>
+  <p:tag name="KSO_WM_UNIT_NOCLEAR" val="0"/>
+  <p:tag name="KSO_WM_UNIT_VALUE" val="10"/>
+  <p:tag name="KSO_WM_UNIT_HIGHLIGHT" val="0"/>
+  <p:tag name="KSO_WM_UNIT_COMPATIBLE" val="0"/>
+  <p:tag name="KSO_WM_UNIT_DIAGRAM_ISNUMVISUAL" val="0"/>
+  <p:tag name="KSO_WM_UNIT_DIAGRAM_ISREFERUNIT" val="0"/>
+  <p:tag name="KSO_WM_UNIT_CONTENT_GROUP_TYPE" val="contentchip"/>
+  <p:tag name="KSO_WM_UNIT_TYPE" val="a"/>
+  <p:tag name="KSO_WM_UNIT_INDEX" val="1"/>
+  <p:tag name="KSO_WM_UNIT_ID" val="_1*a*1"/>
+  <p:tag name="KSO_WM_UNIT_LAYERLEVEL" val="1"/>
+  <p:tag name="KSO_WM_TAG_VERSION" val="3.0"/>
+  <p:tag name="KSO_WM_BEAUTIFY_FLAG" val="#wm#"/>
+</p:tagLst>
+</file>
+
+<file path=ppt/tags/tag22.xml><?xml version="1.0" encoding="utf-8"?>
+<p:tagLst xmlns:a="http://schemas.openxmlformats.org/drawingml/2006/main" xmlns:r="http://schemas.openxmlformats.org/officeDocument/2006/relationships" xmlns:p="http://schemas.openxmlformats.org/presentationml/2006/main">
+  <p:tag name="KSO_WM_UNIT_HIGHLIGHT" val="0"/>
+  <p:tag name="KSO_WM_UNIT_COMPATIBLE" val="0"/>
+  <p:tag name="KSO_WM_UNIT_DIAGRAM_ISNUMVISUAL" val="0"/>
+  <p:tag name="KSO_WM_UNIT_DIAGRAM_ISREFERUNIT" val="0"/>
+  <p:tag name="KSO_WM_UNIT_ID" val="_1**"/>
+  <p:tag name="KSO_WM_UNIT_LAYERLEVEL" val="1"/>
+  <p:tag name="KSO_WM_TAG_VERSION" val="3.0"/>
+  <p:tag name="KSO_WM_BEAUTIFY_FLAG" val="#wm#"/>
+</p:tagLst>
+</file>
+
+<file path=ppt/tags/tag23.xml><?xml version="1.0" encoding="utf-8"?>
+<p:tagLst xmlns:a="http://schemas.openxmlformats.org/drawingml/2006/main" xmlns:r="http://schemas.openxmlformats.org/officeDocument/2006/relationships" xmlns:p="http://schemas.openxmlformats.org/presentationml/2006/main">
+  <p:tag name="KSO_WM_UNIT_HIGHLIGHT" val="0"/>
+  <p:tag name="KSO_WM_UNIT_COMPATIBLE" val="0"/>
+  <p:tag name="KSO_WM_UNIT_DIAGRAM_ISNUMVISUAL" val="0"/>
+  <p:tag name="KSO_WM_UNIT_DIAGRAM_ISREFERUNIT" val="0"/>
+  <p:tag name="KSO_WM_UNIT_ID" val="_1**"/>
+  <p:tag name="KSO_WM_UNIT_LAYERLEVEL" val="1"/>
+  <p:tag name="KSO_WM_TAG_VERSION" val="3.0"/>
+  <p:tag name="KSO_WM_BEAUTIFY_FLAG" val="#wm#"/>
+</p:tagLst>
+</file>
+
+<file path=ppt/tags/tag24.xml><?xml version="1.0" encoding="utf-8"?>
+<p:tagLst xmlns:a="http://schemas.openxmlformats.org/drawingml/2006/main" xmlns:r="http://schemas.openxmlformats.org/officeDocument/2006/relationships" xmlns:p="http://schemas.openxmlformats.org/presentationml/2006/main">
+  <p:tag name="KSO_WM_UNIT_HIGHLIGHT" val="0"/>
+  <p:tag name="KSO_WM_UNIT_COMPATIBLE" val="0"/>
+  <p:tag name="KSO_WM_UNIT_DIAGRAM_ISNUMVISUAL" val="0"/>
+  <p:tag name="KSO_WM_UNIT_DIAGRAM_ISREFERUNIT" val="0"/>
+  <p:tag name="KSO_WM_UNIT_ID" val="_1**"/>
+  <p:tag name="KSO_WM_UNIT_LAYERLEVEL" val="1"/>
+  <p:tag name="KSO_WM_TAG_VERSION" val="3.0"/>
+  <p:tag name="KSO_WM_BEAUTIFY_FLAG" val="#wm#"/>
+</p:tagLst>
+</file>
+
+<file path=ppt/tags/tag25.xml><?xml version="1.0" encoding="utf-8"?>
+<p:tagLst xmlns:a="http://schemas.openxmlformats.org/drawingml/2006/main" xmlns:r="http://schemas.openxmlformats.org/officeDocument/2006/relationships" xmlns:p="http://schemas.openxmlformats.org/presentationml/2006/main">
+  <p:tag name="KSO_WM_UNIT_HIGHLIGHT" val="0"/>
+  <p:tag name="KSO_WM_UNIT_COMPATIBLE" val="0"/>
+  <p:tag name="KSO_WM_UNIT_DIAGRAM_ISNUMVISUAL" val="0"/>
+  <p:tag name="KSO_WM_UNIT_DIAGRAM_ISREFERUNIT" val="0"/>
+  <p:tag name="KSO_WM_UNIT_CONTENT_GROUP_TYPE" val="titlestyle"/>
+  <p:tag name="KSO_WM_UNIT_TYPE" val="i"/>
+  <p:tag name="KSO_WM_UNIT_INDEX" val="2"/>
+  <p:tag name="KSO_WM_UNIT_ID" val="_2*i*2"/>
+  <p:tag name="KSO_WM_UNIT_LAYERLEVEL" val="1"/>
+  <p:tag name="KSO_WM_TAG_VERSION" val="3.0"/>
+  <p:tag name="KSO_WM_BEAUTIFY_FLAG" val="#wm#"/>
+</p:tagLst>
+</file>
+
+<file path=ppt/tags/tag26.xml><?xml version="1.0" encoding="utf-8"?>
+<p:tagLst xmlns:a="http://schemas.openxmlformats.org/drawingml/2006/main" xmlns:r="http://schemas.openxmlformats.org/officeDocument/2006/relationships" xmlns:p="http://schemas.openxmlformats.org/presentationml/2006/main">
+  <p:tag name="KSO_WM_UNIT_HIGHLIGHT" val="0"/>
+  <p:tag name="KSO_WM_UNIT_COMPATIBLE" val="0"/>
+  <p:tag name="KSO_WM_UNIT_DIAGRAM_ISNUMVISUAL" val="0"/>
+  <p:tag name="KSO_WM_UNIT_DIAGRAM_ISREFERUNIT" val="0"/>
+  <p:tag name="KSO_WM_UNIT_CONTENT_GROUP_TYPE" val="titlestyle"/>
+  <p:tag name="KSO_WM_UNIT_TYPE" val="i"/>
+  <p:tag name="KSO_WM_UNIT_INDEX" val="3"/>
+  <p:tag name="KSO_WM_UNIT_ID" val="_2*i*3"/>
+  <p:tag name="KSO_WM_UNIT_LAYERLEVEL" val="1"/>
+  <p:tag name="KSO_WM_TAG_VERSION" val="3.0"/>
+  <p:tag name="KSO_WM_BEAUTIFY_FLAG" val="#wm#"/>
+</p:tagLst>
+</file>
+
+<file path=ppt/tags/tag27.xml><?xml version="1.0" encoding="utf-8"?>
+<p:tagLst xmlns:a="http://schemas.openxmlformats.org/drawingml/2006/main" xmlns:r="http://schemas.openxmlformats.org/officeDocument/2006/relationships" xmlns:p="http://schemas.openxmlformats.org/presentationml/2006/main">
   <p:tag name="KSO_WM_UNIT_HIGHLIGHT" val="0"/>
   <p:tag name="KSO_WM_UNIT_COMPATIBLE" val="0"/>
   <p:tag name="KSO_WM_UNIT_DIAGRAM_ISNUMVISUAL" val="0"/>
@@ -17093,8 +16582,8 @@
 </p:tagLst>
 </file>
 
-<file path=ppt/tags/tag18.xml><?xml version="1.0" encoding="utf-8"?>
-<p:tagLst xmlns:p="http://schemas.openxmlformats.org/presentationml/2006/main">
+<file path=ppt/tags/tag28.xml><?xml version="1.0" encoding="utf-8"?>
+<p:tagLst xmlns:a="http://schemas.openxmlformats.org/drawingml/2006/main" xmlns:r="http://schemas.openxmlformats.org/officeDocument/2006/relationships" xmlns:p="http://schemas.openxmlformats.org/presentationml/2006/main">
   <p:tag name="KSO_WM_UNIT_SUBTYPE" val="a"/>
   <p:tag name="KSO_WM_UNIT_PRESET_TEXT" val="单击此处编辑母版文本样式&#10;第二级&#10;第三级&#10;第四级&#10;第五级"/>
   <p:tag name="KSO_WM_UNIT_NOCLEAR" val="0"/>
@@ -17112,8 +16601,8 @@
 </p:tagLst>
 </file>
 
-<file path=ppt/tags/tag19.xml><?xml version="1.0" encoding="utf-8"?>
-<p:tagLst xmlns:p="http://schemas.openxmlformats.org/presentationml/2006/main">
+<file path=ppt/tags/tag29.xml><?xml version="1.0" encoding="utf-8"?>
+<p:tagLst xmlns:a="http://schemas.openxmlformats.org/drawingml/2006/main" xmlns:r="http://schemas.openxmlformats.org/officeDocument/2006/relationships" xmlns:p="http://schemas.openxmlformats.org/presentationml/2006/main">
   <p:tag name="KSO_WM_UNIT_ISCONTENTSTITLE" val="0"/>
   <p:tag name="KSO_WM_UNIT_ISNUMDGMTITLE" val="0"/>
   <p:tag name="KSO_WM_UNIT_PRESET_TEXT" val="单击此处添加标题"/>
@@ -17133,24 +16622,24 @@
 </p:tagLst>
 </file>
 
-<file path=ppt/tags/tag2.xml><?xml version="1.0" encoding="utf-8"?>
-<p:tagLst xmlns:p="http://schemas.openxmlformats.org/presentationml/2006/main">
+<file path=ppt/tags/tag3.xml><?xml version="1.0" encoding="utf-8"?>
+<p:tagLst xmlns:a="http://schemas.openxmlformats.org/drawingml/2006/main" xmlns:r="http://schemas.openxmlformats.org/officeDocument/2006/relationships" xmlns:p="http://schemas.openxmlformats.org/presentationml/2006/main">
   <p:tag name="KSO_WM_UNIT_HIGHLIGHT" val="0"/>
   <p:tag name="KSO_WM_UNIT_COMPATIBLE" val="0"/>
   <p:tag name="KSO_WM_UNIT_DIAGRAM_ISNUMVISUAL" val="0"/>
   <p:tag name="KSO_WM_UNIT_DIAGRAM_ISREFERUNIT" val="0"/>
-  <p:tag name="KSO_WM_UNIT_CONTENT_GROUP_TYPE" val="contentchip"/>
+  <p:tag name="KSO_WM_UNIT_CONTENT_GROUP_TYPE" val="titlestyle"/>
   <p:tag name="KSO_WM_UNIT_TYPE" val="i"/>
   <p:tag name="KSO_WM_UNIT_INDEX" val="2"/>
-  <p:tag name="KSO_WM_UNIT_ID" val="_1*i*2"/>
+  <p:tag name="KSO_WM_UNIT_ID" val="_0*i*2"/>
   <p:tag name="KSO_WM_UNIT_LAYERLEVEL" val="1"/>
   <p:tag name="KSO_WM_TAG_VERSION" val="3.0"/>
   <p:tag name="KSO_WM_BEAUTIFY_FLAG" val="#wm#"/>
 </p:tagLst>
 </file>
 
-<file path=ppt/tags/tag20.xml><?xml version="1.0" encoding="utf-8"?>
-<p:tagLst xmlns:p="http://schemas.openxmlformats.org/presentationml/2006/main">
+<file path=ppt/tags/tag30.xml><?xml version="1.0" encoding="utf-8"?>
+<p:tagLst xmlns:a="http://schemas.openxmlformats.org/drawingml/2006/main" xmlns:r="http://schemas.openxmlformats.org/officeDocument/2006/relationships" xmlns:p="http://schemas.openxmlformats.org/presentationml/2006/main">
   <p:tag name="KSO_WM_UNIT_HIGHLIGHT" val="0"/>
   <p:tag name="KSO_WM_UNIT_COMPATIBLE" val="0"/>
   <p:tag name="KSO_WM_UNIT_DIAGRAM_ISNUMVISUAL" val="0"/>
@@ -17162,8 +16651,8 @@
 </p:tagLst>
 </file>
 
-<file path=ppt/tags/tag21.xml><?xml version="1.0" encoding="utf-8"?>
-<p:tagLst xmlns:p="http://schemas.openxmlformats.org/presentationml/2006/main">
+<file path=ppt/tags/tag31.xml><?xml version="1.0" encoding="utf-8"?>
+<p:tagLst xmlns:a="http://schemas.openxmlformats.org/drawingml/2006/main" xmlns:r="http://schemas.openxmlformats.org/officeDocument/2006/relationships" xmlns:p="http://schemas.openxmlformats.org/presentationml/2006/main">
   <p:tag name="KSO_WM_UNIT_HIGHLIGHT" val="0"/>
   <p:tag name="KSO_WM_UNIT_COMPATIBLE" val="0"/>
   <p:tag name="KSO_WM_UNIT_DIAGRAM_ISNUMVISUAL" val="0"/>
@@ -17175,8 +16664,8 @@
 </p:tagLst>
 </file>
 
-<file path=ppt/tags/tag22.xml><?xml version="1.0" encoding="utf-8"?>
-<p:tagLst xmlns:p="http://schemas.openxmlformats.org/presentationml/2006/main">
+<file path=ppt/tags/tag32.xml><?xml version="1.0" encoding="utf-8"?>
+<p:tagLst xmlns:a="http://schemas.openxmlformats.org/drawingml/2006/main" xmlns:r="http://schemas.openxmlformats.org/officeDocument/2006/relationships" xmlns:p="http://schemas.openxmlformats.org/presentationml/2006/main">
   <p:tag name="KSO_WM_UNIT_HIGHLIGHT" val="0"/>
   <p:tag name="KSO_WM_UNIT_COMPATIBLE" val="0"/>
   <p:tag name="KSO_WM_UNIT_DIAGRAM_ISNUMVISUAL" val="0"/>
@@ -17188,8 +16677,8 @@
 </p:tagLst>
 </file>
 
-<file path=ppt/tags/tag23.xml><?xml version="1.0" encoding="utf-8"?>
-<p:tagLst xmlns:p="http://schemas.openxmlformats.org/presentationml/2006/main">
+<file path=ppt/tags/tag33.xml><?xml version="1.0" encoding="utf-8"?>
+<p:tagLst xmlns:a="http://schemas.openxmlformats.org/drawingml/2006/main" xmlns:r="http://schemas.openxmlformats.org/officeDocument/2006/relationships" xmlns:p="http://schemas.openxmlformats.org/presentationml/2006/main">
   <p:tag name="KSO_WM_UNIT_ISCONTENTSTITLE" val="1"/>
   <p:tag name="KSO_WM_UNIT_ISNUMDGMTITLE" val="0"/>
   <p:tag name="KSO_WM_UNIT_PRESET_TEXT" val="目录"/>
@@ -17208,8 +16697,8 @@
 </p:tagLst>
 </file>
 
-<file path=ppt/tags/tag24.xml><?xml version="1.0" encoding="utf-8"?>
-<p:tagLst xmlns:p="http://schemas.openxmlformats.org/presentationml/2006/main">
+<file path=ppt/tags/tag34.xml><?xml version="1.0" encoding="utf-8"?>
+<p:tagLst xmlns:a="http://schemas.openxmlformats.org/drawingml/2006/main" xmlns:r="http://schemas.openxmlformats.org/officeDocument/2006/relationships" xmlns:p="http://schemas.openxmlformats.org/presentationml/2006/main">
   <p:tag name="KSO_WM_UNIT_HIGHLIGHT" val="0"/>
   <p:tag name="KSO_WM_UNIT_COMPATIBLE" val="0"/>
   <p:tag name="KSO_WM_UNIT_DIAGRAM_ISNUMVISUAL" val="0"/>
@@ -17221,8 +16710,8 @@
 </p:tagLst>
 </file>
 
-<file path=ppt/tags/tag25.xml><?xml version="1.0" encoding="utf-8"?>
-<p:tagLst xmlns:p="http://schemas.openxmlformats.org/presentationml/2006/main">
+<file path=ppt/tags/tag35.xml><?xml version="1.0" encoding="utf-8"?>
+<p:tagLst xmlns:a="http://schemas.openxmlformats.org/drawingml/2006/main" xmlns:r="http://schemas.openxmlformats.org/officeDocument/2006/relationships" xmlns:p="http://schemas.openxmlformats.org/presentationml/2006/main">
   <p:tag name="KSO_WM_UNIT_HIGHLIGHT" val="0"/>
   <p:tag name="KSO_WM_UNIT_COMPATIBLE" val="0"/>
   <p:tag name="KSO_WM_UNIT_DIAGRAM_ISNUMVISUAL" val="0"/>
@@ -17234,8 +16723,8 @@
 </p:tagLst>
 </file>
 
-<file path=ppt/tags/tag26.xml><?xml version="1.0" encoding="utf-8"?>
-<p:tagLst xmlns:p="http://schemas.openxmlformats.org/presentationml/2006/main">
+<file path=ppt/tags/tag36.xml><?xml version="1.0" encoding="utf-8"?>
+<p:tagLst xmlns:a="http://schemas.openxmlformats.org/drawingml/2006/main" xmlns:r="http://schemas.openxmlformats.org/officeDocument/2006/relationships" xmlns:p="http://schemas.openxmlformats.org/presentationml/2006/main">
   <p:tag name="KSO_WM_UNIT_HIGHLIGHT" val="0"/>
   <p:tag name="KSO_WM_UNIT_COMPATIBLE" val="0"/>
   <p:tag name="KSO_WM_UNIT_DIAGRAM_ISNUMVISUAL" val="0"/>
@@ -17247,8 +16736,8 @@
 </p:tagLst>
 </file>
 
-<file path=ppt/tags/tag27.xml><?xml version="1.0" encoding="utf-8"?>
-<p:tagLst xmlns:p="http://schemas.openxmlformats.org/presentationml/2006/main">
+<file path=ppt/tags/tag37.xml><?xml version="1.0" encoding="utf-8"?>
+<p:tagLst xmlns:a="http://schemas.openxmlformats.org/drawingml/2006/main" xmlns:r="http://schemas.openxmlformats.org/officeDocument/2006/relationships" xmlns:p="http://schemas.openxmlformats.org/presentationml/2006/main">
   <p:tag name="KSO_WM_UNIT_HIGHLIGHT" val="0"/>
   <p:tag name="KSO_WM_UNIT_COMPATIBLE" val="0"/>
   <p:tag name="KSO_WM_UNIT_DIAGRAM_ISNUMVISUAL" val="0"/>
@@ -17263,8 +16752,8 @@
 </p:tagLst>
 </file>
 
-<file path=ppt/tags/tag28.xml><?xml version="1.0" encoding="utf-8"?>
-<p:tagLst xmlns:p="http://schemas.openxmlformats.org/presentationml/2006/main">
+<file path=ppt/tags/tag38.xml><?xml version="1.0" encoding="utf-8"?>
+<p:tagLst xmlns:a="http://schemas.openxmlformats.org/drawingml/2006/main" xmlns:r="http://schemas.openxmlformats.org/officeDocument/2006/relationships" xmlns:p="http://schemas.openxmlformats.org/presentationml/2006/main">
   <p:tag name="KSO_WM_UNIT_HIGHLIGHT" val="0"/>
   <p:tag name="KSO_WM_UNIT_COMPATIBLE" val="0"/>
   <p:tag name="KSO_WM_UNIT_DIAGRAM_ISNUMVISUAL" val="0"/>
@@ -17279,8 +16768,8 @@
 </p:tagLst>
 </file>
 
-<file path=ppt/tags/tag29.xml><?xml version="1.0" encoding="utf-8"?>
-<p:tagLst xmlns:p="http://schemas.openxmlformats.org/presentationml/2006/main">
+<file path=ppt/tags/tag39.xml><?xml version="1.0" encoding="utf-8"?>
+<p:tagLst xmlns:a="http://schemas.openxmlformats.org/drawingml/2006/main" xmlns:r="http://schemas.openxmlformats.org/officeDocument/2006/relationships" xmlns:p="http://schemas.openxmlformats.org/presentationml/2006/main">
   <p:tag name="KSO_WM_UNIT_HIGHLIGHT" val="0"/>
   <p:tag name="KSO_WM_UNIT_COMPATIBLE" val="0"/>
   <p:tag name="KSO_WM_UNIT_DIAGRAM_ISNUMVISUAL" val="0"/>
@@ -17295,24 +16784,24 @@
 </p:tagLst>
 </file>
 
-<file path=ppt/tags/tag3.xml><?xml version="1.0" encoding="utf-8"?>
-<p:tagLst xmlns:p="http://schemas.openxmlformats.org/presentationml/2006/main">
+<file path=ppt/tags/tag4.xml><?xml version="1.0" encoding="utf-8"?>
+<p:tagLst xmlns:a="http://schemas.openxmlformats.org/drawingml/2006/main" xmlns:r="http://schemas.openxmlformats.org/officeDocument/2006/relationships" xmlns:p="http://schemas.openxmlformats.org/presentationml/2006/main">
   <p:tag name="KSO_WM_UNIT_HIGHLIGHT" val="0"/>
   <p:tag name="KSO_WM_UNIT_COMPATIBLE" val="0"/>
   <p:tag name="KSO_WM_UNIT_DIAGRAM_ISNUMVISUAL" val="0"/>
   <p:tag name="KSO_WM_UNIT_DIAGRAM_ISREFERUNIT" val="0"/>
-  <p:tag name="KSO_WM_UNIT_CONTENT_GROUP_TYPE" val="contentchip"/>
+  <p:tag name="KSO_WM_UNIT_CONTENT_GROUP_TYPE" val="titlestyle"/>
   <p:tag name="KSO_WM_UNIT_TYPE" val="i"/>
   <p:tag name="KSO_WM_UNIT_INDEX" val="3"/>
-  <p:tag name="KSO_WM_UNIT_ID" val="_1*i*3"/>
+  <p:tag name="KSO_WM_UNIT_ID" val="_0*i*3"/>
   <p:tag name="KSO_WM_UNIT_LAYERLEVEL" val="1"/>
   <p:tag name="KSO_WM_TAG_VERSION" val="3.0"/>
   <p:tag name="KSO_WM_BEAUTIFY_FLAG" val="#wm#"/>
 </p:tagLst>
 </file>
 
-<file path=ppt/tags/tag30.xml><?xml version="1.0" encoding="utf-8"?>
-<p:tagLst xmlns:p="http://schemas.openxmlformats.org/presentationml/2006/main">
+<file path=ppt/tags/tag40.xml><?xml version="1.0" encoding="utf-8"?>
+<p:tagLst xmlns:a="http://schemas.openxmlformats.org/drawingml/2006/main" xmlns:r="http://schemas.openxmlformats.org/officeDocument/2006/relationships" xmlns:p="http://schemas.openxmlformats.org/presentationml/2006/main">
   <p:tag name="KSO_WM_UNIT_HIGHLIGHT" val="0"/>
   <p:tag name="KSO_WM_UNIT_COMPATIBLE" val="0"/>
   <p:tag name="KSO_WM_UNIT_DIAGRAM_ISNUMVISUAL" val="0"/>
@@ -17327,8 +16816,8 @@
 </p:tagLst>
 </file>
 
-<file path=ppt/tags/tag31.xml><?xml version="1.0" encoding="utf-8"?>
-<p:tagLst xmlns:p="http://schemas.openxmlformats.org/presentationml/2006/main">
+<file path=ppt/tags/tag41.xml><?xml version="1.0" encoding="utf-8"?>
+<p:tagLst xmlns:a="http://schemas.openxmlformats.org/drawingml/2006/main" xmlns:r="http://schemas.openxmlformats.org/officeDocument/2006/relationships" xmlns:p="http://schemas.openxmlformats.org/presentationml/2006/main">
   <p:tag name="KSO_WM_UNIT_HIGHLIGHT" val="0"/>
   <p:tag name="KSO_WM_UNIT_COMPATIBLE" val="0"/>
   <p:tag name="KSO_WM_UNIT_DIAGRAM_ISNUMVISUAL" val="0"/>
@@ -17342,8 +16831,8 @@
 </p:tagLst>
 </file>
 
-<file path=ppt/tags/tag32.xml><?xml version="1.0" encoding="utf-8"?>
-<p:tagLst xmlns:p="http://schemas.openxmlformats.org/presentationml/2006/main">
+<file path=ppt/tags/tag42.xml><?xml version="1.0" encoding="utf-8"?>
+<p:tagLst xmlns:a="http://schemas.openxmlformats.org/drawingml/2006/main" xmlns:r="http://schemas.openxmlformats.org/officeDocument/2006/relationships" xmlns:p="http://schemas.openxmlformats.org/presentationml/2006/main">
   <p:tag name="KSO_WM_UNIT_HIGHLIGHT" val="0"/>
   <p:tag name="KSO_WM_UNIT_COMPATIBLE" val="0"/>
   <p:tag name="KSO_WM_UNIT_DIAGRAM_ISNUMVISUAL" val="0"/>
@@ -17357,8 +16846,8 @@
 </p:tagLst>
 </file>
 
-<file path=ppt/tags/tag33.xml><?xml version="1.0" encoding="utf-8"?>
-<p:tagLst xmlns:p="http://schemas.openxmlformats.org/presentationml/2006/main">
+<file path=ppt/tags/tag43.xml><?xml version="1.0" encoding="utf-8"?>
+<p:tagLst xmlns:a="http://schemas.openxmlformats.org/drawingml/2006/main" xmlns:r="http://schemas.openxmlformats.org/officeDocument/2006/relationships" xmlns:p="http://schemas.openxmlformats.org/presentationml/2006/main">
   <p:tag name="KSO_WM_UNIT_HIGHLIGHT" val="0"/>
   <p:tag name="KSO_WM_UNIT_COMPATIBLE" val="0"/>
   <p:tag name="KSO_WM_UNIT_DIAGRAM_ISNUMVISUAL" val="0"/>
@@ -17372,8 +16861,8 @@
 </p:tagLst>
 </file>
 
-<file path=ppt/tags/tag34.xml><?xml version="1.0" encoding="utf-8"?>
-<p:tagLst xmlns:p="http://schemas.openxmlformats.org/presentationml/2006/main">
+<file path=ppt/tags/tag44.xml><?xml version="1.0" encoding="utf-8"?>
+<p:tagLst xmlns:a="http://schemas.openxmlformats.org/drawingml/2006/main" xmlns:r="http://schemas.openxmlformats.org/officeDocument/2006/relationships" xmlns:p="http://schemas.openxmlformats.org/presentationml/2006/main">
   <p:tag name="KSO_WM_UNIT_HIGHLIGHT" val="0"/>
   <p:tag name="KSO_WM_UNIT_COMPATIBLE" val="0"/>
   <p:tag name="KSO_WM_UNIT_DIAGRAM_ISNUMVISUAL" val="0"/>
@@ -17387,8 +16876,8 @@
 </p:tagLst>
 </file>
 
-<file path=ppt/tags/tag35.xml><?xml version="1.0" encoding="utf-8"?>
-<p:tagLst xmlns:p="http://schemas.openxmlformats.org/presentationml/2006/main">
+<file path=ppt/tags/tag45.xml><?xml version="1.0" encoding="utf-8"?>
+<p:tagLst xmlns:a="http://schemas.openxmlformats.org/drawingml/2006/main" xmlns:r="http://schemas.openxmlformats.org/officeDocument/2006/relationships" xmlns:p="http://schemas.openxmlformats.org/presentationml/2006/main">
   <p:tag name="KSO_WM_UNIT_PRESET_TEXT" val="PART ONE"/>
   <p:tag name="KSO_WM_UNIT_NOCLEAR" val="0"/>
   <p:tag name="KSO_WM_UNIT_VALUE" val="6"/>
@@ -17406,8 +16895,8 @@
 </p:tagLst>
 </file>
 
-<file path=ppt/tags/tag36.xml><?xml version="1.0" encoding="utf-8"?>
-<p:tagLst xmlns:p="http://schemas.openxmlformats.org/presentationml/2006/main">
+<file path=ppt/tags/tag46.xml><?xml version="1.0" encoding="utf-8"?>
+<p:tagLst xmlns:a="http://schemas.openxmlformats.org/drawingml/2006/main" xmlns:r="http://schemas.openxmlformats.org/officeDocument/2006/relationships" xmlns:p="http://schemas.openxmlformats.org/presentationml/2006/main">
   <p:tag name="KSO_WM_UNIT_ISCONTENTSTITLE" val="0"/>
   <p:tag name="KSO_WM_UNIT_ISNUMDGMTITLE" val="0"/>
   <p:tag name="KSO_WM_UNIT_PRESET_TEXT" val="添加章节标题"/>
@@ -17427,8 +16916,8 @@
 </p:tagLst>
 </file>
 
-<file path=ppt/tags/tag37.xml><?xml version="1.0" encoding="utf-8"?>
-<p:tagLst xmlns:p="http://schemas.openxmlformats.org/presentationml/2006/main">
+<file path=ppt/tags/tag47.xml><?xml version="1.0" encoding="utf-8"?>
+<p:tagLst xmlns:a="http://schemas.openxmlformats.org/drawingml/2006/main" xmlns:r="http://schemas.openxmlformats.org/officeDocument/2006/relationships" xmlns:p="http://schemas.openxmlformats.org/presentationml/2006/main">
   <p:tag name="KSO_WM_UNIT_HIGHLIGHT" val="0"/>
   <p:tag name="KSO_WM_UNIT_COMPATIBLE" val="0"/>
   <p:tag name="KSO_WM_UNIT_DIAGRAM_ISNUMVISUAL" val="0"/>
@@ -17440,8 +16929,8 @@
 </p:tagLst>
 </file>
 
-<file path=ppt/tags/tag38.xml><?xml version="1.0" encoding="utf-8"?>
-<p:tagLst xmlns:p="http://schemas.openxmlformats.org/presentationml/2006/main">
+<file path=ppt/tags/tag48.xml><?xml version="1.0" encoding="utf-8"?>
+<p:tagLst xmlns:a="http://schemas.openxmlformats.org/drawingml/2006/main" xmlns:r="http://schemas.openxmlformats.org/officeDocument/2006/relationships" xmlns:p="http://schemas.openxmlformats.org/presentationml/2006/main">
   <p:tag name="KSO_WM_UNIT_HIGHLIGHT" val="0"/>
   <p:tag name="KSO_WM_UNIT_COMPATIBLE" val="0"/>
   <p:tag name="KSO_WM_UNIT_DIAGRAM_ISNUMVISUAL" val="0"/>
@@ -17453,8 +16942,8 @@
 </p:tagLst>
 </file>
 
-<file path=ppt/tags/tag39.xml><?xml version="1.0" encoding="utf-8"?>
-<p:tagLst xmlns:p="http://schemas.openxmlformats.org/presentationml/2006/main">
+<file path=ppt/tags/tag49.xml><?xml version="1.0" encoding="utf-8"?>
+<p:tagLst xmlns:a="http://schemas.openxmlformats.org/drawingml/2006/main" xmlns:r="http://schemas.openxmlformats.org/officeDocument/2006/relationships" xmlns:p="http://schemas.openxmlformats.org/presentationml/2006/main">
   <p:tag name="KSO_WM_UNIT_HIGHLIGHT" val="0"/>
   <p:tag name="KSO_WM_UNIT_COMPATIBLE" val="0"/>
   <p:tag name="KSO_WM_UNIT_DIAGRAM_ISNUMVISUAL" val="0"/>
@@ -17466,24 +16955,21 @@
 </p:tagLst>
 </file>
 
-<file path=ppt/tags/tag4.xml><?xml version="1.0" encoding="utf-8"?>
-<p:tagLst xmlns:p="http://schemas.openxmlformats.org/presentationml/2006/main">
+<file path=ppt/tags/tag5.xml><?xml version="1.0" encoding="utf-8"?>
+<p:tagLst xmlns:a="http://schemas.openxmlformats.org/drawingml/2006/main" xmlns:r="http://schemas.openxmlformats.org/officeDocument/2006/relationships" xmlns:p="http://schemas.openxmlformats.org/presentationml/2006/main">
   <p:tag name="KSO_WM_UNIT_HIGHLIGHT" val="0"/>
   <p:tag name="KSO_WM_UNIT_COMPATIBLE" val="0"/>
   <p:tag name="KSO_WM_UNIT_DIAGRAM_ISNUMVISUAL" val="0"/>
   <p:tag name="KSO_WM_UNIT_DIAGRAM_ISREFERUNIT" val="0"/>
-  <p:tag name="KSO_WM_UNIT_CONTENT_GROUP_TYPE" val="contentchip"/>
-  <p:tag name="KSO_WM_UNIT_TYPE" val="i"/>
-  <p:tag name="KSO_WM_UNIT_INDEX" val="4"/>
-  <p:tag name="KSO_WM_UNIT_ID" val="_1*i*4"/>
+  <p:tag name="KSO_WM_UNIT_ID" val="_0**"/>
   <p:tag name="KSO_WM_UNIT_LAYERLEVEL" val="1"/>
   <p:tag name="KSO_WM_TAG_VERSION" val="3.0"/>
   <p:tag name="KSO_WM_BEAUTIFY_FLAG" val="#wm#"/>
 </p:tagLst>
 </file>
 
-<file path=ppt/tags/tag40.xml><?xml version="1.0" encoding="utf-8"?>
-<p:tagLst xmlns:p="http://schemas.openxmlformats.org/presentationml/2006/main">
+<file path=ppt/tags/tag50.xml><?xml version="1.0" encoding="utf-8"?>
+<p:tagLst xmlns:a="http://schemas.openxmlformats.org/drawingml/2006/main" xmlns:r="http://schemas.openxmlformats.org/officeDocument/2006/relationships" xmlns:p="http://schemas.openxmlformats.org/presentationml/2006/main">
   <p:tag name="KSO_WM_UNIT_HIGHLIGHT" val="0"/>
   <p:tag name="KSO_WM_UNIT_COMPATIBLE" val="0"/>
   <p:tag name="KSO_WM_UNIT_DIAGRAM_ISNUMVISUAL" val="0"/>
@@ -17498,8 +16984,8 @@
 </p:tagLst>
 </file>
 
-<file path=ppt/tags/tag41.xml><?xml version="1.0" encoding="utf-8"?>
-<p:tagLst xmlns:p="http://schemas.openxmlformats.org/presentationml/2006/main">
+<file path=ppt/tags/tag51.xml><?xml version="1.0" encoding="utf-8"?>
+<p:tagLst xmlns:a="http://schemas.openxmlformats.org/drawingml/2006/main" xmlns:r="http://schemas.openxmlformats.org/officeDocument/2006/relationships" xmlns:p="http://schemas.openxmlformats.org/presentationml/2006/main">
   <p:tag name="KSO_WM_UNIT_HIGHLIGHT" val="0"/>
   <p:tag name="KSO_WM_UNIT_COMPATIBLE" val="0"/>
   <p:tag name="KSO_WM_UNIT_DIAGRAM_ISNUMVISUAL" val="0"/>
@@ -17514,8 +17000,8 @@
 </p:tagLst>
 </file>
 
-<file path=ppt/tags/tag42.xml><?xml version="1.0" encoding="utf-8"?>
-<p:tagLst xmlns:p="http://schemas.openxmlformats.org/presentationml/2006/main">
+<file path=ppt/tags/tag52.xml><?xml version="1.0" encoding="utf-8"?>
+<p:tagLst xmlns:a="http://schemas.openxmlformats.org/drawingml/2006/main" xmlns:r="http://schemas.openxmlformats.org/officeDocument/2006/relationships" xmlns:p="http://schemas.openxmlformats.org/presentationml/2006/main">
   <p:tag name="KSO_WM_UNIT_HIGHLIGHT" val="0"/>
   <p:tag name="KSO_WM_UNIT_COMPATIBLE" val="0"/>
   <p:tag name="KSO_WM_UNIT_DIAGRAM_ISNUMVISUAL" val="0"/>
@@ -17530,8 +17016,8 @@
 </p:tagLst>
 </file>
 
-<file path=ppt/tags/tag43.xml><?xml version="1.0" encoding="utf-8"?>
-<p:tagLst xmlns:p="http://schemas.openxmlformats.org/presentationml/2006/main">
+<file path=ppt/tags/tag53.xml><?xml version="1.0" encoding="utf-8"?>
+<p:tagLst xmlns:a="http://schemas.openxmlformats.org/drawingml/2006/main" xmlns:r="http://schemas.openxmlformats.org/officeDocument/2006/relationships" xmlns:p="http://schemas.openxmlformats.org/presentationml/2006/main">
   <p:tag name="KSO_WM_UNIT_SUBTYPE" val="a"/>
   <p:tag name="KSO_WM_UNIT_PRESET_TEXT" val="单击此处编辑母版文本样式&#10;第二级&#10;第三级&#10;第四级&#10;第五级"/>
   <p:tag name="KSO_WM_UNIT_NOCLEAR" val="0"/>
@@ -17549,8 +17035,8 @@
 </p:tagLst>
 </file>
 
-<file path=ppt/tags/tag44.xml><?xml version="1.0" encoding="utf-8"?>
-<p:tagLst xmlns:p="http://schemas.openxmlformats.org/presentationml/2006/main">
+<file path=ppt/tags/tag54.xml><?xml version="1.0" encoding="utf-8"?>
+<p:tagLst xmlns:a="http://schemas.openxmlformats.org/drawingml/2006/main" xmlns:r="http://schemas.openxmlformats.org/officeDocument/2006/relationships" xmlns:p="http://schemas.openxmlformats.org/presentationml/2006/main">
   <p:tag name="KSO_WM_UNIT_SUBTYPE" val="a"/>
   <p:tag name="KSO_WM_UNIT_PRESET_TEXT" val="单击此处编辑母版文本样式&#10;第二级&#10;第三级&#10;第四级&#10;第五级"/>
   <p:tag name="KSO_WM_UNIT_NOCLEAR" val="0"/>
@@ -17568,8 +17054,8 @@
 </p:tagLst>
 </file>
 
-<file path=ppt/tags/tag45.xml><?xml version="1.0" encoding="utf-8"?>
-<p:tagLst xmlns:p="http://schemas.openxmlformats.org/presentationml/2006/main">
+<file path=ppt/tags/tag55.xml><?xml version="1.0" encoding="utf-8"?>
+<p:tagLst xmlns:a="http://schemas.openxmlformats.org/drawingml/2006/main" xmlns:r="http://schemas.openxmlformats.org/officeDocument/2006/relationships" xmlns:p="http://schemas.openxmlformats.org/presentationml/2006/main">
   <p:tag name="KSO_WM_UNIT_ISCONTENTSTITLE" val="0"/>
   <p:tag name="KSO_WM_UNIT_ISNUMDGMTITLE" val="0"/>
   <p:tag name="KSO_WM_UNIT_PRESET_TEXT" val="单击此处添加标题"/>
@@ -17589,8 +17075,8 @@
 </p:tagLst>
 </file>
 
-<file path=ppt/tags/tag46.xml><?xml version="1.0" encoding="utf-8"?>
-<p:tagLst xmlns:p="http://schemas.openxmlformats.org/presentationml/2006/main">
+<file path=ppt/tags/tag56.xml><?xml version="1.0" encoding="utf-8"?>
+<p:tagLst xmlns:a="http://schemas.openxmlformats.org/drawingml/2006/main" xmlns:r="http://schemas.openxmlformats.org/officeDocument/2006/relationships" xmlns:p="http://schemas.openxmlformats.org/presentationml/2006/main">
   <p:tag name="KSO_WM_UNIT_HIGHLIGHT" val="0"/>
   <p:tag name="KSO_WM_UNIT_COMPATIBLE" val="0"/>
   <p:tag name="KSO_WM_UNIT_DIAGRAM_ISNUMVISUAL" val="0"/>
@@ -17602,8 +17088,8 @@
 </p:tagLst>
 </file>
 
-<file path=ppt/tags/tag47.xml><?xml version="1.0" encoding="utf-8"?>
-<p:tagLst xmlns:p="http://schemas.openxmlformats.org/presentationml/2006/main">
+<file path=ppt/tags/tag57.xml><?xml version="1.0" encoding="utf-8"?>
+<p:tagLst xmlns:a="http://schemas.openxmlformats.org/drawingml/2006/main" xmlns:r="http://schemas.openxmlformats.org/officeDocument/2006/relationships" xmlns:p="http://schemas.openxmlformats.org/presentationml/2006/main">
   <p:tag name="KSO_WM_UNIT_HIGHLIGHT" val="0"/>
   <p:tag name="KSO_WM_UNIT_COMPATIBLE" val="0"/>
   <p:tag name="KSO_WM_UNIT_DIAGRAM_ISNUMVISUAL" val="0"/>
@@ -17615,8 +17101,8 @@
 </p:tagLst>
 </file>
 
-<file path=ppt/tags/tag48.xml><?xml version="1.0" encoding="utf-8"?>
-<p:tagLst xmlns:p="http://schemas.openxmlformats.org/presentationml/2006/main">
+<file path=ppt/tags/tag58.xml><?xml version="1.0" encoding="utf-8"?>
+<p:tagLst xmlns:a="http://schemas.openxmlformats.org/drawingml/2006/main" xmlns:r="http://schemas.openxmlformats.org/officeDocument/2006/relationships" xmlns:p="http://schemas.openxmlformats.org/presentationml/2006/main">
   <p:tag name="KSO_WM_UNIT_HIGHLIGHT" val="0"/>
   <p:tag name="KSO_WM_UNIT_COMPATIBLE" val="0"/>
   <p:tag name="KSO_WM_UNIT_DIAGRAM_ISNUMVISUAL" val="0"/>
@@ -17628,8 +17114,8 @@
 </p:tagLst>
 </file>
 
-<file path=ppt/tags/tag49.xml><?xml version="1.0" encoding="utf-8"?>
-<p:tagLst xmlns:p="http://schemas.openxmlformats.org/presentationml/2006/main">
+<file path=ppt/tags/tag59.xml><?xml version="1.0" encoding="utf-8"?>
+<p:tagLst xmlns:a="http://schemas.openxmlformats.org/drawingml/2006/main" xmlns:r="http://schemas.openxmlformats.org/officeDocument/2006/relationships" xmlns:p="http://schemas.openxmlformats.org/presentationml/2006/main">
   <p:tag name="KSO_WM_UNIT_HIGHLIGHT" val="0"/>
   <p:tag name="KSO_WM_UNIT_COMPATIBLE" val="0"/>
   <p:tag name="KSO_WM_UNIT_DIAGRAM_ISNUMVISUAL" val="0"/>
@@ -17644,23 +17130,21 @@
 </p:tagLst>
 </file>
 
-<file path=ppt/tags/tag5.xml><?xml version="1.0" encoding="utf-8"?>
-<p:tagLst xmlns:p="http://schemas.openxmlformats.org/presentationml/2006/main">
+<file path=ppt/tags/tag6.xml><?xml version="1.0" encoding="utf-8"?>
+<p:tagLst xmlns:a="http://schemas.openxmlformats.org/drawingml/2006/main" xmlns:r="http://schemas.openxmlformats.org/officeDocument/2006/relationships" xmlns:p="http://schemas.openxmlformats.org/presentationml/2006/main">
   <p:tag name="KSO_WM_UNIT_HIGHLIGHT" val="0"/>
   <p:tag name="KSO_WM_UNIT_COMPATIBLE" val="0"/>
   <p:tag name="KSO_WM_UNIT_DIAGRAM_ISNUMVISUAL" val="0"/>
   <p:tag name="KSO_WM_UNIT_DIAGRAM_ISREFERUNIT" val="0"/>
-  <p:tag name="KSO_WM_UNIT_TYPE" val="i"/>
-  <p:tag name="KSO_WM_UNIT_INDEX" val="5"/>
-  <p:tag name="KSO_WM_UNIT_ID" val="_1*i*5"/>
+  <p:tag name="KSO_WM_UNIT_ID" val="_0**"/>
   <p:tag name="KSO_WM_UNIT_LAYERLEVEL" val="1"/>
   <p:tag name="KSO_WM_TAG_VERSION" val="3.0"/>
   <p:tag name="KSO_WM_BEAUTIFY_FLAG" val="#wm#"/>
 </p:tagLst>
 </file>
 
-<file path=ppt/tags/tag50.xml><?xml version="1.0" encoding="utf-8"?>
-<p:tagLst xmlns:p="http://schemas.openxmlformats.org/presentationml/2006/main">
+<file path=ppt/tags/tag60.xml><?xml version="1.0" encoding="utf-8"?>
+<p:tagLst xmlns:a="http://schemas.openxmlformats.org/drawingml/2006/main" xmlns:r="http://schemas.openxmlformats.org/officeDocument/2006/relationships" xmlns:p="http://schemas.openxmlformats.org/presentationml/2006/main">
   <p:tag name="KSO_WM_UNIT_HIGHLIGHT" val="0"/>
   <p:tag name="KSO_WM_UNIT_COMPATIBLE" val="0"/>
   <p:tag name="KSO_WM_UNIT_DIAGRAM_ISNUMVISUAL" val="0"/>
@@ -17675,8 +17159,8 @@
 </p:tagLst>
 </file>
 
-<file path=ppt/tags/tag51.xml><?xml version="1.0" encoding="utf-8"?>
-<p:tagLst xmlns:p="http://schemas.openxmlformats.org/presentationml/2006/main">
+<file path=ppt/tags/tag61.xml><?xml version="1.0" encoding="utf-8"?>
+<p:tagLst xmlns:a="http://schemas.openxmlformats.org/drawingml/2006/main" xmlns:r="http://schemas.openxmlformats.org/officeDocument/2006/relationships" xmlns:p="http://schemas.openxmlformats.org/presentationml/2006/main">
   <p:tag name="KSO_WM_UNIT_HIGHLIGHT" val="0"/>
   <p:tag name="KSO_WM_UNIT_COMPATIBLE" val="0"/>
   <p:tag name="KSO_WM_UNIT_DIAGRAM_ISNUMVISUAL" val="0"/>
@@ -17691,8 +17175,8 @@
 </p:tagLst>
 </file>
 
-<file path=ppt/tags/tag52.xml><?xml version="1.0" encoding="utf-8"?>
-<p:tagLst xmlns:p="http://schemas.openxmlformats.org/presentationml/2006/main">
+<file path=ppt/tags/tag62.xml><?xml version="1.0" encoding="utf-8"?>
+<p:tagLst xmlns:a="http://schemas.openxmlformats.org/drawingml/2006/main" xmlns:r="http://schemas.openxmlformats.org/officeDocument/2006/relationships" xmlns:p="http://schemas.openxmlformats.org/presentationml/2006/main">
   <p:tag name="KSO_WM_UNIT_SUBTYPE" val="a"/>
   <p:tag name="KSO_WM_UNIT_PRESET_TEXT" val="单击此处编辑母版文本样式&#10;第二级&#10;第三级&#10;第四级&#10;第五级"/>
   <p:tag name="KSO_WM_UNIT_NOCLEAR" val="0"/>
@@ -17710,8 +17194,8 @@
 </p:tagLst>
 </file>
 
-<file path=ppt/tags/tag53.xml><?xml version="1.0" encoding="utf-8"?>
-<p:tagLst xmlns:p="http://schemas.openxmlformats.org/presentationml/2006/main">
+<file path=ppt/tags/tag63.xml><?xml version="1.0" encoding="utf-8"?>
+<p:tagLst xmlns:a="http://schemas.openxmlformats.org/drawingml/2006/main" xmlns:r="http://schemas.openxmlformats.org/officeDocument/2006/relationships" xmlns:p="http://schemas.openxmlformats.org/presentationml/2006/main">
   <p:tag name="KSO_WM_UNIT_ISCONTENTSTITLE" val="0"/>
   <p:tag name="KSO_WM_UNIT_ISNUMDGMTITLE" val="0"/>
   <p:tag name="KSO_WM_UNIT_PRESET_TEXT" val="添加小标题"/>
@@ -17730,8 +17214,8 @@
 </p:tagLst>
 </file>
 
-<file path=ppt/tags/tag54.xml><?xml version="1.0" encoding="utf-8"?>
-<p:tagLst xmlns:p="http://schemas.openxmlformats.org/presentationml/2006/main">
+<file path=ppt/tags/tag64.xml><?xml version="1.0" encoding="utf-8"?>
+<p:tagLst xmlns:a="http://schemas.openxmlformats.org/drawingml/2006/main" xmlns:r="http://schemas.openxmlformats.org/officeDocument/2006/relationships" xmlns:p="http://schemas.openxmlformats.org/presentationml/2006/main">
   <p:tag name="KSO_WM_UNIT_SUBTYPE" val="a"/>
   <p:tag name="KSO_WM_UNIT_PRESET_TEXT" val="单击此处编辑母版文本样式&#10;第二级&#10;第三级&#10;第四级&#10;第五级"/>
   <p:tag name="KSO_WM_UNIT_NOCLEAR" val="0"/>
@@ -17749,8 +17233,8 @@
 </p:tagLst>
 </file>
 
-<file path=ppt/tags/tag55.xml><?xml version="1.0" encoding="utf-8"?>
-<p:tagLst xmlns:p="http://schemas.openxmlformats.org/presentationml/2006/main">
+<file path=ppt/tags/tag65.xml><?xml version="1.0" encoding="utf-8"?>
+<p:tagLst xmlns:a="http://schemas.openxmlformats.org/drawingml/2006/main" xmlns:r="http://schemas.openxmlformats.org/officeDocument/2006/relationships" xmlns:p="http://schemas.openxmlformats.org/presentationml/2006/main">
   <p:tag name="KSO_WM_UNIT_ISCONTENTSTITLE" val="0"/>
   <p:tag name="KSO_WM_UNIT_ISNUMDGMTITLE" val="0"/>
   <p:tag name="KSO_WM_UNIT_PRESET_TEXT" val="添加小标题"/>
@@ -17769,8 +17253,8 @@
 </p:tagLst>
 </file>
 
-<file path=ppt/tags/tag56.xml><?xml version="1.0" encoding="utf-8"?>
-<p:tagLst xmlns:p="http://schemas.openxmlformats.org/presentationml/2006/main">
+<file path=ppt/tags/tag66.xml><?xml version="1.0" encoding="utf-8"?>
+<p:tagLst xmlns:a="http://schemas.openxmlformats.org/drawingml/2006/main" xmlns:r="http://schemas.openxmlformats.org/officeDocument/2006/relationships" xmlns:p="http://schemas.openxmlformats.org/presentationml/2006/main">
   <p:tag name="KSO_WM_UNIT_ISCONTENTSTITLE" val="0"/>
   <p:tag name="KSO_WM_UNIT_ISNUMDGMTITLE" val="0"/>
   <p:tag name="KSO_WM_UNIT_PRESET_TEXT" val="单击此处添加标题"/>
@@ -17790,8 +17274,8 @@
 </p:tagLst>
 </file>
 
-<file path=ppt/tags/tag57.xml><?xml version="1.0" encoding="utf-8"?>
-<p:tagLst xmlns:p="http://schemas.openxmlformats.org/presentationml/2006/main">
+<file path=ppt/tags/tag67.xml><?xml version="1.0" encoding="utf-8"?>
+<p:tagLst xmlns:a="http://schemas.openxmlformats.org/drawingml/2006/main" xmlns:r="http://schemas.openxmlformats.org/officeDocument/2006/relationships" xmlns:p="http://schemas.openxmlformats.org/presentationml/2006/main">
   <p:tag name="KSO_WM_UNIT_HIGHLIGHT" val="0"/>
   <p:tag name="KSO_WM_UNIT_COMPATIBLE" val="0"/>
   <p:tag name="KSO_WM_UNIT_DIAGRAM_ISNUMVISUAL" val="0"/>
@@ -17803,8 +17287,8 @@
 </p:tagLst>
 </file>
 
-<file path=ppt/tags/tag58.xml><?xml version="1.0" encoding="utf-8"?>
-<p:tagLst xmlns:p="http://schemas.openxmlformats.org/presentationml/2006/main">
+<file path=ppt/tags/tag68.xml><?xml version="1.0" encoding="utf-8"?>
+<p:tagLst xmlns:a="http://schemas.openxmlformats.org/drawingml/2006/main" xmlns:r="http://schemas.openxmlformats.org/officeDocument/2006/relationships" xmlns:p="http://schemas.openxmlformats.org/presentationml/2006/main">
   <p:tag name="KSO_WM_UNIT_HIGHLIGHT" val="0"/>
   <p:tag name="KSO_WM_UNIT_COMPATIBLE" val="0"/>
   <p:tag name="KSO_WM_UNIT_DIAGRAM_ISNUMVISUAL" val="0"/>
@@ -17816,8 +17300,8 @@
 </p:tagLst>
 </file>
 
-<file path=ppt/tags/tag59.xml><?xml version="1.0" encoding="utf-8"?>
-<p:tagLst xmlns:p="http://schemas.openxmlformats.org/presentationml/2006/main">
+<file path=ppt/tags/tag69.xml><?xml version="1.0" encoding="utf-8"?>
+<p:tagLst xmlns:a="http://schemas.openxmlformats.org/drawingml/2006/main" xmlns:r="http://schemas.openxmlformats.org/officeDocument/2006/relationships" xmlns:p="http://schemas.openxmlformats.org/presentationml/2006/main">
   <p:tag name="KSO_WM_UNIT_HIGHLIGHT" val="0"/>
   <p:tag name="KSO_WM_UNIT_COMPATIBLE" val="0"/>
   <p:tag name="KSO_WM_UNIT_DIAGRAM_ISNUMVISUAL" val="0"/>
@@ -17829,23 +17313,21 @@
 </p:tagLst>
 </file>
 
-<file path=ppt/tags/tag6.xml><?xml version="1.0" encoding="utf-8"?>
-<p:tagLst xmlns:p="http://schemas.openxmlformats.org/presentationml/2006/main">
+<file path=ppt/tags/tag7.xml><?xml version="1.0" encoding="utf-8"?>
+<p:tagLst xmlns:a="http://schemas.openxmlformats.org/drawingml/2006/main" xmlns:r="http://schemas.openxmlformats.org/officeDocument/2006/relationships" xmlns:p="http://schemas.openxmlformats.org/presentationml/2006/main">
   <p:tag name="KSO_WM_UNIT_HIGHLIGHT" val="0"/>
   <p:tag name="KSO_WM_UNIT_COMPATIBLE" val="0"/>
   <p:tag name="KSO_WM_UNIT_DIAGRAM_ISNUMVISUAL" val="0"/>
   <p:tag name="KSO_WM_UNIT_DIAGRAM_ISREFERUNIT" val="0"/>
-  <p:tag name="KSO_WM_UNIT_TYPE" val="i"/>
-  <p:tag name="KSO_WM_UNIT_INDEX" val="6"/>
-  <p:tag name="KSO_WM_UNIT_ID" val="_1*i*6"/>
+  <p:tag name="KSO_WM_UNIT_ID" val="_0**"/>
   <p:tag name="KSO_WM_UNIT_LAYERLEVEL" val="1"/>
   <p:tag name="KSO_WM_TAG_VERSION" val="3.0"/>
   <p:tag name="KSO_WM_BEAUTIFY_FLAG" val="#wm#"/>
 </p:tagLst>
 </file>
 
-<file path=ppt/tags/tag60.xml><?xml version="1.0" encoding="utf-8"?>
-<p:tagLst xmlns:p="http://schemas.openxmlformats.org/presentationml/2006/main">
+<file path=ppt/tags/tag70.xml><?xml version="1.0" encoding="utf-8"?>
+<p:tagLst xmlns:a="http://schemas.openxmlformats.org/drawingml/2006/main" xmlns:r="http://schemas.openxmlformats.org/officeDocument/2006/relationships" xmlns:p="http://schemas.openxmlformats.org/presentationml/2006/main">
   <p:tag name="KSO_WM_UNIT_HIGHLIGHT" val="0"/>
   <p:tag name="KSO_WM_UNIT_COMPATIBLE" val="0"/>
   <p:tag name="KSO_WM_UNIT_DIAGRAM_ISNUMVISUAL" val="0"/>
@@ -17860,8 +17342,8 @@
 </p:tagLst>
 </file>
 
-<file path=ppt/tags/tag61.xml><?xml version="1.0" encoding="utf-8"?>
-<p:tagLst xmlns:p="http://schemas.openxmlformats.org/presentationml/2006/main">
+<file path=ppt/tags/tag71.xml><?xml version="1.0" encoding="utf-8"?>
+<p:tagLst xmlns:a="http://schemas.openxmlformats.org/drawingml/2006/main" xmlns:r="http://schemas.openxmlformats.org/officeDocument/2006/relationships" xmlns:p="http://schemas.openxmlformats.org/presentationml/2006/main">
   <p:tag name="KSO_WM_UNIT_HIGHLIGHT" val="0"/>
   <p:tag name="KSO_WM_UNIT_COMPATIBLE" val="0"/>
   <p:tag name="KSO_WM_UNIT_DIAGRAM_ISNUMVISUAL" val="0"/>
@@ -17876,8 +17358,8 @@
 </p:tagLst>
 </file>
 
-<file path=ppt/tags/tag62.xml><?xml version="1.0" encoding="utf-8"?>
-<p:tagLst xmlns:p="http://schemas.openxmlformats.org/presentationml/2006/main">
+<file path=ppt/tags/tag72.xml><?xml version="1.0" encoding="utf-8"?>
+<p:tagLst xmlns:a="http://schemas.openxmlformats.org/drawingml/2006/main" xmlns:r="http://schemas.openxmlformats.org/officeDocument/2006/relationships" xmlns:p="http://schemas.openxmlformats.org/presentationml/2006/main">
   <p:tag name="KSO_WM_UNIT_HIGHLIGHT" val="0"/>
   <p:tag name="KSO_WM_UNIT_COMPATIBLE" val="0"/>
   <p:tag name="KSO_WM_UNIT_DIAGRAM_ISNUMVISUAL" val="0"/>
@@ -17892,8 +17374,8 @@
 </p:tagLst>
 </file>
 
-<file path=ppt/tags/tag63.xml><?xml version="1.0" encoding="utf-8"?>
-<p:tagLst xmlns:p="http://schemas.openxmlformats.org/presentationml/2006/main">
+<file path=ppt/tags/tag73.xml><?xml version="1.0" encoding="utf-8"?>
+<p:tagLst xmlns:a="http://schemas.openxmlformats.org/drawingml/2006/main" xmlns:r="http://schemas.openxmlformats.org/officeDocument/2006/relationships" xmlns:p="http://schemas.openxmlformats.org/presentationml/2006/main">
   <p:tag name="KSO_WM_UNIT_ISCONTENTSTITLE" val="0"/>
   <p:tag name="KSO_WM_UNIT_ISNUMDGMTITLE" val="0"/>
   <p:tag name="KSO_WM_UNIT_PRESET_TEXT" val="单击此处添加标题"/>
@@ -17913,8 +17395,8 @@
 </p:tagLst>
 </file>
 
-<file path=ppt/tags/tag64.xml><?xml version="1.0" encoding="utf-8"?>
-<p:tagLst xmlns:p="http://schemas.openxmlformats.org/presentationml/2006/main">
+<file path=ppt/tags/tag74.xml><?xml version="1.0" encoding="utf-8"?>
+<p:tagLst xmlns:a="http://schemas.openxmlformats.org/drawingml/2006/main" xmlns:r="http://schemas.openxmlformats.org/officeDocument/2006/relationships" xmlns:p="http://schemas.openxmlformats.org/presentationml/2006/main">
   <p:tag name="KSO_WM_UNIT_HIGHLIGHT" val="0"/>
   <p:tag name="KSO_WM_UNIT_COMPATIBLE" val="0"/>
   <p:tag name="KSO_WM_UNIT_DIAGRAM_ISNUMVISUAL" val="0"/>
@@ -17926,8 +17408,8 @@
 </p:tagLst>
 </file>
 
-<file path=ppt/tags/tag65.xml><?xml version="1.0" encoding="utf-8"?>
-<p:tagLst xmlns:p="http://schemas.openxmlformats.org/presentationml/2006/main">
+<file path=ppt/tags/tag75.xml><?xml version="1.0" encoding="utf-8"?>
+<p:tagLst xmlns:a="http://schemas.openxmlformats.org/drawingml/2006/main" xmlns:r="http://schemas.openxmlformats.org/officeDocument/2006/relationships" xmlns:p="http://schemas.openxmlformats.org/presentationml/2006/main">
   <p:tag name="KSO_WM_UNIT_HIGHLIGHT" val="0"/>
   <p:tag name="KSO_WM_UNIT_COMPATIBLE" val="0"/>
   <p:tag name="KSO_WM_UNIT_DIAGRAM_ISNUMVISUAL" val="0"/>
@@ -17939,8 +17421,8 @@
 </p:tagLst>
 </file>
 
-<file path=ppt/tags/tag66.xml><?xml version="1.0" encoding="utf-8"?>
-<p:tagLst xmlns:p="http://schemas.openxmlformats.org/presentationml/2006/main">
+<file path=ppt/tags/tag76.xml><?xml version="1.0" encoding="utf-8"?>
+<p:tagLst xmlns:a="http://schemas.openxmlformats.org/drawingml/2006/main" xmlns:r="http://schemas.openxmlformats.org/officeDocument/2006/relationships" xmlns:p="http://schemas.openxmlformats.org/presentationml/2006/main">
   <p:tag name="KSO_WM_UNIT_HIGHLIGHT" val="0"/>
   <p:tag name="KSO_WM_UNIT_COMPATIBLE" val="0"/>
   <p:tag name="KSO_WM_UNIT_DIAGRAM_ISNUMVISUAL" val="0"/>
@@ -17952,8 +17434,8 @@
 </p:tagLst>
 </file>
 
-<file path=ppt/tags/tag67.xml><?xml version="1.0" encoding="utf-8"?>
-<p:tagLst xmlns:p="http://schemas.openxmlformats.org/presentationml/2006/main">
+<file path=ppt/tags/tag77.xml><?xml version="1.0" encoding="utf-8"?>
+<p:tagLst xmlns:a="http://schemas.openxmlformats.org/drawingml/2006/main" xmlns:r="http://schemas.openxmlformats.org/officeDocument/2006/relationships" xmlns:p="http://schemas.openxmlformats.org/presentationml/2006/main">
   <p:tag name="KSO_WM_UNIT_HIGHLIGHT" val="0"/>
   <p:tag name="KSO_WM_UNIT_COMPATIBLE" val="0"/>
   <p:tag name="KSO_WM_UNIT_DIAGRAM_ISNUMVISUAL" val="0"/>
@@ -17968,8 +17450,8 @@
 </p:tagLst>
 </file>
 
-<file path=ppt/tags/tag68.xml><?xml version="1.0" encoding="utf-8"?>
-<p:tagLst xmlns:p="http://schemas.openxmlformats.org/presentationml/2006/main">
+<file path=ppt/tags/tag78.xml><?xml version="1.0" encoding="utf-8"?>
+<p:tagLst xmlns:a="http://schemas.openxmlformats.org/drawingml/2006/main" xmlns:r="http://schemas.openxmlformats.org/officeDocument/2006/relationships" xmlns:p="http://schemas.openxmlformats.org/presentationml/2006/main">
   <p:tag name="KSO_WM_UNIT_HIGHLIGHT" val="0"/>
   <p:tag name="KSO_WM_UNIT_COMPATIBLE" val="0"/>
   <p:tag name="KSO_WM_UNIT_DIAGRAM_ISNUMVISUAL" val="0"/>
@@ -17984,8 +17466,8 @@
 </p:tagLst>
 </file>
 
-<file path=ppt/tags/tag69.xml><?xml version="1.0" encoding="utf-8"?>
-<p:tagLst xmlns:p="http://schemas.openxmlformats.org/presentationml/2006/main">
+<file path=ppt/tags/tag79.xml><?xml version="1.0" encoding="utf-8"?>
+<p:tagLst xmlns:a="http://schemas.openxmlformats.org/drawingml/2006/main" xmlns:r="http://schemas.openxmlformats.org/officeDocument/2006/relationships" xmlns:p="http://schemas.openxmlformats.org/presentationml/2006/main">
   <p:tag name="KSO_WM_UNIT_HIGHLIGHT" val="0"/>
   <p:tag name="KSO_WM_UNIT_COMPATIBLE" val="0"/>
   <p:tag name="KSO_WM_UNIT_DIAGRAM_ISNUMVISUAL" val="0"/>
@@ -18000,23 +17482,29 @@
 </p:tagLst>
 </file>
 
-<file path=ppt/tags/tag7.xml><?xml version="1.0" encoding="utf-8"?>
-<p:tagLst xmlns:p="http://schemas.openxmlformats.org/presentationml/2006/main">
+<file path=ppt/tags/tag8.xml><?xml version="1.0" encoding="utf-8"?>
+<p:tagLst xmlns:a="http://schemas.openxmlformats.org/drawingml/2006/main" xmlns:r="http://schemas.openxmlformats.org/officeDocument/2006/relationships" xmlns:p="http://schemas.openxmlformats.org/presentationml/2006/main">
+  <p:tag name="KSO_WM_UNIT_ISCONTENTSTITLE" val="0"/>
+  <p:tag name="KSO_WM_UNIT_ISNUMDGMTITLE" val="0"/>
+  <p:tag name="KSO_WM_UNIT_PRESET_TEXT" val="单击此处编辑母版标题样式"/>
+  <p:tag name="KSO_WM_UNIT_NOCLEAR" val="0"/>
   <p:tag name="KSO_WM_UNIT_HIGHLIGHT" val="0"/>
   <p:tag name="KSO_WM_UNIT_COMPATIBLE" val="0"/>
   <p:tag name="KSO_WM_UNIT_DIAGRAM_ISNUMVISUAL" val="0"/>
   <p:tag name="KSO_WM_UNIT_DIAGRAM_ISREFERUNIT" val="0"/>
-  <p:tag name="KSO_WM_UNIT_TYPE" val="i"/>
-  <p:tag name="KSO_WM_UNIT_INDEX" val="7"/>
-  <p:tag name="KSO_WM_UNIT_ID" val="_1*i*7"/>
+  <p:tag name="KSO_WM_UNIT_TYPE" val="a"/>
+  <p:tag name="KSO_WM_UNIT_INDEX" val="1"/>
+  <p:tag name="KSO_WM_UNIT_ID" val="_0*a*1"/>
   <p:tag name="KSO_WM_UNIT_LAYERLEVEL" val="1"/>
-  <p:tag name="KSO_WM_TAG_VERSION" val="3.0"/>
+  <p:tag name="KSO_WM_TAG_VERSION" val="1.0"/>
   <p:tag name="KSO_WM_BEAUTIFY_FLAG" val="#wm#"/>
+  <p:tag name="KSO_WM_TEMPLATE_CATEGORY" val="custom"/>
+  <p:tag name="KSO_WM_TEMPLATE_INDEX" val="20233430"/>
 </p:tagLst>
 </file>
 
-<file path=ppt/tags/tag70.xml><?xml version="1.0" encoding="utf-8"?>
-<p:tagLst xmlns:p="http://schemas.openxmlformats.org/presentationml/2006/main">
+<file path=ppt/tags/tag80.xml><?xml version="1.0" encoding="utf-8"?>
+<p:tagLst xmlns:a="http://schemas.openxmlformats.org/drawingml/2006/main" xmlns:r="http://schemas.openxmlformats.org/officeDocument/2006/relationships" xmlns:p="http://schemas.openxmlformats.org/presentationml/2006/main">
   <p:tag name="KSO_WM_UNIT_HIGHLIGHT" val="0"/>
   <p:tag name="KSO_WM_UNIT_COMPATIBLE" val="0"/>
   <p:tag name="KSO_WM_UNIT_DIAGRAM_ISNUMVISUAL" val="0"/>
@@ -18028,8 +17516,8 @@
 </p:tagLst>
 </file>
 
-<file path=ppt/tags/tag71.xml><?xml version="1.0" encoding="utf-8"?>
-<p:tagLst xmlns:p="http://schemas.openxmlformats.org/presentationml/2006/main">
+<file path=ppt/tags/tag81.xml><?xml version="1.0" encoding="utf-8"?>
+<p:tagLst xmlns:a="http://schemas.openxmlformats.org/drawingml/2006/main" xmlns:r="http://schemas.openxmlformats.org/officeDocument/2006/relationships" xmlns:p="http://schemas.openxmlformats.org/presentationml/2006/main">
   <p:tag name="KSO_WM_UNIT_HIGHLIGHT" val="0"/>
   <p:tag name="KSO_WM_UNIT_COMPATIBLE" val="0"/>
   <p:tag name="KSO_WM_UNIT_DIAGRAM_ISNUMVISUAL" val="0"/>
@@ -18041,8 +17529,8 @@
 </p:tagLst>
 </file>
 
-<file path=ppt/tags/tag72.xml><?xml version="1.0" encoding="utf-8"?>
-<p:tagLst xmlns:p="http://schemas.openxmlformats.org/presentationml/2006/main">
+<file path=ppt/tags/tag82.xml><?xml version="1.0" encoding="utf-8"?>
+<p:tagLst xmlns:a="http://schemas.openxmlformats.org/drawingml/2006/main" xmlns:r="http://schemas.openxmlformats.org/officeDocument/2006/relationships" xmlns:p="http://schemas.openxmlformats.org/presentationml/2006/main">
   <p:tag name="KSO_WM_UNIT_HIGHLIGHT" val="0"/>
   <p:tag name="KSO_WM_UNIT_COMPATIBLE" val="0"/>
   <p:tag name="KSO_WM_UNIT_DIAGRAM_ISNUMVISUAL" val="0"/>
@@ -18054,8 +17542,8 @@
 </p:tagLst>
 </file>
 
-<file path=ppt/tags/tag73.xml><?xml version="1.0" encoding="utf-8"?>
-<p:tagLst xmlns:p="http://schemas.openxmlformats.org/presentationml/2006/main">
+<file path=ppt/tags/tag83.xml><?xml version="1.0" encoding="utf-8"?>
+<p:tagLst xmlns:a="http://schemas.openxmlformats.org/drawingml/2006/main" xmlns:r="http://schemas.openxmlformats.org/officeDocument/2006/relationships" xmlns:p="http://schemas.openxmlformats.org/presentationml/2006/main">
   <p:tag name="KSO_WM_UNIT_HIGHLIGHT" val="0"/>
   <p:tag name="KSO_WM_UNIT_COMPATIBLE" val="0"/>
   <p:tag name="KSO_WM_UNIT_DIAGRAM_ISNUMVISUAL" val="0"/>
@@ -18070,8 +17558,8 @@
 </p:tagLst>
 </file>
 
-<file path=ppt/tags/tag74.xml><?xml version="1.0" encoding="utf-8"?>
-<p:tagLst xmlns:p="http://schemas.openxmlformats.org/presentationml/2006/main">
+<file path=ppt/tags/tag84.xml><?xml version="1.0" encoding="utf-8"?>
+<p:tagLst xmlns:a="http://schemas.openxmlformats.org/drawingml/2006/main" xmlns:r="http://schemas.openxmlformats.org/officeDocument/2006/relationships" xmlns:p="http://schemas.openxmlformats.org/presentationml/2006/main">
   <p:tag name="KSO_WM_UNIT_HIGHLIGHT" val="0"/>
   <p:tag name="KSO_WM_UNIT_COMPATIBLE" val="0"/>
   <p:tag name="KSO_WM_UNIT_DIAGRAM_ISNUMVISUAL" val="0"/>
@@ -18086,8 +17574,8 @@
 </p:tagLst>
 </file>
 
-<file path=ppt/tags/tag75.xml><?xml version="1.0" encoding="utf-8"?>
-<p:tagLst xmlns:p="http://schemas.openxmlformats.org/presentationml/2006/main">
+<file path=ppt/tags/tag85.xml><?xml version="1.0" encoding="utf-8"?>
+<p:tagLst xmlns:a="http://schemas.openxmlformats.org/drawingml/2006/main" xmlns:r="http://schemas.openxmlformats.org/officeDocument/2006/relationships" xmlns:p="http://schemas.openxmlformats.org/presentationml/2006/main">
   <p:tag name="KSO_WM_UNIT_HIGHLIGHT" val="0"/>
   <p:tag name="KSO_WM_UNIT_COMPATIBLE" val="0"/>
   <p:tag name="KSO_WM_UNIT_DIAGRAM_ISNUMVISUAL" val="0"/>
@@ -18102,8 +17590,8 @@
 </p:tagLst>
 </file>
 
-<file path=ppt/tags/tag76.xml><?xml version="1.0" encoding="utf-8"?>
-<p:tagLst xmlns:p="http://schemas.openxmlformats.org/presentationml/2006/main">
+<file path=ppt/tags/tag86.xml><?xml version="1.0" encoding="utf-8"?>
+<p:tagLst xmlns:a="http://schemas.openxmlformats.org/drawingml/2006/main" xmlns:r="http://schemas.openxmlformats.org/officeDocument/2006/relationships" xmlns:p="http://schemas.openxmlformats.org/presentationml/2006/main">
   <p:tag name="KSO_WM_UNIT_SUBTYPE" val="a"/>
   <p:tag name="KSO_WM_UNIT_PRESET_TEXT" val="单击此处编辑母版文本样式&#10;第二级&#10;第三级&#10;第四级&#10;第五级"/>
   <p:tag name="KSO_WM_UNIT_NOCLEAR" val="0"/>
@@ -18121,8 +17609,8 @@
 </p:tagLst>
 </file>
 
-<file path=ppt/tags/tag77.xml><?xml version="1.0" encoding="utf-8"?>
-<p:tagLst xmlns:p="http://schemas.openxmlformats.org/presentationml/2006/main">
+<file path=ppt/tags/tag87.xml><?xml version="1.0" encoding="utf-8"?>
+<p:tagLst xmlns:a="http://schemas.openxmlformats.org/drawingml/2006/main" xmlns:r="http://schemas.openxmlformats.org/officeDocument/2006/relationships" xmlns:p="http://schemas.openxmlformats.org/presentationml/2006/main">
   <p:tag name="KSO_WM_UNIT_HIGHLIGHT" val="0"/>
   <p:tag name="KSO_WM_UNIT_COMPATIBLE" val="0"/>
   <p:tag name="KSO_WM_UNIT_DIAGRAM_ISNUMVISUAL" val="0"/>
@@ -18134,8 +17622,8 @@
 </p:tagLst>
 </file>
 
-<file path=ppt/tags/tag78.xml><?xml version="1.0" encoding="utf-8"?>
-<p:tagLst xmlns:p="http://schemas.openxmlformats.org/presentationml/2006/main">
+<file path=ppt/tags/tag88.xml><?xml version="1.0" encoding="utf-8"?>
+<p:tagLst xmlns:a="http://schemas.openxmlformats.org/drawingml/2006/main" xmlns:r="http://schemas.openxmlformats.org/officeDocument/2006/relationships" xmlns:p="http://schemas.openxmlformats.org/presentationml/2006/main">
   <p:tag name="KSO_WM_UNIT_HIGHLIGHT" val="0"/>
   <p:tag name="KSO_WM_UNIT_COMPATIBLE" val="0"/>
   <p:tag name="KSO_WM_UNIT_DIAGRAM_ISNUMVISUAL" val="0"/>
@@ -18147,8 +17635,8 @@
 </p:tagLst>
 </file>
 
-<file path=ppt/tags/tag79.xml><?xml version="1.0" encoding="utf-8"?>
-<p:tagLst xmlns:p="http://schemas.openxmlformats.org/presentationml/2006/main">
+<file path=ppt/tags/tag89.xml><?xml version="1.0" encoding="utf-8"?>
+<p:tagLst xmlns:a="http://schemas.openxmlformats.org/drawingml/2006/main" xmlns:r="http://schemas.openxmlformats.org/officeDocument/2006/relationships" xmlns:p="http://schemas.openxmlformats.org/presentationml/2006/main">
   <p:tag name="KSO_WM_UNIT_HIGHLIGHT" val="0"/>
   <p:tag name="KSO_WM_UNIT_COMPATIBLE" val="0"/>
   <p:tag name="KSO_WM_UNIT_DIAGRAM_ISNUMVISUAL" val="0"/>
@@ -18160,23 +17648,28 @@
 </p:tagLst>
 </file>
 
-<file path=ppt/tags/tag8.xml><?xml version="1.0" encoding="utf-8"?>
-<p:tagLst xmlns:p="http://schemas.openxmlformats.org/presentationml/2006/main">
+<file path=ppt/tags/tag9.xml><?xml version="1.0" encoding="utf-8"?>
+<p:tagLst xmlns:a="http://schemas.openxmlformats.org/drawingml/2006/main" xmlns:r="http://schemas.openxmlformats.org/officeDocument/2006/relationships" xmlns:p="http://schemas.openxmlformats.org/presentationml/2006/main">
+  <p:tag name="KSO_WM_UNIT_SUBTYPE" val="a"/>
+  <p:tag name="KSO_WM_UNIT_PRESET_TEXT" val="单击此处编辑母版文本样式&#10;二级&#10;三级&#10;四级&#10;五级"/>
+  <p:tag name="KSO_WM_UNIT_NOCLEAR" val="0"/>
   <p:tag name="KSO_WM_UNIT_HIGHLIGHT" val="0"/>
   <p:tag name="KSO_WM_UNIT_COMPATIBLE" val="0"/>
   <p:tag name="KSO_WM_UNIT_DIAGRAM_ISNUMVISUAL" val="0"/>
   <p:tag name="KSO_WM_UNIT_DIAGRAM_ISREFERUNIT" val="0"/>
-  <p:tag name="KSO_WM_UNIT_TYPE" val="i"/>
-  <p:tag name="KSO_WM_UNIT_INDEX" val="8"/>
-  <p:tag name="KSO_WM_UNIT_ID" val="_1*i*8"/>
+  <p:tag name="KSO_WM_UNIT_TYPE" val="f"/>
+  <p:tag name="KSO_WM_UNIT_INDEX" val="1"/>
+  <p:tag name="KSO_WM_UNIT_ID" val="_0*f*1"/>
   <p:tag name="KSO_WM_UNIT_LAYERLEVEL" val="1"/>
-  <p:tag name="KSO_WM_TAG_VERSION" val="3.0"/>
+  <p:tag name="KSO_WM_TAG_VERSION" val="1.0"/>
   <p:tag name="KSO_WM_BEAUTIFY_FLAG" val="#wm#"/>
+  <p:tag name="KSO_WM_TEMPLATE_CATEGORY" val="custom"/>
+  <p:tag name="KSO_WM_TEMPLATE_INDEX" val="20233430"/>
 </p:tagLst>
 </file>
 
-<file path=ppt/tags/tag80.xml><?xml version="1.0" encoding="utf-8"?>
-<p:tagLst xmlns:p="http://schemas.openxmlformats.org/presentationml/2006/main">
+<file path=ppt/tags/tag90.xml><?xml version="1.0" encoding="utf-8"?>
+<p:tagLst xmlns:a="http://schemas.openxmlformats.org/drawingml/2006/main" xmlns:r="http://schemas.openxmlformats.org/officeDocument/2006/relationships" xmlns:p="http://schemas.openxmlformats.org/presentationml/2006/main">
   <p:tag name="KSO_WM_UNIT_HIGHLIGHT" val="0"/>
   <p:tag name="KSO_WM_UNIT_COMPATIBLE" val="0"/>
   <p:tag name="KSO_WM_UNIT_DIAGRAM_ISNUMVISUAL" val="0"/>
@@ -18191,8 +17684,8 @@
 </p:tagLst>
 </file>
 
-<file path=ppt/tags/tag81.xml><?xml version="1.0" encoding="utf-8"?>
-<p:tagLst xmlns:p="http://schemas.openxmlformats.org/presentationml/2006/main">
+<file path=ppt/tags/tag91.xml><?xml version="1.0" encoding="utf-8"?>
+<p:tagLst xmlns:a="http://schemas.openxmlformats.org/drawingml/2006/main" xmlns:r="http://schemas.openxmlformats.org/officeDocument/2006/relationships" xmlns:p="http://schemas.openxmlformats.org/presentationml/2006/main">
   <p:tag name="KSO_WM_UNIT_HIGHLIGHT" val="0"/>
   <p:tag name="KSO_WM_UNIT_COMPATIBLE" val="0"/>
   <p:tag name="KSO_WM_UNIT_DIAGRAM_ISNUMVISUAL" val="0"/>
@@ -18207,8 +17700,8 @@
 </p:tagLst>
 </file>
 
-<file path=ppt/tags/tag82.xml><?xml version="1.0" encoding="utf-8"?>
-<p:tagLst xmlns:p="http://schemas.openxmlformats.org/presentationml/2006/main">
+<file path=ppt/tags/tag92.xml><?xml version="1.0" encoding="utf-8"?>
+<p:tagLst xmlns:a="http://schemas.openxmlformats.org/drawingml/2006/main" xmlns:r="http://schemas.openxmlformats.org/officeDocument/2006/relationships" xmlns:p="http://schemas.openxmlformats.org/presentationml/2006/main">
   <p:tag name="KSO_WM_UNIT_HIGHLIGHT" val="0"/>
   <p:tag name="KSO_WM_UNIT_COMPATIBLE" val="0"/>
   <p:tag name="KSO_WM_UNIT_DIAGRAM_ISNUMVISUAL" val="0"/>
@@ -18223,8 +17716,8 @@
 </p:tagLst>
 </file>
 
-<file path=ppt/tags/tag83.xml><?xml version="1.0" encoding="utf-8"?>
-<p:tagLst xmlns:p="http://schemas.openxmlformats.org/presentationml/2006/main">
+<file path=ppt/tags/tag93.xml><?xml version="1.0" encoding="utf-8"?>
+<p:tagLst xmlns:a="http://schemas.openxmlformats.org/drawingml/2006/main" xmlns:r="http://schemas.openxmlformats.org/officeDocument/2006/relationships" xmlns:p="http://schemas.openxmlformats.org/presentationml/2006/main">
   <p:tag name="KSO_WM_UNIT_ISCONTENTSTITLE" val="0"/>
   <p:tag name="KSO_WM_UNIT_ISNUMDGMTITLE" val="0"/>
   <p:tag name="KSO_WM_UNIT_PRESET_TEXT" val="单击选择预设副标题"/>
@@ -18244,8 +17737,8 @@
 </p:tagLst>
 </file>
 
-<file path=ppt/tags/tag84.xml><?xml version="1.0" encoding="utf-8"?>
-<p:tagLst xmlns:p="http://schemas.openxmlformats.org/presentationml/2006/main">
+<file path=ppt/tags/tag94.xml><?xml version="1.0" encoding="utf-8"?>
+<p:tagLst xmlns:a="http://schemas.openxmlformats.org/drawingml/2006/main" xmlns:r="http://schemas.openxmlformats.org/officeDocument/2006/relationships" xmlns:p="http://schemas.openxmlformats.org/presentationml/2006/main">
   <p:tag name="KSO_WM_UNIT_ISCONTENTSTITLE" val="0"/>
   <p:tag name="KSO_WM_UNIT_ISNUMDGMTITLE" val="0"/>
   <p:tag name="KSO_WM_UNIT_PRESET_TEXT" val="单击此处添加标题"/>
@@ -18265,8 +17758,8 @@
 </p:tagLst>
 </file>
 
-<file path=ppt/tags/tag85.xml><?xml version="1.0" encoding="utf-8"?>
-<p:tagLst xmlns:p="http://schemas.openxmlformats.org/presentationml/2006/main">
+<file path=ppt/tags/tag95.xml><?xml version="1.0" encoding="utf-8"?>
+<p:tagLst xmlns:a="http://schemas.openxmlformats.org/drawingml/2006/main" xmlns:r="http://schemas.openxmlformats.org/officeDocument/2006/relationships" xmlns:p="http://schemas.openxmlformats.org/presentationml/2006/main">
   <p:tag name="KSO_WM_UNIT_HIGHLIGHT" val="0"/>
   <p:tag name="KSO_WM_UNIT_COMPATIBLE" val="0"/>
   <p:tag name="KSO_WM_UNIT_DIAGRAM_ISNUMVISUAL" val="0"/>
@@ -18278,8 +17771,8 @@
 </p:tagLst>
 </file>
 
-<file path=ppt/tags/tag86.xml><?xml version="1.0" encoding="utf-8"?>
-<p:tagLst xmlns:p="http://schemas.openxmlformats.org/presentationml/2006/main">
+<file path=ppt/tags/tag96.xml><?xml version="1.0" encoding="utf-8"?>
+<p:tagLst xmlns:a="http://schemas.openxmlformats.org/drawingml/2006/main" xmlns:r="http://schemas.openxmlformats.org/officeDocument/2006/relationships" xmlns:p="http://schemas.openxmlformats.org/presentationml/2006/main">
   <p:tag name="KSO_WM_UNIT_HIGHLIGHT" val="0"/>
   <p:tag name="KSO_WM_UNIT_COMPATIBLE" val="0"/>
   <p:tag name="KSO_WM_UNIT_DIAGRAM_ISNUMVISUAL" val="0"/>
@@ -18291,8 +17784,8 @@
 </p:tagLst>
 </file>
 
-<file path=ppt/tags/tag87.xml><?xml version="1.0" encoding="utf-8"?>
-<p:tagLst xmlns:p="http://schemas.openxmlformats.org/presentationml/2006/main">
+<file path=ppt/tags/tag97.xml><?xml version="1.0" encoding="utf-8"?>
+<p:tagLst xmlns:a="http://schemas.openxmlformats.org/drawingml/2006/main" xmlns:r="http://schemas.openxmlformats.org/officeDocument/2006/relationships" xmlns:p="http://schemas.openxmlformats.org/presentationml/2006/main">
   <p:tag name="KSO_WM_UNIT_HIGHLIGHT" val="0"/>
   <p:tag name="KSO_WM_UNIT_COMPATIBLE" val="0"/>
   <p:tag name="KSO_WM_UNIT_DIAGRAM_ISNUMVISUAL" val="0"/>
@@ -18304,8 +17797,8 @@
 </p:tagLst>
 </file>
 
-<file path=ppt/tags/tag88.xml><?xml version="1.0" encoding="utf-8"?>
-<p:tagLst xmlns:p="http://schemas.openxmlformats.org/presentationml/2006/main">
+<file path=ppt/tags/tag98.xml><?xml version="1.0" encoding="utf-8"?>
+<p:tagLst xmlns:a="http://schemas.openxmlformats.org/drawingml/2006/main" xmlns:r="http://schemas.openxmlformats.org/officeDocument/2006/relationships" xmlns:p="http://schemas.openxmlformats.org/presentationml/2006/main">
   <p:tag name="KSO_WM_UNIT_HIGHLIGHT" val="0"/>
   <p:tag name="KSO_WM_UNIT_COMPATIBLE" val="0"/>
   <p:tag name="KSO_WM_UNIT_DIAGRAM_ISNUMVISUAL" val="0"/>
@@ -18320,8 +17813,8 @@
 </p:tagLst>
 </file>
 
-<file path=ppt/tags/tag89.xml><?xml version="1.0" encoding="utf-8"?>
-<p:tagLst xmlns:p="http://schemas.openxmlformats.org/presentationml/2006/main">
+<file path=ppt/tags/tag99.xml><?xml version="1.0" encoding="utf-8"?>
+<p:tagLst xmlns:a="http://schemas.openxmlformats.org/drawingml/2006/main" xmlns:r="http://schemas.openxmlformats.org/officeDocument/2006/relationships" xmlns:p="http://schemas.openxmlformats.org/presentationml/2006/main">
   <p:tag name="KSO_WM_UNIT_HIGHLIGHT" val="0"/>
   <p:tag name="KSO_WM_UNIT_COMPATIBLE" val="0"/>
   <p:tag name="KSO_WM_UNIT_DIAGRAM_ISNUMVISUAL" val="0"/>
@@ -18330,185 +17823,6 @@
   <p:tag name="KSO_WM_UNIT_TYPE" val="i"/>
   <p:tag name="KSO_WM_UNIT_INDEX" val="2"/>
   <p:tag name="KSO_WM_UNIT_ID" val="_11*i*2"/>
-  <p:tag name="KSO_WM_UNIT_LAYERLEVEL" val="1"/>
-  <p:tag name="KSO_WM_TAG_VERSION" val="3.0"/>
-  <p:tag name="KSO_WM_BEAUTIFY_FLAG" val="#wm#"/>
-</p:tagLst>
-</file>
-
-<file path=ppt/tags/tag9.xml><?xml version="1.0" encoding="utf-8"?>
-<p:tagLst xmlns:p="http://schemas.openxmlformats.org/presentationml/2006/main">
-  <p:tag name="KSO_WM_UNIT_SUBTYPE" val="b"/>
-  <p:tag name="KSO_WM_UNIT_PRESET_TEXT" val="汇报人：稻小壳"/>
-  <p:tag name="KSO_WM_UNIT_NOCLEAR" val="0"/>
-  <p:tag name="KSO_WM_UNIT_VALUE" val="60"/>
-  <p:tag name="KSO_WM_UNIT_HIGHLIGHT" val="0"/>
-  <p:tag name="KSO_WM_UNIT_COMPATIBLE" val="0"/>
-  <p:tag name="KSO_WM_UNIT_DIAGRAM_ISNUMVISUAL" val="0"/>
-  <p:tag name="KSO_WM_UNIT_DIAGRAM_ISREFERUNIT" val="0"/>
-  <p:tag name="KSO_WM_UNIT_CONTENT_GROUP_TYPE" val="contentchip"/>
-  <p:tag name="KSO_WM_UNIT_TYPE" val="f"/>
-  <p:tag name="KSO_WM_UNIT_INDEX" val="1"/>
-  <p:tag name="KSO_WM_UNIT_ID" val="_1*f*1"/>
-  <p:tag name="KSO_WM_UNIT_LAYERLEVEL" val="1"/>
-  <p:tag name="KSO_WM_TAG_VERSION" val="3.0"/>
-  <p:tag name="KSO_WM_BEAUTIFY_FLAG" val="#wm#"/>
-</p:tagLst>
-</file>
-
-<file path=ppt/tags/tag90.xml><?xml version="1.0" encoding="utf-8"?>
-<p:tagLst xmlns:p="http://schemas.openxmlformats.org/presentationml/2006/main">
-  <p:tag name="KSO_WM_UNIT_HIGHLIGHT" val="0"/>
-  <p:tag name="KSO_WM_UNIT_COMPATIBLE" val="0"/>
-  <p:tag name="KSO_WM_UNIT_DIAGRAM_ISNUMVISUAL" val="0"/>
-  <p:tag name="KSO_WM_UNIT_DIAGRAM_ISREFERUNIT" val="0"/>
-  <p:tag name="KSO_WM_UNIT_CONTENT_GROUP_TYPE" val="contentchip"/>
-  <p:tag name="KSO_WM_UNIT_TYPE" val="i"/>
-  <p:tag name="KSO_WM_UNIT_INDEX" val="3"/>
-  <p:tag name="KSO_WM_UNIT_ID" val="_11*i*3"/>
-  <p:tag name="KSO_WM_UNIT_LAYERLEVEL" val="1"/>
-  <p:tag name="KSO_WM_TAG_VERSION" val="3.0"/>
-  <p:tag name="KSO_WM_BEAUTIFY_FLAG" val="#wm#"/>
-</p:tagLst>
-</file>
-
-<file path=ppt/tags/tag91.xml><?xml version="1.0" encoding="utf-8"?>
-<p:tagLst xmlns:p="http://schemas.openxmlformats.org/presentationml/2006/main">
-  <p:tag name="KSO_WM_UNIT_HIGHLIGHT" val="0"/>
-  <p:tag name="KSO_WM_UNIT_COMPATIBLE" val="0"/>
-  <p:tag name="KSO_WM_UNIT_DIAGRAM_ISNUMVISUAL" val="0"/>
-  <p:tag name="KSO_WM_UNIT_DIAGRAM_ISREFERUNIT" val="0"/>
-  <p:tag name="KSO_WM_UNIT_CONTENT_GROUP_TYPE" val="contentchip"/>
-  <p:tag name="KSO_WM_UNIT_TYPE" val="i"/>
-  <p:tag name="KSO_WM_UNIT_INDEX" val="4"/>
-  <p:tag name="KSO_WM_UNIT_ID" val="_11*i*4"/>
-  <p:tag name="KSO_WM_UNIT_LAYERLEVEL" val="1"/>
-  <p:tag name="KSO_WM_TAG_VERSION" val="3.0"/>
-  <p:tag name="KSO_WM_BEAUTIFY_FLAG" val="#wm#"/>
-</p:tagLst>
-</file>
-
-<file path=ppt/tags/tag92.xml><?xml version="1.0" encoding="utf-8"?>
-<p:tagLst xmlns:p="http://schemas.openxmlformats.org/presentationml/2006/main">
-  <p:tag name="KSO_WM_UNIT_HIGHLIGHT" val="0"/>
-  <p:tag name="KSO_WM_UNIT_COMPATIBLE" val="0"/>
-  <p:tag name="KSO_WM_UNIT_DIAGRAM_ISNUMVISUAL" val="0"/>
-  <p:tag name="KSO_WM_UNIT_DIAGRAM_ISREFERUNIT" val="0"/>
-  <p:tag name="KSO_WM_UNIT_TYPE" val="i"/>
-  <p:tag name="KSO_WM_UNIT_INDEX" val="5"/>
-  <p:tag name="KSO_WM_UNIT_ID" val="_11*i*5"/>
-  <p:tag name="KSO_WM_UNIT_LAYERLEVEL" val="1"/>
-  <p:tag name="KSO_WM_TAG_VERSION" val="3.0"/>
-  <p:tag name="KSO_WM_BEAUTIFY_FLAG" val="#wm#"/>
-</p:tagLst>
-</file>
-
-<file path=ppt/tags/tag93.xml><?xml version="1.0" encoding="utf-8"?>
-<p:tagLst xmlns:p="http://schemas.openxmlformats.org/presentationml/2006/main">
-  <p:tag name="KSO_WM_UNIT_HIGHLIGHT" val="0"/>
-  <p:tag name="KSO_WM_UNIT_COMPATIBLE" val="0"/>
-  <p:tag name="KSO_WM_UNIT_DIAGRAM_ISNUMVISUAL" val="0"/>
-  <p:tag name="KSO_WM_UNIT_DIAGRAM_ISREFERUNIT" val="0"/>
-  <p:tag name="KSO_WM_UNIT_TYPE" val="i"/>
-  <p:tag name="KSO_WM_UNIT_INDEX" val="6"/>
-  <p:tag name="KSO_WM_UNIT_ID" val="_11*i*6"/>
-  <p:tag name="KSO_WM_UNIT_LAYERLEVEL" val="1"/>
-  <p:tag name="KSO_WM_TAG_VERSION" val="3.0"/>
-  <p:tag name="KSO_WM_BEAUTIFY_FLAG" val="#wm#"/>
-</p:tagLst>
-</file>
-
-<file path=ppt/tags/tag94.xml><?xml version="1.0" encoding="utf-8"?>
-<p:tagLst xmlns:p="http://schemas.openxmlformats.org/presentationml/2006/main">
-  <p:tag name="KSO_WM_UNIT_HIGHLIGHT" val="0"/>
-  <p:tag name="KSO_WM_UNIT_COMPATIBLE" val="0"/>
-  <p:tag name="KSO_WM_UNIT_DIAGRAM_ISNUMVISUAL" val="0"/>
-  <p:tag name="KSO_WM_UNIT_DIAGRAM_ISREFERUNIT" val="0"/>
-  <p:tag name="KSO_WM_UNIT_TYPE" val="i"/>
-  <p:tag name="KSO_WM_UNIT_INDEX" val="7"/>
-  <p:tag name="KSO_WM_UNIT_ID" val="_11*i*7"/>
-  <p:tag name="KSO_WM_UNIT_LAYERLEVEL" val="1"/>
-  <p:tag name="KSO_WM_TAG_VERSION" val="3.0"/>
-  <p:tag name="KSO_WM_BEAUTIFY_FLAG" val="#wm#"/>
-</p:tagLst>
-</file>
-
-<file path=ppt/tags/tag95.xml><?xml version="1.0" encoding="utf-8"?>
-<p:tagLst xmlns:p="http://schemas.openxmlformats.org/presentationml/2006/main">
-  <p:tag name="KSO_WM_UNIT_HIGHLIGHT" val="0"/>
-  <p:tag name="KSO_WM_UNIT_COMPATIBLE" val="0"/>
-  <p:tag name="KSO_WM_UNIT_DIAGRAM_ISNUMVISUAL" val="0"/>
-  <p:tag name="KSO_WM_UNIT_DIAGRAM_ISREFERUNIT" val="0"/>
-  <p:tag name="KSO_WM_UNIT_TYPE" val="i"/>
-  <p:tag name="KSO_WM_UNIT_INDEX" val="8"/>
-  <p:tag name="KSO_WM_UNIT_ID" val="_11*i*8"/>
-  <p:tag name="KSO_WM_UNIT_LAYERLEVEL" val="1"/>
-  <p:tag name="KSO_WM_TAG_VERSION" val="3.0"/>
-  <p:tag name="KSO_WM_BEAUTIFY_FLAG" val="#wm#"/>
-</p:tagLst>
-</file>
-
-<file path=ppt/tags/tag96.xml><?xml version="1.0" encoding="utf-8"?>
-<p:tagLst xmlns:p="http://schemas.openxmlformats.org/presentationml/2006/main">
-  <p:tag name="KSO_WM_UNIT_SUBTYPE" val="b"/>
-  <p:tag name="KSO_WM_UNIT_PRESET_TEXT" val="汇报人：稻小壳"/>
-  <p:tag name="KSO_WM_UNIT_NOCLEAR" val="0"/>
-  <p:tag name="KSO_WM_UNIT_VALUE" val="60"/>
-  <p:tag name="KSO_WM_UNIT_HIGHLIGHT" val="0"/>
-  <p:tag name="KSO_WM_UNIT_COMPATIBLE" val="0"/>
-  <p:tag name="KSO_WM_UNIT_DIAGRAM_ISNUMVISUAL" val="0"/>
-  <p:tag name="KSO_WM_UNIT_DIAGRAM_ISREFERUNIT" val="0"/>
-  <p:tag name="KSO_WM_UNIT_CONTENT_GROUP_TYPE" val="contentchip"/>
-  <p:tag name="KSO_WM_UNIT_TYPE" val="f"/>
-  <p:tag name="KSO_WM_UNIT_INDEX" val="1"/>
-  <p:tag name="KSO_WM_UNIT_ID" val="_11*f*1"/>
-  <p:tag name="KSO_WM_UNIT_LAYERLEVEL" val="1"/>
-  <p:tag name="KSO_WM_TAG_VERSION" val="3.0"/>
-  <p:tag name="KSO_WM_BEAUTIFY_FLAG" val="#wm#"/>
-</p:tagLst>
-</file>
-
-<file path=ppt/tags/tag97.xml><?xml version="1.0" encoding="utf-8"?>
-<p:tagLst xmlns:p="http://schemas.openxmlformats.org/presentationml/2006/main">
-  <p:tag name="KSO_WM_UNIT_ISCONTENTSTITLE" val="0"/>
-  <p:tag name="KSO_WM_UNIT_ISNUMDGMTITLE" val="0"/>
-  <p:tag name="KSO_WM_UNIT_PRESET_TEXT" val="THANKS"/>
-  <p:tag name="KSO_WM_UNIT_NOCLEAR" val="0"/>
-  <p:tag name="KSO_WM_UNIT_VALUE" val="10"/>
-  <p:tag name="KSO_WM_UNIT_HIGHLIGHT" val="0"/>
-  <p:tag name="KSO_WM_UNIT_COMPATIBLE" val="0"/>
-  <p:tag name="KSO_WM_UNIT_DIAGRAM_ISNUMVISUAL" val="0"/>
-  <p:tag name="KSO_WM_UNIT_DIAGRAM_ISREFERUNIT" val="0"/>
-  <p:tag name="KSO_WM_UNIT_CONTENT_GROUP_TYPE" val="contentchip"/>
-  <p:tag name="KSO_WM_UNIT_TYPE" val="a"/>
-  <p:tag name="KSO_WM_UNIT_INDEX" val="1"/>
-  <p:tag name="KSO_WM_UNIT_ID" val="_11*a*1"/>
-  <p:tag name="KSO_WM_UNIT_LAYERLEVEL" val="1"/>
-  <p:tag name="KSO_WM_TAG_VERSION" val="3.0"/>
-  <p:tag name="KSO_WM_BEAUTIFY_FLAG" val="#wm#"/>
-</p:tagLst>
-</file>
-
-<file path=ppt/tags/tag98.xml><?xml version="1.0" encoding="utf-8"?>
-<p:tagLst xmlns:p="http://schemas.openxmlformats.org/presentationml/2006/main">
-  <p:tag name="KSO_WM_UNIT_HIGHLIGHT" val="0"/>
-  <p:tag name="KSO_WM_UNIT_COMPATIBLE" val="0"/>
-  <p:tag name="KSO_WM_UNIT_DIAGRAM_ISNUMVISUAL" val="0"/>
-  <p:tag name="KSO_WM_UNIT_DIAGRAM_ISREFERUNIT" val="0"/>
-  <p:tag name="KSO_WM_UNIT_ID" val="_11**"/>
-  <p:tag name="KSO_WM_UNIT_LAYERLEVEL" val="1"/>
-  <p:tag name="KSO_WM_TAG_VERSION" val="3.0"/>
-  <p:tag name="KSO_WM_BEAUTIFY_FLAG" val="#wm#"/>
-</p:tagLst>
-</file>
-
-<file path=ppt/tags/tag99.xml><?xml version="1.0" encoding="utf-8"?>
-<p:tagLst xmlns:p="http://schemas.openxmlformats.org/presentationml/2006/main">
-  <p:tag name="KSO_WM_UNIT_HIGHLIGHT" val="0"/>
-  <p:tag name="KSO_WM_UNIT_COMPATIBLE" val="0"/>
-  <p:tag name="KSO_WM_UNIT_DIAGRAM_ISNUMVISUAL" val="0"/>
-  <p:tag name="KSO_WM_UNIT_DIAGRAM_ISREFERUNIT" val="0"/>
-  <p:tag name="KSO_WM_UNIT_ID" val="_11**"/>
   <p:tag name="KSO_WM_UNIT_LAYERLEVEL" val="1"/>
   <p:tag name="KSO_WM_TAG_VERSION" val="3.0"/>
   <p:tag name="KSO_WM_BEAUTIFY_FLAG" val="#wm#"/>
@@ -18766,6 +18080,8 @@
       </a:bgFillStyleLst>
     </a:fmtScheme>
   </a:themeElements>
+  <a:objectDefaults/>
+  <a:extraClrSchemeLst/>
   <a:extLst>
     <a:ext uri="{05A4C25C-085E-4340-85A3-A5531E510DB2}">
       <thm15:themeFamily xmlns:thm15="http://schemas.microsoft.com/office/thememl/2012/main" name="Office Theme" id="{62F939B6-93AF-4DB8-9C6B-D6C7DFDC589F}" vid="{4A3C46E8-61CC-4603-A589-7422A47A8E4A}"/>
@@ -19002,6 +18318,7 @@
       </a:style>
     </a:spDef>
   </a:objectDefaults>
+  <a:extraClrSchemeLst/>
   <a:extLst>
     <a:ext uri="{05A4C25C-085E-4340-85A3-A5531E510DB2}">
       <thm15:themeFamily xmlns:thm15="http://schemas.microsoft.com/office/thememl/2012/main" name="Office Theme" id="{62F939B6-93AF-4DB8-9C6B-D6C7DFDC589F}" vid="{4A3C46E8-61CC-4603-A589-7422A47A8E4A}"/>
@@ -19261,6 +18578,8 @@
       </a:bgFillStyleLst>
     </a:fmtScheme>
   </a:themeElements>
+  <a:objectDefaults/>
+  <a:extraClrSchemeLst/>
   <a:extLst>
     <a:ext uri="{05A4C25C-085E-4340-85A3-A5531E510DB2}">
       <thm15:themeFamily xmlns:thm15="http://schemas.microsoft.com/office/thememl/2012/main" name="Office Theme" id="{62F939B6-93AF-4DB8-9C6B-D6C7DFDC589F}" vid="{4A3C46E8-61CC-4603-A589-7422A47A8E4A}"/>
@@ -19520,6 +18839,8 @@
       </a:bgFillStyleLst>
     </a:fmtScheme>
   </a:themeElements>
+  <a:objectDefaults/>
+  <a:extraClrSchemeLst/>
   <a:extLst>
     <a:ext uri="{05A4C25C-085E-4340-85A3-A5531E510DB2}">
       <thm15:themeFamily xmlns:thm15="http://schemas.microsoft.com/office/thememl/2012/main" name="Office Theme" id="{62F939B6-93AF-4DB8-9C6B-D6C7DFDC589F}" vid="{4A3C46E8-61CC-4603-A589-7422A47A8E4A}"/>
